--- a/docs/宋焕莲-AI赋能：需求开发到自动化测试.pptx
+++ b/docs/宋焕莲-AI赋能：需求开发到自动化测试.pptx
@@ -3650,23 +3650,379 @@
           <a:chExt cx="0" cy="0"/>
         </a:xfrm>
       </p:grpSpPr>
+      <p:sp>
+        <p:nvSpPr>
+          <p:cNvPr id="32" name="TextBox 32"/>
+          <p:cNvSpPr txBox="1"/>
+          <p:nvPr/>
+        </p:nvSpPr>
+        <p:spPr>
+          <a:xfrm>
+            <a:off x="11103540" y="6497002"/>
+            <a:ext cx="484194" cy="205359"/>
+          </a:xfrm>
+          <a:prstGeom prst="rect">
+            <a:avLst/>
+          </a:prstGeom>
+          <a:noFill/>
+          <a:ln>
+            <a:noFill/>
+          </a:ln>
+        </p:spPr>
+        <p:txBody>
+          <a:bodyPr wrap="none" lIns="0" tIns="0" rIns="0" bIns="0" anchor="t" anchorCtr="0">
+            <a:spAutoFit/>
+          </a:bodyPr>
+          <a:lstStyle/>
+          <a:p>
+            <a:pPr algn="r"/>
+            <a:r>
+              <a:rPr lang="zh-CN" sz="1050" dirty="0">
+                <a:solidFill>
+                  <a:schemeClr val="accent6"/>
+                </a:solidFill>
+                <a:latin typeface="+mn-lt"/>
+                <a:ea typeface="+mn-ea"/>
+                <a:cs typeface="+mn-cs"/>
+              </a:rPr>
+              <a:t>10 / 23</a:t>
+            </a:r>
+            <a:endParaRPr lang="zh-CN" sz="1050" dirty="0">
+              <a:solidFill>
+                <a:schemeClr val="accent6"/>
+              </a:solidFill>
+              <a:latin typeface="+mn-lt"/>
+              <a:ea typeface="+mn-ea"/>
+              <a:cs typeface="+mn-cs"/>
+            </a:endParaRPr>
+          </a:p>
+        </p:txBody>
+      </p:sp>
       <p:grpSp>
         <p:nvGrpSpPr>
-          <p:cNvPr id="4" name="Group 4"/>
+          <p:cNvPr id="42" name="Group 10"/>
+          <p:cNvGrpSpPr/>
+          <p:nvPr/>
+        </p:nvGrpSpPr>
+        <p:grpSpPr>
+          <a:xfrm>
+            <a:off x="7467600" y="114300"/>
+            <a:ext cx="4114800" cy="266700"/>
+            <a:chOff x="7467600" y="114300"/>
+            <a:chExt cx="4114800" cy="266700"/>
+          </a:xfrm>
+        </p:grpSpPr>
+        <p:sp>
+          <p:nvSpPr>
+            <p:cNvPr id="43" name="Rectangle 2"/>
+            <p:cNvSpPr/>
+            <p:nvPr/>
+          </p:nvSpPr>
+          <p:spPr>
+            <a:xfrm>
+              <a:off x="7467600" y="114300"/>
+              <a:ext cx="1219200" cy="266700"/>
+            </a:xfrm>
+            <a:prstGeom prst="roundRect">
+              <a:avLst>
+                <a:gd name="adj" fmla="val 50000"/>
+              </a:avLst>
+            </a:prstGeom>
+            <a:solidFill>
+              <a:schemeClr val="accent5"/>
+            </a:solidFill>
+            <a:ln>
+              <a:noFill/>
+            </a:ln>
+          </p:spPr>
+        </p:sp>
+        <p:sp>
+          <p:nvSpPr>
+            <p:cNvPr id="44" name="TextBox 3"/>
+            <p:cNvSpPr txBox="1"/>
+            <p:nvPr/>
+          </p:nvSpPr>
+          <p:spPr>
+            <a:xfrm>
+              <a:off x="7808392" y="190024"/>
+              <a:ext cx="537616" cy="190690"/>
+            </a:xfrm>
+            <a:prstGeom prst="rect">
+              <a:avLst/>
+            </a:prstGeom>
+            <a:noFill/>
+            <a:ln>
+              <a:noFill/>
+            </a:ln>
+          </p:spPr>
+          <p:txBody>
+            <a:bodyPr wrap="none" lIns="0" tIns="0" rIns="0" bIns="0" anchor="t" anchorCtr="0">
+              <a:spAutoFit/>
+            </a:bodyPr>
+            <a:p>
+              <a:pPr algn="ctr"/>
+              <a:r>
+                <a:rPr lang="zh-CN" sz="980" dirty="0">
+                  <a:solidFill>
+                    <a:schemeClr val="accent1"/>
+                  </a:solidFill>
+                  <a:latin typeface="+mn-lt"/>
+                  <a:ea typeface="+mn-ea"/>
+                  <a:cs typeface="+mn-cs"/>
+                </a:rPr>
+                <a:t>协同方案</a:t>
+              </a:r>
+              <a:endParaRPr lang="zh-CN" sz="980" dirty="0">
+                <a:solidFill>
+                  <a:schemeClr val="accent1"/>
+                </a:solidFill>
+                <a:latin typeface="+mn-lt"/>
+                <a:ea typeface="+mn-ea"/>
+                <a:cs typeface="+mn-cs"/>
+              </a:endParaRPr>
+            </a:p>
+          </p:txBody>
+        </p:sp>
+        <p:sp>
+          <p:nvSpPr>
+            <p:cNvPr id="45" name="Polygon 4"/>
+            <p:cNvSpPr/>
+            <p:nvPr/>
+          </p:nvSpPr>
+          <p:spPr>
+            <a:xfrm>
+              <a:off x="8763000" y="190500"/>
+              <a:ext cx="95250" cy="114300"/>
+            </a:xfrm>
+            <a:custGeom>
+              <a:avLst/>
+              <a:gdLst/>
+              <a:ahLst/>
+              <a:cxnLst/>
+              <a:rect l="l" t="t" r="r" b="b"/>
+              <a:pathLst>
+                <a:path w="95250" h="114300">
+                  <a:moveTo>
+                    <a:pt x="0" y="0"/>
+                  </a:moveTo>
+                  <a:lnTo>
+                    <a:pt x="95250" y="57150"/>
+                  </a:lnTo>
+                  <a:lnTo>
+                    <a:pt x="0" y="114300"/>
+                  </a:lnTo>
+                  <a:close/>
+                </a:path>
+              </a:pathLst>
+            </a:custGeom>
+            <a:solidFill>
+              <a:srgbClr val="595959"/>
+            </a:solidFill>
+            <a:ln>
+              <a:noFill/>
+            </a:ln>
+          </p:spPr>
+        </p:sp>
+        <p:sp>
+          <p:nvSpPr>
+            <p:cNvPr id="46" name="Rectangle 5"/>
+            <p:cNvSpPr/>
+            <p:nvPr/>
+          </p:nvSpPr>
+          <p:spPr>
+            <a:xfrm>
+              <a:off x="8915400" y="114300"/>
+              <a:ext cx="1219200" cy="266700"/>
+            </a:xfrm>
+            <a:prstGeom prst="roundRect">
+              <a:avLst>
+                <a:gd name="adj" fmla="val 50000"/>
+              </a:avLst>
+            </a:prstGeom>
+            <a:solidFill>
+              <a:schemeClr val="accent1"/>
+            </a:solidFill>
+            <a:ln>
+              <a:noFill/>
+            </a:ln>
+          </p:spPr>
+        </p:sp>
+        <p:sp>
+          <p:nvSpPr>
+            <p:cNvPr id="47" name="TextBox 6"/>
+            <p:cNvSpPr txBox="1"/>
+            <p:nvPr/>
+          </p:nvSpPr>
+          <p:spPr>
+            <a:xfrm>
+              <a:off x="9190228" y="190024"/>
+              <a:ext cx="669544" cy="190690"/>
+            </a:xfrm>
+            <a:prstGeom prst="rect">
+              <a:avLst/>
+            </a:prstGeom>
+            <a:noFill/>
+            <a:ln>
+              <a:noFill/>
+            </a:ln>
+          </p:spPr>
+          <p:txBody>
+            <a:bodyPr wrap="none" lIns="0" tIns="0" rIns="0" bIns="0" anchor="t" anchorCtr="0">
+              <a:spAutoFit/>
+            </a:bodyPr>
+            <a:p>
+              <a:pPr algn="ctr"/>
+              <a:r>
+                <a:rPr lang="zh-CN" sz="980" b="1" dirty="0">
+                  <a:solidFill>
+                    <a:srgbClr val="FFFFFF"/>
+                  </a:solidFill>
+                  <a:latin typeface="+mn-lt"/>
+                  <a:ea typeface="+mn-ea"/>
+                  <a:cs typeface="+mn-cs"/>
+                </a:rPr>
+                <a:t>自动化测试</a:t>
+              </a:r>
+              <a:endParaRPr lang="zh-CN" sz="980" b="1" dirty="0">
+                <a:solidFill>
+                  <a:srgbClr val="FFFFFF"/>
+                </a:solidFill>
+                <a:latin typeface="+mn-lt"/>
+                <a:ea typeface="+mn-ea"/>
+                <a:cs typeface="+mn-cs"/>
+              </a:endParaRPr>
+            </a:p>
+          </p:txBody>
+        </p:sp>
+        <p:sp>
+          <p:nvSpPr>
+            <p:cNvPr id="48" name="Polygon 7"/>
+            <p:cNvSpPr/>
+            <p:nvPr/>
+          </p:nvSpPr>
+          <p:spPr>
+            <a:xfrm>
+              <a:off x="10210800" y="190500"/>
+              <a:ext cx="95250" cy="114300"/>
+            </a:xfrm>
+            <a:custGeom>
+              <a:avLst/>
+              <a:gdLst/>
+              <a:ahLst/>
+              <a:cxnLst/>
+              <a:rect l="l" t="t" r="r" b="b"/>
+              <a:pathLst>
+                <a:path w="95250" h="114300">
+                  <a:moveTo>
+                    <a:pt x="0" y="0"/>
+                  </a:moveTo>
+                  <a:lnTo>
+                    <a:pt x="95250" y="57150"/>
+                  </a:lnTo>
+                  <a:lnTo>
+                    <a:pt x="0" y="114300"/>
+                  </a:lnTo>
+                  <a:close/>
+                </a:path>
+              </a:pathLst>
+            </a:custGeom>
+            <a:solidFill>
+              <a:srgbClr val="595959"/>
+            </a:solidFill>
+            <a:ln>
+              <a:noFill/>
+            </a:ln>
+          </p:spPr>
+        </p:sp>
+        <p:sp>
+          <p:nvSpPr>
+            <p:cNvPr id="49" name="Rectangle 8"/>
+            <p:cNvSpPr/>
+            <p:nvPr/>
+          </p:nvSpPr>
+          <p:spPr>
+            <a:xfrm>
+              <a:off x="10363200" y="114300"/>
+              <a:ext cx="1219200" cy="266700"/>
+            </a:xfrm>
+            <a:prstGeom prst="roundRect">
+              <a:avLst>
+                <a:gd name="adj" fmla="val 50000"/>
+              </a:avLst>
+            </a:prstGeom>
+            <a:solidFill>
+              <a:schemeClr val="accent5"/>
+            </a:solidFill>
+            <a:ln>
+              <a:noFill/>
+            </a:ln>
+          </p:spPr>
+        </p:sp>
+        <p:sp>
+          <p:nvSpPr>
+            <p:cNvPr id="50" name="TextBox 9"/>
+            <p:cNvSpPr txBox="1"/>
+            <p:nvPr/>
+          </p:nvSpPr>
+          <p:spPr>
+            <a:xfrm>
+              <a:off x="10703992" y="190024"/>
+              <a:ext cx="537616" cy="190690"/>
+            </a:xfrm>
+            <a:prstGeom prst="rect">
+              <a:avLst/>
+            </a:prstGeom>
+            <a:noFill/>
+            <a:ln>
+              <a:noFill/>
+            </a:ln>
+          </p:spPr>
+          <p:txBody>
+            <a:bodyPr wrap="none" lIns="0" tIns="0" rIns="0" bIns="0" anchor="t" anchorCtr="0">
+              <a:spAutoFit/>
+            </a:bodyPr>
+            <a:p>
+              <a:pPr algn="ctr"/>
+              <a:r>
+                <a:rPr lang="zh-CN" sz="980" dirty="0">
+                  <a:solidFill>
+                    <a:schemeClr val="accent1"/>
+                  </a:solidFill>
+                  <a:latin typeface="+mn-lt"/>
+                  <a:ea typeface="+mn-ea"/>
+                  <a:cs typeface="+mn-cs"/>
+                </a:rPr>
+                <a:t>实战案例</a:t>
+              </a:r>
+              <a:endParaRPr lang="zh-CN" sz="980" dirty="0">
+                <a:solidFill>
+                  <a:schemeClr val="accent1"/>
+                </a:solidFill>
+                <a:latin typeface="+mn-lt"/>
+                <a:ea typeface="+mn-ea"/>
+                <a:cs typeface="+mn-cs"/>
+              </a:endParaRPr>
+            </a:p>
+          </p:txBody>
+        </p:sp>
+      </p:grpSp>
+      <p:grpSp>
+        <p:nvGrpSpPr>
+          <p:cNvPr id="51" name="Group 13"/>
           <p:cNvGrpSpPr/>
           <p:nvPr/>
         </p:nvGrpSpPr>
         <p:grpSpPr>
           <a:xfrm>
             <a:off x="609600" y="568642"/>
-            <a:ext cx="6632083" cy="557403"/>
+            <a:ext cx="7017922" cy="557403"/>
             <a:chOff x="609600" y="568642"/>
-            <a:chExt cx="6632083" cy="557403"/>
+            <a:chExt cx="7017922" cy="557403"/>
           </a:xfrm>
         </p:grpSpPr>
         <p:sp>
           <p:nvSpPr>
-            <p:cNvPr id="2" name="Rectangle 2"/>
+            <p:cNvPr id="52" name="Rectangle 11"/>
             <p:cNvSpPr/>
             <p:nvPr/>
           </p:nvSpPr>
@@ -3688,28 +4044,27 @@
         </p:sp>
         <p:sp>
           <p:nvSpPr>
-            <p:cNvPr id="3" name="TextBox 3"/>
+            <p:cNvPr id="53" name="TextBox 12"/>
             <p:cNvSpPr txBox="1"/>
             <p:nvPr/>
           </p:nvSpPr>
           <p:spPr>
             <a:xfrm>
               <a:off x="861822" y="568642"/>
-              <a:ext cx="6379861" cy="557403"/>
-            </a:xfrm>
-            <a:prstGeom prst="rect">
-              <a:avLst/>
-            </a:prstGeom>
-            <a:noFill/>
-            <a:ln>
-              <a:noFill/>
-            </a:ln>
-          </p:spPr>
-          <p:txBody>
-            <a:bodyPr wrap="none" lIns="0" tIns="0" rIns="0" bIns="0" anchor="t" anchorCtr="0">
-              <a:spAutoFit/>
-            </a:bodyPr>
-            <a:lstStyle/>
+              <a:ext cx="6765700" cy="557403"/>
+            </a:xfrm>
+            <a:prstGeom prst="rect">
+              <a:avLst/>
+            </a:prstGeom>
+            <a:noFill/>
+            <a:ln>
+              <a:noFill/>
+            </a:ln>
+          </p:spPr>
+          <p:txBody>
+            <a:bodyPr wrap="none" lIns="0" tIns="0" rIns="0" bIns="0" anchor="t" anchorCtr="0">
+              <a:spAutoFit/>
+            </a:bodyPr>
             <a:p>
               <a:pPr algn="l"/>
               <a:r>
@@ -3721,7 +4076,7 @@
                   <a:ea typeface="+mn-ea"/>
                   <a:cs typeface="+mn-cs"/>
                 </a:rPr>
-                <a:t>Playwright：现代浏览器自动化框架</a:t>
+                <a:t>Playwright：新一代浏览器自动化框架</a:t>
               </a:r>
               <a:endParaRPr lang="zh-CN" sz="2850" b="1" dirty="0">
                 <a:solidFill>
@@ -3737,32 +4092,32 @@
       </p:grpSp>
       <p:grpSp>
         <p:nvGrpSpPr>
-          <p:cNvPr id="13" name="Group 13"/>
+          <p:cNvPr id="54" name="Group 22"/>
           <p:cNvGrpSpPr/>
           <p:nvPr/>
         </p:nvGrpSpPr>
         <p:grpSpPr>
           <a:xfrm>
-            <a:off x="609600" y="1524000"/>
-            <a:ext cx="3505200" cy="3238500"/>
-            <a:chOff x="609600" y="1524000"/>
-            <a:chExt cx="3505200" cy="3238500"/>
+            <a:off x="609600" y="1181100"/>
+            <a:ext cx="5334000" cy="1866900"/>
+            <a:chOff x="609600" y="1181100"/>
+            <a:chExt cx="5334000" cy="1866900"/>
           </a:xfrm>
         </p:grpSpPr>
         <p:sp>
           <p:nvSpPr>
-            <p:cNvPr id="5" name="Rectangle 5"/>
+            <p:cNvPr id="55" name="Rectangle 14"/>
             <p:cNvSpPr/>
             <p:nvPr/>
           </p:nvSpPr>
           <p:spPr>
             <a:xfrm>
-              <a:off x="609600" y="1524000"/>
-              <a:ext cx="3505200" cy="3238500"/>
+              <a:off x="609600" y="1181100"/>
+              <a:ext cx="5334000" cy="1866900"/>
             </a:xfrm>
             <a:prstGeom prst="roundRect">
               <a:avLst>
-                <a:gd name="adj" fmla="val 2353"/>
+                <a:gd name="adj" fmla="val 4082"/>
               </a:avLst>
             </a:prstGeom>
             <a:solidFill>
@@ -3775,14 +4130,14 @@
         </p:sp>
         <p:sp>
           <p:nvSpPr>
-            <p:cNvPr id="6" name="Ellipse 6"/>
+            <p:cNvPr id="56" name="Ellipse 15"/>
             <p:cNvSpPr/>
             <p:nvPr/>
           </p:nvSpPr>
           <p:spPr>
             <a:xfrm>
-              <a:off x="876300" y="1866900"/>
-              <a:ext cx="685800" cy="685800"/>
+              <a:off x="914400" y="1409700"/>
+              <a:ext cx="609600" cy="609600"/>
             </a:xfrm>
             <a:prstGeom prst="ellipse">
               <a:avLst/>
@@ -3797,27 +4152,93 @@
         </p:sp>
         <p:grpSp>
           <p:nvGrpSpPr>
-            <p:cNvPr id="10" name="Group 10"/>
+            <p:cNvPr id="57" name="Group 19"/>
             <p:cNvGrpSpPr/>
             <p:nvPr/>
           </p:nvGrpSpPr>
           <p:grpSpPr>
             <a:xfrm>
-              <a:off x="1123950" y="2114550"/>
+              <a:off x="1123950" y="1619250"/>
               <a:ext cx="190500" cy="190500"/>
-              <a:chOff x="1123950" y="2114550"/>
+              <a:chOff x="1123950" y="1619250"/>
               <a:chExt cx="190500" cy="190500"/>
             </a:xfrm>
           </p:grpSpPr>
           <p:sp>
             <p:nvSpPr>
-              <p:cNvPr id="7" name="Freeform 7"/>
+              <p:cNvPr id="58" name="Freeform 16"/>
               <p:cNvSpPr/>
               <p:nvPr/>
             </p:nvSpPr>
             <p:spPr>
               <a:xfrm>
-                <a:off x="1123950" y="2162175"/>
+                <a:off x="1123950" y="1619250"/>
+                <a:ext cx="190500" cy="190500"/>
+              </a:xfrm>
+              <a:custGeom>
+                <a:avLst/>
+                <a:gdLst/>
+                <a:ahLst/>
+                <a:cxnLst/>
+                <a:rect l="l" t="t" r="r" b="b"/>
+                <a:pathLst>
+                  <a:path w="190500" h="190500">
+                    <a:moveTo>
+                      <a:pt x="11906" y="0"/>
+                    </a:moveTo>
+                    <a:lnTo>
+                      <a:pt x="178594" y="0"/>
+                    </a:lnTo>
+                    <a:cubicBezTo>
+                      <a:pt x="185169" y="0"/>
+                      <a:pt x="190500" y="5331"/>
+                      <a:pt x="190500" y="11906"/>
+                    </a:cubicBezTo>
+                    <a:lnTo>
+                      <a:pt x="190500" y="178594"/>
+                    </a:lnTo>
+                    <a:cubicBezTo>
+                      <a:pt x="190500" y="185169"/>
+                      <a:pt x="185169" y="190500"/>
+                      <a:pt x="178594" y="190500"/>
+                    </a:cubicBezTo>
+                    <a:lnTo>
+                      <a:pt x="11906" y="190500"/>
+                    </a:lnTo>
+                    <a:cubicBezTo>
+                      <a:pt x="5331" y="190500"/>
+                      <a:pt x="0" y="185169"/>
+                      <a:pt x="0" y="178594"/>
+                    </a:cubicBezTo>
+                    <a:lnTo>
+                      <a:pt x="0" y="11906"/>
+                    </a:lnTo>
+                    <a:cubicBezTo>
+                      <a:pt x="0" y="5331"/>
+                      <a:pt x="5331" y="0"/>
+                      <a:pt x="11906" y="0"/>
+                    </a:cubicBezTo>
+                  </a:path>
+                </a:pathLst>
+              </a:custGeom>
+              <a:noFill/>
+              <a:ln w="21431" cap="rnd">
+                <a:solidFill>
+                  <a:schemeClr val="accent1"/>
+                </a:solidFill>
+                <a:round/>
+              </a:ln>
+            </p:spPr>
+          </p:sp>
+          <p:sp>
+            <p:nvSpPr>
+              <p:cNvPr id="59" name="Freeform 17"/>
+              <p:cNvSpPr/>
+              <p:nvPr/>
+            </p:nvSpPr>
+            <p:spPr>
+              <a:xfrm>
+                <a:off x="1123950" y="1666875"/>
                 <a:ext cx="190500" cy="9525"/>
               </a:xfrm>
               <a:custGeom>
@@ -3848,79 +4269,13 @@
           </p:sp>
           <p:sp>
             <p:nvSpPr>
-              <p:cNvPr id="8" name="Freeform 8"/>
+              <p:cNvPr id="60" name="Freeform 18"/>
               <p:cNvSpPr/>
               <p:nvPr/>
             </p:nvSpPr>
             <p:spPr>
               <a:xfrm>
-                <a:off x="1123950" y="2114550"/>
-                <a:ext cx="190500" cy="190500"/>
-              </a:xfrm>
-              <a:custGeom>
-                <a:avLst/>
-                <a:gdLst/>
-                <a:ahLst/>
-                <a:cxnLst/>
-                <a:rect l="l" t="t" r="r" b="b"/>
-                <a:pathLst>
-                  <a:path w="190500" h="190500">
-                    <a:moveTo>
-                      <a:pt x="0" y="23812"/>
-                    </a:moveTo>
-                    <a:cubicBezTo>
-                      <a:pt x="0" y="10661"/>
-                      <a:pt x="10661" y="0"/>
-                      <a:pt x="23812" y="0"/>
-                    </a:cubicBezTo>
-                    <a:lnTo>
-                      <a:pt x="166688" y="0"/>
-                    </a:lnTo>
-                    <a:cubicBezTo>
-                      <a:pt x="179839" y="0"/>
-                      <a:pt x="190500" y="10661"/>
-                      <a:pt x="190500" y="23812"/>
-                    </a:cubicBezTo>
-                    <a:lnTo>
-                      <a:pt x="190500" y="166688"/>
-                    </a:lnTo>
-                    <a:cubicBezTo>
-                      <a:pt x="190500" y="179839"/>
-                      <a:pt x="179839" y="190500"/>
-                      <a:pt x="166688" y="190500"/>
-                    </a:cubicBezTo>
-                    <a:lnTo>
-                      <a:pt x="23812" y="190500"/>
-                    </a:lnTo>
-                    <a:cubicBezTo>
-                      <a:pt x="10661" y="190500"/>
-                      <a:pt x="0" y="179839"/>
-                      <a:pt x="0" y="166688"/>
-                    </a:cubicBezTo>
-                    <a:lnTo>
-                      <a:pt x="0" y="23812"/>
-                    </a:lnTo>
-                  </a:path>
-                </a:pathLst>
-              </a:custGeom>
-              <a:noFill/>
-              <a:ln w="21431" cap="rnd">
-                <a:solidFill>
-                  <a:schemeClr val="accent1"/>
-                </a:solidFill>
-                <a:round/>
-              </a:ln>
-            </p:spPr>
-          </p:sp>
-          <p:sp>
-            <p:nvSpPr>
-              <p:cNvPr id="9" name="Freeform 9"/>
-              <p:cNvSpPr/>
-              <p:nvPr/>
-            </p:nvSpPr>
-            <p:spPr>
-              <a:xfrm>
-                <a:off x="1171575" y="2114550"/>
+                <a:off x="1171575" y="1619250"/>
                 <a:ext cx="9525" cy="47625"/>
               </a:xfrm>
               <a:custGeom>
@@ -3952,28 +4307,27 @@
         </p:grpSp>
         <p:sp>
           <p:nvSpPr>
-            <p:cNvPr id="11" name="TextBox 11"/>
-            <p:cNvSpPr txBox="1"/>
-            <p:nvPr/>
-          </p:nvSpPr>
-          <p:spPr>
-            <a:xfrm>
-              <a:off x="1783080" y="2143125"/>
-              <a:ext cx="1874510" cy="293370"/>
-            </a:xfrm>
-            <a:prstGeom prst="rect">
-              <a:avLst/>
-            </a:prstGeom>
-            <a:noFill/>
-            <a:ln>
-              <a:noFill/>
-            </a:ln>
-          </p:spPr>
-          <p:txBody>
-            <a:bodyPr wrap="none" lIns="0" tIns="0" rIns="0" bIns="0" anchor="t" anchorCtr="0">
-              <a:spAutoFit/>
-            </a:bodyPr>
-            <a:lstStyle/>
+            <p:cNvPr id="61" name="TextBox 20"/>
+            <p:cNvSpPr txBox="1"/>
+            <p:nvPr/>
+          </p:nvSpPr>
+          <p:spPr>
+            <a:xfrm>
+              <a:off x="1783080" y="1628775"/>
+              <a:ext cx="2922270" cy="293370"/>
+            </a:xfrm>
+            <a:prstGeom prst="rect">
+              <a:avLst/>
+            </a:prstGeom>
+            <a:noFill/>
+            <a:ln>
+              <a:noFill/>
+            </a:ln>
+          </p:spPr>
+          <p:txBody>
+            <a:bodyPr wrap="none" lIns="0" tIns="0" rIns="0" bIns="0" anchor="t" anchorCtr="0">
+              <a:spAutoFit/>
+            </a:bodyPr>
             <a:p>
               <a:pPr algn="l"/>
               <a:r>
@@ -3985,7 +4339,7 @@
                   <a:ea typeface="+mn-ea"/>
                   <a:cs typeface="+mn-cs"/>
                 </a:rPr>
-                <a:t>微软维护 · 多浏览器</a:t>
+                <a:t>新一代框架（E2E）· 开箱即用</a:t>
               </a:r>
               <a:endParaRPr lang="zh-CN" sz="1500" b="1" dirty="0">
                 <a:solidFill>
@@ -4000,28 +4354,27 @@
         </p:sp>
         <p:sp>
           <p:nvSpPr>
-            <p:cNvPr id="12" name="TextBox 12"/>
-            <p:cNvSpPr txBox="1"/>
-            <p:nvPr/>
-          </p:nvSpPr>
-          <p:spPr>
-            <a:xfrm>
-              <a:off x="832104" y="2918460"/>
-              <a:ext cx="1909572" cy="768096"/>
-            </a:xfrm>
-            <a:prstGeom prst="rect">
-              <a:avLst/>
-            </a:prstGeom>
-            <a:noFill/>
-            <a:ln>
-              <a:noFill/>
-            </a:ln>
-          </p:spPr>
-          <p:txBody>
-            <a:bodyPr wrap="none" lIns="0" tIns="0" rIns="0" bIns="0" anchor="t" anchorCtr="0">
-              <a:spAutoFit/>
-            </a:bodyPr>
-            <a:lstStyle/>
+            <p:cNvPr id="62" name="TextBox 21"/>
+            <p:cNvSpPr txBox="1"/>
+            <p:nvPr/>
+          </p:nvSpPr>
+          <p:spPr>
+            <a:xfrm>
+              <a:off x="832104" y="2156460"/>
+              <a:ext cx="3555492" cy="768096"/>
+            </a:xfrm>
+            <a:prstGeom prst="rect">
+              <a:avLst/>
+            </a:prstGeom>
+            <a:noFill/>
+            <a:ln>
+              <a:noFill/>
+            </a:ln>
+          </p:spPr>
+          <p:txBody>
+            <a:bodyPr wrap="none" lIns="0" tIns="0" rIns="0" bIns="0" anchor="t" anchorCtr="0">
+              <a:spAutoFit/>
+            </a:bodyPr>
             <a:p>
               <a:pPr algn="l">
                 <a:lnSpc>
@@ -4037,7 +4390,7 @@
                   <a:ea typeface="+mn-ea"/>
                   <a:cs typeface="+mn-cs"/>
                 </a:rPr>
-                <a:t>支持 Chromium / Firefox /</a:t>
+                <a:t>微软 2020 年发布，原生支持 Chromium / Firefox /</a:t>
               </a:r>
               <a:br>
                 <a:rPr lang="zh-CN" sz="1200" dirty="0">
@@ -4058,7 +4411,7 @@
                   <a:ea typeface="+mn-ea"/>
                   <a:cs typeface="+mn-cs"/>
                 </a:rPr>
-                <a:t>WebKit，多浏览器一致性</a:t>
+                <a:t>WebKit 三浏览器，一套 API 全覆盖，</a:t>
               </a:r>
               <a:br>
                 <a:rPr lang="zh-CN" sz="1200" dirty="0">
@@ -4079,7 +4432,7 @@
                   <a:ea typeface="+mn-ea"/>
                   <a:cs typeface="+mn-cs"/>
                 </a:rPr>
-                <a:t>较好，社区生态活跃</a:t>
+                <a:t>不需要为多浏览器写多套脚本</a:t>
               </a:r>
               <a:endParaRPr lang="zh-CN" sz="1200" dirty="0">
                 <a:solidFill>
@@ -4095,32 +4448,32 @@
       </p:grpSp>
       <p:grpSp>
         <p:nvGrpSpPr>
-          <p:cNvPr id="19" name="Group 19"/>
+          <p:cNvPr id="63" name="Group 28"/>
           <p:cNvGrpSpPr/>
           <p:nvPr/>
         </p:nvGrpSpPr>
         <p:grpSpPr>
           <a:xfrm>
-            <a:off x="4343400" y="1524000"/>
-            <a:ext cx="3505200" cy="3238500"/>
-            <a:chOff x="4343400" y="1524000"/>
-            <a:chExt cx="3505200" cy="3238500"/>
+            <a:off x="6248400" y="1181100"/>
+            <a:ext cx="5334000" cy="1866900"/>
+            <a:chOff x="6248400" y="1181100"/>
+            <a:chExt cx="5334000" cy="1866900"/>
           </a:xfrm>
         </p:grpSpPr>
         <p:sp>
           <p:nvSpPr>
-            <p:cNvPr id="14" name="Rectangle 14"/>
+            <p:cNvPr id="64" name="Rectangle 23"/>
             <p:cNvSpPr/>
             <p:nvPr/>
           </p:nvSpPr>
           <p:spPr>
             <a:xfrm>
-              <a:off x="4343400" y="1524000"/>
-              <a:ext cx="3505200" cy="3238500"/>
+              <a:off x="6248400" y="1181100"/>
+              <a:ext cx="5334000" cy="1866900"/>
             </a:xfrm>
             <a:prstGeom prst="roundRect">
               <a:avLst>
-                <a:gd name="adj" fmla="val 2353"/>
+                <a:gd name="adj" fmla="val 4082"/>
               </a:avLst>
             </a:prstGeom>
             <a:solidFill>
@@ -4133,14 +4486,14 @@
         </p:sp>
         <p:sp>
           <p:nvSpPr>
-            <p:cNvPr id="15" name="Ellipse 15"/>
+            <p:cNvPr id="65" name="Ellipse 24"/>
             <p:cNvSpPr/>
             <p:nvPr/>
           </p:nvSpPr>
           <p:spPr>
             <a:xfrm>
-              <a:off x="4610100" y="1866900"/>
-              <a:ext cx="685800" cy="685800"/>
+              <a:off x="6553200" y="1409700"/>
+              <a:ext cx="609600" cy="609600"/>
             </a:xfrm>
             <a:prstGeom prst="ellipse">
               <a:avLst/>
@@ -4155,13 +4508,13 @@
         </p:sp>
         <p:sp>
           <p:nvSpPr>
-            <p:cNvPr id="16" name="Freeform 16"/>
+            <p:cNvPr id="66" name="Freeform 25"/>
             <p:cNvSpPr/>
             <p:nvPr/>
           </p:nvSpPr>
           <p:spPr>
             <a:xfrm>
-              <a:off x="4869656" y="2102644"/>
+              <a:off x="6774656" y="1607344"/>
               <a:ext cx="166688" cy="214312"/>
             </a:xfrm>
             <a:custGeom>
@@ -4207,28 +4560,27 @@
         </p:sp>
         <p:sp>
           <p:nvSpPr>
-            <p:cNvPr id="17" name="TextBox 17"/>
-            <p:cNvSpPr txBox="1"/>
-            <p:nvPr/>
-          </p:nvSpPr>
-          <p:spPr>
-            <a:xfrm>
-              <a:off x="5516880" y="2143125"/>
-              <a:ext cx="1024890" cy="293370"/>
-            </a:xfrm>
-            <a:prstGeom prst="rect">
-              <a:avLst/>
-            </a:prstGeom>
-            <a:noFill/>
-            <a:ln>
-              <a:noFill/>
-            </a:ln>
-          </p:spPr>
-          <p:txBody>
-            <a:bodyPr wrap="none" lIns="0" tIns="0" rIns="0" bIns="0" anchor="t" anchorCtr="0">
-              <a:spAutoFit/>
-            </a:bodyPr>
-            <a:lstStyle/>
+            <p:cNvPr id="67" name="TextBox 26"/>
+            <p:cNvSpPr txBox="1"/>
+            <p:nvPr/>
+          </p:nvSpPr>
+          <p:spPr>
+            <a:xfrm>
+              <a:off x="7421880" y="1628775"/>
+              <a:ext cx="1630680" cy="293370"/>
+            </a:xfrm>
+            <a:prstGeom prst="rect">
+              <a:avLst/>
+            </a:prstGeom>
+            <a:noFill/>
+            <a:ln>
+              <a:noFill/>
+            </a:ln>
+          </p:spPr>
+          <p:txBody>
+            <a:bodyPr wrap="none" lIns="0" tIns="0" rIns="0" bIns="0" anchor="t" anchorCtr="0">
+              <a:spAutoFit/>
+            </a:bodyPr>
             <a:p>
               <a:pPr algn="l"/>
               <a:r>
@@ -4240,7 +4592,7 @@
                   <a:ea typeface="+mn-ea"/>
                   <a:cs typeface="+mn-cs"/>
                 </a:rPr>
-                <a:t>原生能力强</a:t>
+                <a:t>自动等待，天生稳</a:t>
               </a:r>
               <a:endParaRPr lang="zh-CN" sz="1500" b="1" dirty="0">
                 <a:solidFill>
@@ -4255,28 +4607,27 @@
         </p:sp>
         <p:sp>
           <p:nvSpPr>
-            <p:cNvPr id="18" name="TextBox 18"/>
-            <p:cNvSpPr txBox="1"/>
-            <p:nvPr/>
-          </p:nvSpPr>
-          <p:spPr>
-            <a:xfrm>
-              <a:off x="4565904" y="2918460"/>
-              <a:ext cx="1802892" cy="768096"/>
-            </a:xfrm>
-            <a:prstGeom prst="rect">
-              <a:avLst/>
-            </a:prstGeom>
-            <a:noFill/>
-            <a:ln>
-              <a:noFill/>
-            </a:ln>
-          </p:spPr>
-          <p:txBody>
-            <a:bodyPr wrap="none" lIns="0" tIns="0" rIns="0" bIns="0" anchor="t" anchorCtr="0">
-              <a:spAutoFit/>
-            </a:bodyPr>
-            <a:lstStyle/>
+            <p:cNvPr id="68" name="TextBox 27"/>
+            <p:cNvSpPr txBox="1"/>
+            <p:nvPr/>
+          </p:nvSpPr>
+          <p:spPr>
+            <a:xfrm>
+              <a:off x="6470904" y="2156460"/>
+              <a:ext cx="3075432" cy="768096"/>
+            </a:xfrm>
+            <a:prstGeom prst="rect">
+              <a:avLst/>
+            </a:prstGeom>
+            <a:noFill/>
+            <a:ln>
+              <a:noFill/>
+            </a:ln>
+          </p:spPr>
+          <p:txBody>
+            <a:bodyPr wrap="none" lIns="0" tIns="0" rIns="0" bIns="0" anchor="t" anchorCtr="0">
+              <a:spAutoFit/>
+            </a:bodyPr>
             <a:p>
               <a:pPr algn="l">
                 <a:lnSpc>
@@ -4292,7 +4643,7 @@
                   <a:ea typeface="+mn-ea"/>
                   <a:cs typeface="+mn-cs"/>
                 </a:rPr>
-                <a:t>自动等待、trace、截图、</a:t>
+                <a:t>操作前自动检查元素状态——可见、尺寸稳定、</a:t>
               </a:r>
               <a:br>
                 <a:rPr lang="zh-CN" sz="1200" dirty="0">
@@ -4313,7 +4664,7 @@
                   <a:ea typeface="+mn-ea"/>
                   <a:cs typeface="+mn-cs"/>
                 </a:rPr>
-                <a:t>录像、网络拦截、</a:t>
+                <a:t>可交互才执行；不用手写 sleep 轮询，</a:t>
               </a:r>
               <a:br>
                 <a:rPr lang="zh-CN" sz="1200" dirty="0">
@@ -4334,7 +4685,7 @@
                   <a:ea typeface="+mn-ea"/>
                   <a:cs typeface="+mn-cs"/>
                 </a:rPr>
-                <a:t>storageState 开箱即用</a:t>
+                <a:t>flaky 用例天然就少</a:t>
               </a:r>
               <a:endParaRPr lang="zh-CN" sz="1200" dirty="0">
                 <a:solidFill>
@@ -4350,32 +4701,32 @@
       </p:grpSp>
       <p:grpSp>
         <p:nvGrpSpPr>
-          <p:cNvPr id="28" name="Group 28"/>
+          <p:cNvPr id="69" name="Group 34"/>
           <p:cNvGrpSpPr/>
           <p:nvPr/>
         </p:nvGrpSpPr>
         <p:grpSpPr>
           <a:xfrm>
-            <a:off x="8077200" y="1524000"/>
-            <a:ext cx="3505200" cy="3238500"/>
-            <a:chOff x="8077200" y="1524000"/>
-            <a:chExt cx="3505200" cy="3238500"/>
+            <a:off x="609600" y="3162300"/>
+            <a:ext cx="5334000" cy="1866900"/>
+            <a:chOff x="609600" y="3162300"/>
+            <a:chExt cx="5334000" cy="1866900"/>
           </a:xfrm>
         </p:grpSpPr>
         <p:sp>
           <p:nvSpPr>
-            <p:cNvPr id="20" name="Rectangle 20"/>
+            <p:cNvPr id="70" name="Rectangle 29"/>
             <p:cNvSpPr/>
             <p:nvPr/>
           </p:nvSpPr>
           <p:spPr>
             <a:xfrm>
-              <a:off x="8077200" y="1524000"/>
-              <a:ext cx="3505200" cy="3238500"/>
+              <a:off x="609600" y="3162300"/>
+              <a:ext cx="5334000" cy="1866900"/>
             </a:xfrm>
             <a:prstGeom prst="roundRect">
               <a:avLst>
-                <a:gd name="adj" fmla="val 2353"/>
+                <a:gd name="adj" fmla="val 4082"/>
               </a:avLst>
             </a:prstGeom>
             <a:solidFill>
@@ -4388,14 +4739,14 @@
         </p:sp>
         <p:sp>
           <p:nvSpPr>
-            <p:cNvPr id="21" name="Ellipse 21"/>
+            <p:cNvPr id="71" name="Ellipse 30"/>
             <p:cNvSpPr/>
             <p:nvPr/>
           </p:nvSpPr>
           <p:spPr>
             <a:xfrm>
-              <a:off x="8343900" y="1866900"/>
-              <a:ext cx="685800" cy="685800"/>
+              <a:off x="914400" y="3390900"/>
+              <a:ext cx="609600" cy="609600"/>
             </a:xfrm>
             <a:prstGeom prst="ellipse">
               <a:avLst/>
@@ -4408,29 +4759,271 @@
             </a:ln>
           </p:spPr>
         </p:sp>
+        <p:sp>
+          <p:nvSpPr>
+            <p:cNvPr id="72" name="Freeform 31"/>
+            <p:cNvSpPr/>
+            <p:nvPr/>
+          </p:nvSpPr>
+          <p:spPr>
+            <a:xfrm>
+              <a:off x="1159669" y="3612356"/>
+              <a:ext cx="142875" cy="166688"/>
+            </a:xfrm>
+            <a:custGeom>
+              <a:avLst/>
+              <a:gdLst/>
+              <a:ahLst/>
+              <a:cxnLst/>
+              <a:rect l="l" t="t" r="r" b="b"/>
+              <a:pathLst>
+                <a:path w="142875" h="166688">
+                  <a:moveTo>
+                    <a:pt x="0" y="0"/>
+                  </a:moveTo>
+                  <a:lnTo>
+                    <a:pt x="0" y="166688"/>
+                  </a:lnTo>
+                  <a:lnTo>
+                    <a:pt x="142875" y="83344"/>
+                  </a:lnTo>
+                  <a:close/>
+                </a:path>
+              </a:pathLst>
+            </a:custGeom>
+            <a:noFill/>
+            <a:ln w="21431" cap="rnd">
+              <a:solidFill>
+                <a:schemeClr val="accent1"/>
+              </a:solidFill>
+              <a:round/>
+            </a:ln>
+          </p:spPr>
+        </p:sp>
+        <p:sp>
+          <p:nvSpPr>
+            <p:cNvPr id="73" name="TextBox 32"/>
+            <p:cNvSpPr txBox="1"/>
+            <p:nvPr/>
+          </p:nvSpPr>
+          <p:spPr>
+            <a:xfrm>
+              <a:off x="1783080" y="3609975"/>
+              <a:ext cx="1024890" cy="293370"/>
+            </a:xfrm>
+            <a:prstGeom prst="rect">
+              <a:avLst/>
+            </a:prstGeom>
+            <a:noFill/>
+            <a:ln>
+              <a:noFill/>
+            </a:ln>
+          </p:spPr>
+          <p:txBody>
+            <a:bodyPr wrap="none" lIns="0" tIns="0" rIns="0" bIns="0" anchor="t" anchorCtr="0">
+              <a:spAutoFit/>
+            </a:bodyPr>
+            <a:p>
+              <a:pPr algn="l"/>
+              <a:r>
+                <a:rPr lang="zh-CN" sz="1500" b="1" dirty="0">
+                  <a:solidFill>
+                    <a:schemeClr val="accent1"/>
+                  </a:solidFill>
+                  <a:latin typeface="+mn-lt"/>
+                  <a:ea typeface="+mn-ea"/>
+                  <a:cs typeface="+mn-cs"/>
+                </a:rPr>
+                <a:t>失败可回放</a:t>
+              </a:r>
+              <a:endParaRPr lang="zh-CN" sz="1500" b="1" dirty="0">
+                <a:solidFill>
+                  <a:schemeClr val="accent1"/>
+                </a:solidFill>
+                <a:latin typeface="+mn-lt"/>
+                <a:ea typeface="+mn-ea"/>
+                <a:cs typeface="+mn-cs"/>
+              </a:endParaRPr>
+            </a:p>
+          </p:txBody>
+        </p:sp>
+        <p:sp>
+          <p:nvSpPr>
+            <p:cNvPr id="74" name="TextBox 33"/>
+            <p:cNvSpPr txBox="1"/>
+            <p:nvPr/>
+          </p:nvSpPr>
+          <p:spPr>
+            <a:xfrm>
+              <a:off x="832104" y="4137660"/>
+              <a:ext cx="3304032" cy="768096"/>
+            </a:xfrm>
+            <a:prstGeom prst="rect">
+              <a:avLst/>
+            </a:prstGeom>
+            <a:noFill/>
+            <a:ln>
+              <a:noFill/>
+            </a:ln>
+          </p:spPr>
+          <p:txBody>
+            <a:bodyPr wrap="none" lIns="0" tIns="0" rIns="0" bIns="0" anchor="t" anchorCtr="0">
+              <a:spAutoFit/>
+            </a:bodyPr>
+            <a:p>
+              <a:pPr algn="l">
+                <a:lnSpc>
+                  <a:spcPts val="2100"/>
+                </a:lnSpc>
+              </a:pPr>
+              <a:r>
+                <a:rPr lang="zh-CN" sz="1200" dirty="0">
+                  <a:solidFill>
+                    <a:schemeClr val="dk1"/>
+                  </a:solidFill>
+                  <a:latin typeface="+mn-lt"/>
+                  <a:ea typeface="+mn-ea"/>
+                  <a:cs typeface="+mn-cs"/>
+                </a:rPr>
+                <a:t>失败自动留存 trace（每步操作 + 页面快照 +</a:t>
+              </a:r>
+              <a:br>
+                <a:rPr lang="zh-CN" sz="1200" dirty="0">
+                  <a:solidFill>
+                    <a:schemeClr val="dk1"/>
+                  </a:solidFill>
+                  <a:latin typeface="+mn-lt"/>
+                  <a:ea typeface="+mn-ea"/>
+                  <a:cs typeface="+mn-cs"/>
+                </a:rPr>
+              </a:br>
+              <a:r>
+                <a:rPr lang="zh-CN" sz="1200" dirty="0">
+                  <a:solidFill>
+                    <a:schemeClr val="dk1"/>
+                  </a:solidFill>
+                  <a:latin typeface="+mn-lt"/>
+                  <a:ea typeface="+mn-ea"/>
+                  <a:cs typeface="+mn-cs"/>
+                </a:rPr>
+                <a:t>网络请求），Trace Viewer 逐步回放定位问题，</a:t>
+              </a:r>
+              <a:br>
+                <a:rPr lang="zh-CN" sz="1200" dirty="0">
+                  <a:solidFill>
+                    <a:schemeClr val="dk1"/>
+                  </a:solidFill>
+                  <a:latin typeface="+mn-lt"/>
+                  <a:ea typeface="+mn-ea"/>
+                  <a:cs typeface="+mn-cs"/>
+                </a:rPr>
+              </a:br>
+              <a:r>
+                <a:rPr lang="zh-CN" sz="1200" dirty="0">
+                  <a:solidFill>
+                    <a:schemeClr val="dk1"/>
+                  </a:solidFill>
+                  <a:latin typeface="+mn-lt"/>
+                  <a:ea typeface="+mn-ea"/>
+                  <a:cs typeface="+mn-cs"/>
+                </a:rPr>
+                <a:t>不用反复复跑猜原因</a:t>
+              </a:r>
+              <a:endParaRPr lang="zh-CN" sz="1200" dirty="0">
+                <a:solidFill>
+                  <a:schemeClr val="dk1"/>
+                </a:solidFill>
+                <a:latin typeface="+mn-lt"/>
+                <a:ea typeface="+mn-ea"/>
+                <a:cs typeface="+mn-cs"/>
+              </a:endParaRPr>
+            </a:p>
+          </p:txBody>
+        </p:sp>
+      </p:grpSp>
+      <p:grpSp>
+        <p:nvGrpSpPr>
+          <p:cNvPr id="75" name="Group 43"/>
+          <p:cNvGrpSpPr/>
+          <p:nvPr/>
+        </p:nvGrpSpPr>
+        <p:grpSpPr>
+          <a:xfrm>
+            <a:off x="6248400" y="3162300"/>
+            <a:ext cx="5334000" cy="1866900"/>
+            <a:chOff x="6248400" y="3162300"/>
+            <a:chExt cx="5334000" cy="1866900"/>
+          </a:xfrm>
+        </p:grpSpPr>
+        <p:sp>
+          <p:nvSpPr>
+            <p:cNvPr id="76" name="Rectangle 35"/>
+            <p:cNvSpPr/>
+            <p:nvPr/>
+          </p:nvSpPr>
+          <p:spPr>
+            <a:xfrm>
+              <a:off x="6248400" y="3162300"/>
+              <a:ext cx="5334000" cy="1866900"/>
+            </a:xfrm>
+            <a:prstGeom prst="roundRect">
+              <a:avLst>
+                <a:gd name="adj" fmla="val 4082"/>
+              </a:avLst>
+            </a:prstGeom>
+            <a:solidFill>
+              <a:schemeClr val="accent5"/>
+            </a:solidFill>
+            <a:ln>
+              <a:noFill/>
+            </a:ln>
+          </p:spPr>
+        </p:sp>
+        <p:sp>
+          <p:nvSpPr>
+            <p:cNvPr id="77" name="Ellipse 36"/>
+            <p:cNvSpPr/>
+            <p:nvPr/>
+          </p:nvSpPr>
+          <p:spPr>
+            <a:xfrm>
+              <a:off x="6553200" y="3390900"/>
+              <a:ext cx="609600" cy="609600"/>
+            </a:xfrm>
+            <a:prstGeom prst="ellipse">
+              <a:avLst/>
+            </a:prstGeom>
+            <a:solidFill>
+              <a:schemeClr val="lt1"/>
+            </a:solidFill>
+            <a:ln>
+              <a:noFill/>
+            </a:ln>
+          </p:spPr>
+        </p:sp>
         <p:grpSp>
           <p:nvGrpSpPr>
-            <p:cNvPr id="25" name="Group 25"/>
+            <p:cNvPr id="78" name="Group 40"/>
             <p:cNvGrpSpPr/>
             <p:nvPr/>
           </p:nvGrpSpPr>
           <p:grpSpPr>
             <a:xfrm>
-              <a:off x="8591550" y="2114550"/>
+              <a:off x="6762750" y="3600450"/>
               <a:ext cx="190500" cy="190500"/>
-              <a:chOff x="8591550" y="2114550"/>
+              <a:chOff x="6762750" y="3600450"/>
               <a:chExt cx="190500" cy="190500"/>
             </a:xfrm>
           </p:grpSpPr>
           <p:sp>
             <p:nvSpPr>
-              <p:cNvPr id="22" name="Freeform 22"/>
+              <p:cNvPr id="79" name="Freeform 37"/>
               <p:cNvSpPr/>
               <p:nvPr/>
             </p:nvSpPr>
             <p:spPr>
               <a:xfrm>
-                <a:off x="8591550" y="2114550"/>
+                <a:off x="6762750" y="3600450"/>
                 <a:ext cx="190500" cy="95250"/>
               </a:xfrm>
               <a:custGeom>
@@ -4470,13 +5063,13 @@
           </p:sp>
           <p:sp>
             <p:nvSpPr>
-              <p:cNvPr id="23" name="Freeform 23"/>
+              <p:cNvPr id="80" name="Freeform 38"/>
               <p:cNvSpPr/>
               <p:nvPr/>
             </p:nvSpPr>
             <p:spPr>
               <a:xfrm>
-                <a:off x="8591550" y="2209800"/>
+                <a:off x="6762750" y="3695700"/>
                 <a:ext cx="190500" cy="47625"/>
               </a:xfrm>
               <a:custGeom>
@@ -4510,13 +5103,13 @@
           </p:sp>
           <p:sp>
             <p:nvSpPr>
-              <p:cNvPr id="24" name="Freeform 24"/>
+              <p:cNvPr id="81" name="Freeform 39"/>
               <p:cNvSpPr/>
               <p:nvPr/>
             </p:nvSpPr>
             <p:spPr>
               <a:xfrm>
-                <a:off x="8591550" y="2257425"/>
+                <a:off x="6762750" y="3743325"/>
                 <a:ext cx="190500" cy="47625"/>
               </a:xfrm>
               <a:custGeom>
@@ -4551,13 +5144,13 @@
         </p:grpSp>
         <p:sp>
           <p:nvSpPr>
-            <p:cNvPr id="26" name="TextBox 26"/>
-            <p:cNvSpPr txBox="1"/>
-            <p:nvPr/>
-          </p:nvSpPr>
-          <p:spPr>
-            <a:xfrm>
-              <a:off x="9250680" y="2143125"/>
+            <p:cNvPr id="82" name="TextBox 41"/>
+            <p:cNvSpPr txBox="1"/>
+            <p:nvPr/>
+          </p:nvSpPr>
+          <p:spPr>
+            <a:xfrm>
+              <a:off x="7421880" y="3609975"/>
               <a:ext cx="1361008" cy="293370"/>
             </a:xfrm>
             <a:prstGeom prst="rect">
@@ -4572,7 +5165,6 @@
             <a:bodyPr wrap="none" lIns="0" tIns="0" rIns="0" bIns="0" anchor="t" anchorCtr="0">
               <a:spAutoFit/>
             </a:bodyPr>
-            <a:lstStyle/>
             <a:p>
               <a:pPr algn="l"/>
               <a:r>
@@ -4599,28 +5191,27 @@
         </p:sp>
         <p:sp>
           <p:nvSpPr>
-            <p:cNvPr id="27" name="TextBox 27"/>
-            <p:cNvSpPr txBox="1"/>
-            <p:nvPr/>
-          </p:nvSpPr>
-          <p:spPr>
-            <a:xfrm>
-              <a:off x="8299704" y="2918460"/>
-              <a:ext cx="1932432" cy="768096"/>
-            </a:xfrm>
-            <a:prstGeom prst="rect">
-              <a:avLst/>
-            </a:prstGeom>
-            <a:noFill/>
-            <a:ln>
-              <a:noFill/>
-            </a:ln>
-          </p:spPr>
-          <p:txBody>
-            <a:bodyPr wrap="none" lIns="0" tIns="0" rIns="0" bIns="0" anchor="t" anchorCtr="0">
-              <a:spAutoFit/>
-            </a:bodyPr>
-            <a:lstStyle/>
+            <p:cNvPr id="83" name="TextBox 42"/>
+            <p:cNvSpPr txBox="1"/>
+            <p:nvPr/>
+          </p:nvSpPr>
+          <p:spPr>
+            <a:xfrm>
+              <a:off x="6470904" y="4137660"/>
+              <a:ext cx="3692652" cy="768096"/>
+            </a:xfrm>
+            <a:prstGeom prst="rect">
+              <a:avLst/>
+            </a:prstGeom>
+            <a:noFill/>
+            <a:ln>
+              <a:noFill/>
+            </a:ln>
+          </p:spPr>
+          <p:txBody>
+            <a:bodyPr wrap="none" lIns="0" tIns="0" rIns="0" bIns="0" anchor="t" anchorCtr="0">
+              <a:spAutoFit/>
+            </a:bodyPr>
             <a:p>
               <a:pPr algn="l">
                 <a:lnSpc>
@@ -4636,7 +5227,7 @@
                   <a:ea typeface="+mn-ea"/>
                   <a:cs typeface="+mn-cs"/>
                 </a:rPr>
-                <a:t>统一目录、环境、fixture、</a:t>
+                <a:t>UI 操作和接口断言可写进同一条用例（共享登录态），</a:t>
               </a:r>
               <a:br>
                 <a:rPr lang="zh-CN" sz="1200" dirty="0">
@@ -4657,7 +5248,7 @@
                   <a:ea typeface="+mn-ea"/>
                   <a:cs typeface="+mn-cs"/>
                 </a:rPr>
-                <a:t>报告与 skill 治理，</a:t>
+                <a:t>一套 runner、一套断言体系；还能拦截 / mock 接口</a:t>
               </a:r>
               <a:br>
                 <a:rPr lang="zh-CN" sz="1200" dirty="0">
@@ -4678,7 +5269,7 @@
                   <a:ea typeface="+mn-ea"/>
                   <a:cs typeface="+mn-cs"/>
                 </a:rPr>
-                <a:t>适合企业后台复杂场景</a:t>
+                <a:t>——实战里用它验证前端缓存复用</a:t>
               </a:r>
               <a:endParaRPr lang="zh-CN" sz="1200" dirty="0">
                 <a:solidFill>
@@ -4694,32 +5285,32 @@
       </p:grpSp>
       <p:grpSp>
         <p:nvGrpSpPr>
-          <p:cNvPr id="31" name="Group 31"/>
+          <p:cNvPr id="84" name="Group 46"/>
           <p:cNvGrpSpPr/>
           <p:nvPr/>
         </p:nvGrpSpPr>
         <p:grpSpPr>
           <a:xfrm>
-            <a:off x="609600" y="5238750"/>
-            <a:ext cx="10972800" cy="571500"/>
-            <a:chOff x="609600" y="5238750"/>
-            <a:chExt cx="10972800" cy="571500"/>
+            <a:off x="609600" y="5295900"/>
+            <a:ext cx="10972800" cy="533400"/>
+            <a:chOff x="609600" y="5295900"/>
+            <a:chExt cx="10972800" cy="533400"/>
           </a:xfrm>
         </p:grpSpPr>
         <p:sp>
           <p:nvSpPr>
-            <p:cNvPr id="29" name="Rectangle 29"/>
+            <p:cNvPr id="85" name="Rectangle 44"/>
             <p:cNvSpPr/>
             <p:nvPr/>
           </p:nvSpPr>
           <p:spPr>
             <a:xfrm>
-              <a:off x="609600" y="5238750"/>
-              <a:ext cx="10972800" cy="571500"/>
+              <a:off x="609600" y="5295900"/>
+              <a:ext cx="10972800" cy="533400"/>
             </a:xfrm>
             <a:prstGeom prst="roundRect">
               <a:avLst>
-                <a:gd name="adj" fmla="val 13333"/>
+                <a:gd name="adj" fmla="val 14286"/>
               </a:avLst>
             </a:prstGeom>
             <a:solidFill>
@@ -4732,13 +5323,13 @@
         </p:sp>
         <p:sp>
           <p:nvSpPr>
-            <p:cNvPr id="30" name="TextBox 30"/>
-            <p:cNvSpPr txBox="1"/>
-            <p:nvPr/>
-          </p:nvSpPr>
-          <p:spPr>
-            <a:xfrm>
-              <a:off x="4069080" y="5438775"/>
+            <p:cNvPr id="86" name="TextBox 45"/>
+            <p:cNvSpPr txBox="1"/>
+            <p:nvPr/>
+          </p:nvSpPr>
+          <p:spPr>
+            <a:xfrm>
+              <a:off x="4069080" y="5476875"/>
               <a:ext cx="4053840" cy="293370"/>
             </a:xfrm>
             <a:prstGeom prst="rect">
@@ -4753,7 +5344,6 @@
             <a:bodyPr wrap="none" lIns="0" tIns="0" rIns="0" bIns="0" anchor="t" anchorCtr="0">
               <a:spAutoFit/>
             </a:bodyPr>
-            <a:lstStyle/>
             <a:p>
               <a:pPr algn="ctr"/>
               <a:r>
@@ -4770,362 +5360,6 @@
               <a:endParaRPr lang="zh-CN" sz="1500" b="1" dirty="0">
                 <a:solidFill>
                   <a:srgbClr val="FFFFFF"/>
-                </a:solidFill>
-                <a:latin typeface="+mn-lt"/>
-                <a:ea typeface="+mn-ea"/>
-                <a:cs typeface="+mn-cs"/>
-              </a:endParaRPr>
-            </a:p>
-          </p:txBody>
-        </p:sp>
-      </p:grpSp>
-      <p:sp>
-        <p:nvSpPr>
-          <p:cNvPr id="32" name="TextBox 32"/>
-          <p:cNvSpPr txBox="1"/>
-          <p:nvPr/>
-        </p:nvSpPr>
-        <p:spPr>
-          <a:xfrm>
-            <a:off x="11103540" y="6497002"/>
-            <a:ext cx="484194" cy="205359"/>
-          </a:xfrm>
-          <a:prstGeom prst="rect">
-            <a:avLst/>
-          </a:prstGeom>
-          <a:noFill/>
-          <a:ln>
-            <a:noFill/>
-          </a:ln>
-        </p:spPr>
-        <p:txBody>
-          <a:bodyPr wrap="none" lIns="0" tIns="0" rIns="0" bIns="0" anchor="t" anchorCtr="0">
-            <a:spAutoFit/>
-          </a:bodyPr>
-          <a:lstStyle/>
-          <a:p>
-            <a:pPr algn="r"/>
-            <a:r>
-              <a:rPr lang="zh-CN" sz="1050" dirty="0">
-                <a:solidFill>
-                  <a:schemeClr val="accent6"/>
-                </a:solidFill>
-                <a:latin typeface="+mn-lt"/>
-                <a:ea typeface="+mn-ea"/>
-                <a:cs typeface="+mn-cs"/>
-              </a:rPr>
-              <a:t>10 / 23</a:t>
-            </a:r>
-            <a:endParaRPr lang="zh-CN" sz="1050" dirty="0">
-              <a:solidFill>
-                <a:schemeClr val="accent6"/>
-              </a:solidFill>
-              <a:latin typeface="+mn-lt"/>
-              <a:ea typeface="+mn-ea"/>
-              <a:cs typeface="+mn-cs"/>
-            </a:endParaRPr>
-          </a:p>
-        </p:txBody>
-      </p:sp>
-      <p:grpSp>
-        <p:nvGrpSpPr>
-          <p:cNvPr id="33" name="Group 10"/>
-          <p:cNvGrpSpPr/>
-          <p:nvPr/>
-        </p:nvGrpSpPr>
-        <p:grpSpPr>
-          <a:xfrm>
-            <a:off x="7467600" y="114300"/>
-            <a:ext cx="4114800" cy="266700"/>
-            <a:chOff x="7467600" y="114300"/>
-            <a:chExt cx="4114800" cy="266700"/>
-          </a:xfrm>
-        </p:grpSpPr>
-        <p:sp>
-          <p:nvSpPr>
-            <p:cNvPr id="34" name="Rectangle 2"/>
-            <p:cNvSpPr/>
-            <p:nvPr/>
-          </p:nvSpPr>
-          <p:spPr>
-            <a:xfrm>
-              <a:off x="7467600" y="114300"/>
-              <a:ext cx="1219200" cy="266700"/>
-            </a:xfrm>
-            <a:prstGeom prst="roundRect">
-              <a:avLst>
-                <a:gd name="adj" fmla="val 50000"/>
-              </a:avLst>
-            </a:prstGeom>
-            <a:solidFill>
-              <a:schemeClr val="accent5"/>
-            </a:solidFill>
-            <a:ln>
-              <a:noFill/>
-            </a:ln>
-          </p:spPr>
-        </p:sp>
-        <p:sp>
-          <p:nvSpPr>
-            <p:cNvPr id="35" name="TextBox 3"/>
-            <p:cNvSpPr txBox="1"/>
-            <p:nvPr/>
-          </p:nvSpPr>
-          <p:spPr>
-            <a:xfrm>
-              <a:off x="7808392" y="190024"/>
-              <a:ext cx="537616" cy="190690"/>
-            </a:xfrm>
-            <a:prstGeom prst="rect">
-              <a:avLst/>
-            </a:prstGeom>
-            <a:noFill/>
-            <a:ln>
-              <a:noFill/>
-            </a:ln>
-          </p:spPr>
-          <p:txBody>
-            <a:bodyPr wrap="none" lIns="0" tIns="0" rIns="0" bIns="0" anchor="t" anchorCtr="0">
-              <a:spAutoFit/>
-            </a:bodyPr>
-            <a:p>
-              <a:pPr algn="ctr"/>
-              <a:r>
-                <a:rPr lang="zh-CN" sz="980" dirty="0">
-                  <a:solidFill>
-                    <a:schemeClr val="accent1"/>
-                  </a:solidFill>
-                  <a:latin typeface="+mn-lt"/>
-                  <a:ea typeface="+mn-ea"/>
-                  <a:cs typeface="+mn-cs"/>
-                </a:rPr>
-                <a:t>协同方案</a:t>
-              </a:r>
-              <a:endParaRPr lang="zh-CN" sz="980" dirty="0">
-                <a:solidFill>
-                  <a:schemeClr val="accent1"/>
-                </a:solidFill>
-                <a:latin typeface="+mn-lt"/>
-                <a:ea typeface="+mn-ea"/>
-                <a:cs typeface="+mn-cs"/>
-              </a:endParaRPr>
-            </a:p>
-          </p:txBody>
-        </p:sp>
-        <p:sp>
-          <p:nvSpPr>
-            <p:cNvPr id="36" name="Polygon 4"/>
-            <p:cNvSpPr/>
-            <p:nvPr/>
-          </p:nvSpPr>
-          <p:spPr>
-            <a:xfrm>
-              <a:off x="8763000" y="190500"/>
-              <a:ext cx="95250" cy="114300"/>
-            </a:xfrm>
-            <a:custGeom>
-              <a:avLst/>
-              <a:gdLst/>
-              <a:ahLst/>
-              <a:cxnLst/>
-              <a:rect l="l" t="t" r="r" b="b"/>
-              <a:pathLst>
-                <a:path w="95250" h="114300">
-                  <a:moveTo>
-                    <a:pt x="0" y="0"/>
-                  </a:moveTo>
-                  <a:lnTo>
-                    <a:pt x="95250" y="57150"/>
-                  </a:lnTo>
-                  <a:lnTo>
-                    <a:pt x="0" y="114300"/>
-                  </a:lnTo>
-                  <a:close/>
-                </a:path>
-              </a:pathLst>
-            </a:custGeom>
-            <a:solidFill>
-              <a:srgbClr val="595959"/>
-            </a:solidFill>
-            <a:ln>
-              <a:noFill/>
-            </a:ln>
-          </p:spPr>
-        </p:sp>
-        <p:sp>
-          <p:nvSpPr>
-            <p:cNvPr id="37" name="Rectangle 5"/>
-            <p:cNvSpPr/>
-            <p:nvPr/>
-          </p:nvSpPr>
-          <p:spPr>
-            <a:xfrm>
-              <a:off x="8915400" y="114300"/>
-              <a:ext cx="1219200" cy="266700"/>
-            </a:xfrm>
-            <a:prstGeom prst="roundRect">
-              <a:avLst>
-                <a:gd name="adj" fmla="val 50000"/>
-              </a:avLst>
-            </a:prstGeom>
-            <a:solidFill>
-              <a:schemeClr val="accent1"/>
-            </a:solidFill>
-            <a:ln>
-              <a:noFill/>
-            </a:ln>
-          </p:spPr>
-        </p:sp>
-        <p:sp>
-          <p:nvSpPr>
-            <p:cNvPr id="38" name="TextBox 6"/>
-            <p:cNvSpPr txBox="1"/>
-            <p:nvPr/>
-          </p:nvSpPr>
-          <p:spPr>
-            <a:xfrm>
-              <a:off x="9190228" y="190024"/>
-              <a:ext cx="669544" cy="190690"/>
-            </a:xfrm>
-            <a:prstGeom prst="rect">
-              <a:avLst/>
-            </a:prstGeom>
-            <a:noFill/>
-            <a:ln>
-              <a:noFill/>
-            </a:ln>
-          </p:spPr>
-          <p:txBody>
-            <a:bodyPr wrap="none" lIns="0" tIns="0" rIns="0" bIns="0" anchor="t" anchorCtr="0">
-              <a:spAutoFit/>
-            </a:bodyPr>
-            <a:p>
-              <a:pPr algn="ctr"/>
-              <a:r>
-                <a:rPr lang="zh-CN" sz="980" b="1" dirty="0">
-                  <a:solidFill>
-                    <a:srgbClr val="FFFFFF"/>
-                  </a:solidFill>
-                  <a:latin typeface="+mn-lt"/>
-                  <a:ea typeface="+mn-ea"/>
-                  <a:cs typeface="+mn-cs"/>
-                </a:rPr>
-                <a:t>自动化测试</a:t>
-              </a:r>
-              <a:endParaRPr lang="zh-CN" sz="980" b="1" dirty="0">
-                <a:solidFill>
-                  <a:srgbClr val="FFFFFF"/>
-                </a:solidFill>
-                <a:latin typeface="+mn-lt"/>
-                <a:ea typeface="+mn-ea"/>
-                <a:cs typeface="+mn-cs"/>
-              </a:endParaRPr>
-            </a:p>
-          </p:txBody>
-        </p:sp>
-        <p:sp>
-          <p:nvSpPr>
-            <p:cNvPr id="39" name="Polygon 7"/>
-            <p:cNvSpPr/>
-            <p:nvPr/>
-          </p:nvSpPr>
-          <p:spPr>
-            <a:xfrm>
-              <a:off x="10210800" y="190500"/>
-              <a:ext cx="95250" cy="114300"/>
-            </a:xfrm>
-            <a:custGeom>
-              <a:avLst/>
-              <a:gdLst/>
-              <a:ahLst/>
-              <a:cxnLst/>
-              <a:rect l="l" t="t" r="r" b="b"/>
-              <a:pathLst>
-                <a:path w="95250" h="114300">
-                  <a:moveTo>
-                    <a:pt x="0" y="0"/>
-                  </a:moveTo>
-                  <a:lnTo>
-                    <a:pt x="95250" y="57150"/>
-                  </a:lnTo>
-                  <a:lnTo>
-                    <a:pt x="0" y="114300"/>
-                  </a:lnTo>
-                  <a:close/>
-                </a:path>
-              </a:pathLst>
-            </a:custGeom>
-            <a:solidFill>
-              <a:srgbClr val="595959"/>
-            </a:solidFill>
-            <a:ln>
-              <a:noFill/>
-            </a:ln>
-          </p:spPr>
-        </p:sp>
-        <p:sp>
-          <p:nvSpPr>
-            <p:cNvPr id="40" name="Rectangle 8"/>
-            <p:cNvSpPr/>
-            <p:nvPr/>
-          </p:nvSpPr>
-          <p:spPr>
-            <a:xfrm>
-              <a:off x="10363200" y="114300"/>
-              <a:ext cx="1219200" cy="266700"/>
-            </a:xfrm>
-            <a:prstGeom prst="roundRect">
-              <a:avLst>
-                <a:gd name="adj" fmla="val 50000"/>
-              </a:avLst>
-            </a:prstGeom>
-            <a:solidFill>
-              <a:schemeClr val="accent5"/>
-            </a:solidFill>
-            <a:ln>
-              <a:noFill/>
-            </a:ln>
-          </p:spPr>
-        </p:sp>
-        <p:sp>
-          <p:nvSpPr>
-            <p:cNvPr id="41" name="TextBox 9"/>
-            <p:cNvSpPr txBox="1"/>
-            <p:nvPr/>
-          </p:nvSpPr>
-          <p:spPr>
-            <a:xfrm>
-              <a:off x="10703992" y="190024"/>
-              <a:ext cx="537616" cy="190690"/>
-            </a:xfrm>
-            <a:prstGeom prst="rect">
-              <a:avLst/>
-            </a:prstGeom>
-            <a:noFill/>
-            <a:ln>
-              <a:noFill/>
-            </a:ln>
-          </p:spPr>
-          <p:txBody>
-            <a:bodyPr wrap="none" lIns="0" tIns="0" rIns="0" bIns="0" anchor="t" anchorCtr="0">
-              <a:spAutoFit/>
-            </a:bodyPr>
-            <a:p>
-              <a:pPr algn="ctr"/>
-              <a:r>
-                <a:rPr lang="zh-CN" sz="980" dirty="0">
-                  <a:solidFill>
-                    <a:schemeClr val="accent1"/>
-                  </a:solidFill>
-                  <a:latin typeface="+mn-lt"/>
-                  <a:ea typeface="+mn-ea"/>
-                  <a:cs typeface="+mn-cs"/>
-                </a:rPr>
-                <a:t>实战案例</a:t>
-              </a:r>
-              <a:endParaRPr lang="zh-CN" sz="980" dirty="0">
-                <a:solidFill>
-                  <a:schemeClr val="accent1"/>
                 </a:solidFill>
                 <a:latin typeface="+mn-lt"/>
                 <a:ea typeface="+mn-ea"/>
@@ -26950,7 +27184,7 @@
               <a:r>
                 <a:rPr lang="zh-CN" sz="1350" b="1" dirty="0">
                   <a:solidFill>
-                    <a:schemeClr val="dk1"/>
+                    <a:schemeClr val="accent2"/>
                   </a:solidFill>
                   <a:latin typeface="+mn-lt"/>
                   <a:ea typeface="+mn-ea"/>
@@ -26960,7 +27194,7 @@
               </a:r>
               <a:endParaRPr lang="zh-CN" sz="1350" b="1" dirty="0">
                 <a:solidFill>
-                  <a:schemeClr val="dk1"/>
+                  <a:schemeClr val="accent2"/>
                 </a:solidFill>
                 <a:latin typeface="+mn-lt"/>
                 <a:ea typeface="+mn-ea"/>
@@ -27108,7 +27342,7 @@
               <a:r>
                 <a:rPr lang="zh-CN" sz="1350" b="1" dirty="0">
                   <a:solidFill>
-                    <a:schemeClr val="dk1"/>
+                    <a:schemeClr val="accent2"/>
                   </a:solidFill>
                   <a:latin typeface="+mn-lt"/>
                   <a:ea typeface="+mn-ea"/>
@@ -27118,7 +27352,7 @@
               </a:r>
               <a:endParaRPr lang="zh-CN" sz="1350" b="1" dirty="0">
                 <a:solidFill>
-                  <a:schemeClr val="dk1"/>
+                  <a:schemeClr val="accent2"/>
                 </a:solidFill>
                 <a:latin typeface="+mn-lt"/>
                 <a:ea typeface="+mn-ea"/>
@@ -27424,13 +27658,24 @@
               <a:r>
                 <a:rPr lang="zh-CN" sz="1350" b="1" dirty="0">
                   <a:solidFill>
+                    <a:schemeClr val="accent2"/>
+                  </a:solidFill>
+                  <a:latin typeface="+mn-lt"/>
+                  <a:ea typeface="+mn-ea"/>
+                  <a:cs typeface="+mn-cs"/>
+                </a:rPr>
+                <a:t>测试设计</a:t>
+              </a:r>
+              <a:r>
+                <a:rPr lang="zh-CN" sz="1350" b="1" dirty="0">
+                  <a:solidFill>
                     <a:schemeClr val="dk1"/>
                   </a:solidFill>
                   <a:latin typeface="+mn-lt"/>
                   <a:ea typeface="+mn-ea"/>
                   <a:cs typeface="+mn-cs"/>
                 </a:rPr>
-                <a:t>测试设计 + 自动化</a:t>
+                <a:t> + 自动化</a:t>
               </a:r>
               <a:endParaRPr lang="zh-CN" sz="1350" b="1" dirty="0">
                 <a:solidFill>
@@ -30245,1235 +30490,7 @@
       </p:grpSpPr>
       <p:grpSp>
         <p:nvGrpSpPr>
-          <p:cNvPr id="4" name="Group 4"/>
-          <p:cNvGrpSpPr/>
-          <p:nvPr/>
-        </p:nvGrpSpPr>
-        <p:grpSpPr>
-          <a:xfrm>
-            <a:off x="609600" y="568642"/>
-            <a:ext cx="5774817" cy="438150"/>
-            <a:chOff x="609600" y="568642"/>
-            <a:chExt cx="5774817" cy="438150"/>
-          </a:xfrm>
-        </p:grpSpPr>
-        <p:sp>
-          <p:nvSpPr>
-            <p:cNvPr id="2" name="Rectangle 2"/>
-            <p:cNvSpPr/>
-            <p:nvPr/>
-          </p:nvSpPr>
-          <p:spPr>
-            <a:xfrm>
-              <a:off x="609600" y="571500"/>
-              <a:ext cx="76200" cy="381000"/>
-            </a:xfrm>
-            <a:prstGeom prst="rect">
-              <a:avLst/>
-            </a:prstGeom>
-            <a:solidFill>
-              <a:schemeClr val="accent1"/>
-            </a:solidFill>
-            <a:ln>
-              <a:noFill/>
-            </a:ln>
-          </p:spPr>
-        </p:sp>
-        <p:sp>
-          <p:nvSpPr>
-            <p:cNvPr id="3" name="TextBox 3"/>
-            <p:cNvSpPr txBox="1"/>
-            <p:nvPr/>
-          </p:nvSpPr>
-          <p:spPr>
-            <a:xfrm>
-              <a:off x="861822" y="568642"/>
-              <a:ext cx="5522595" cy="438150"/>
-            </a:xfrm>
-            <a:prstGeom prst="rect">
-              <a:avLst/>
-            </a:prstGeom>
-            <a:noFill/>
-            <a:ln>
-              <a:noFill/>
-            </a:ln>
-          </p:spPr>
-          <p:txBody>
-            <a:bodyPr wrap="none" lIns="0" tIns="0" rIns="0" bIns="0" anchor="t" anchorCtr="0">
-              <a:spAutoFit/>
-            </a:bodyPr>
-            <a:lstStyle/>
-            <a:p>
-              <a:pPr algn="l"/>
-              <a:r>
-                <a:rPr lang="zh-CN" sz="2850" b="1" dirty="0">
-                  <a:solidFill>
-                    <a:schemeClr val="accent1"/>
-                  </a:solidFill>
-                  <a:latin typeface="+mn-lt"/>
-                  <a:ea typeface="+mn-ea"/>
-                  <a:cs typeface="+mn-cs"/>
-                </a:rPr>
-                <a:t>方案：需求结构化 + 版本增量回写</a:t>
-              </a:r>
-              <a:endParaRPr lang="zh-CN" sz="2850" b="1" dirty="0">
-                <a:solidFill>
-                  <a:schemeClr val="accent1"/>
-                </a:solidFill>
-                <a:latin typeface="+mn-lt"/>
-                <a:ea typeface="+mn-ea"/>
-                <a:cs typeface="+mn-cs"/>
-              </a:endParaRPr>
-            </a:p>
-          </p:txBody>
-        </p:sp>
-      </p:grpSp>
-      <p:grpSp>
-        <p:nvGrpSpPr>
-          <p:cNvPr id="16" name="Group 16"/>
-          <p:cNvGrpSpPr/>
-          <p:nvPr/>
-        </p:nvGrpSpPr>
-        <p:grpSpPr>
-          <a:xfrm>
-            <a:off x="457200" y="1261110"/>
-            <a:ext cx="5334000" cy="3619500"/>
-            <a:chOff x="457200" y="1261110"/>
-            <a:chExt cx="5334000" cy="3619500"/>
-          </a:xfrm>
-        </p:grpSpPr>
-        <p:sp>
-          <p:nvSpPr>
-            <p:cNvPr id="5" name="Rectangle 5"/>
-            <p:cNvSpPr/>
-            <p:nvPr/>
-          </p:nvSpPr>
-          <p:spPr>
-            <a:xfrm>
-              <a:off x="457200" y="1261110"/>
-              <a:ext cx="5334000" cy="3619500"/>
-            </a:xfrm>
-            <a:prstGeom prst="roundRect">
-              <a:avLst>
-                <a:gd name="adj" fmla="val 2105"/>
-              </a:avLst>
-            </a:prstGeom>
-            <a:solidFill>
-              <a:schemeClr val="accent5"/>
-            </a:solidFill>
-            <a:ln>
-              <a:noFill/>
-            </a:ln>
-          </p:spPr>
-        </p:sp>
-        <p:sp>
-          <p:nvSpPr>
-            <p:cNvPr id="6" name="TextBox 6"/>
-            <p:cNvSpPr txBox="1"/>
-            <p:nvPr/>
-          </p:nvSpPr>
-          <p:spPr>
-            <a:xfrm>
-              <a:off x="906018" y="1669732"/>
-              <a:ext cx="1047750" cy="253365"/>
-            </a:xfrm>
-            <a:prstGeom prst="rect">
-              <a:avLst/>
-            </a:prstGeom>
-            <a:noFill/>
-            <a:ln>
-              <a:noFill/>
-            </a:ln>
-          </p:spPr>
-          <p:txBody>
-            <a:bodyPr wrap="none" lIns="0" tIns="0" rIns="0" bIns="0" anchor="t" anchorCtr="0">
-              <a:spAutoFit/>
-            </a:bodyPr>
-            <a:lstStyle/>
-            <a:p>
-              <a:pPr algn="l"/>
-              <a:r>
-                <a:rPr lang="zh-CN" sz="1650" b="1" dirty="0">
-                  <a:solidFill>
-                    <a:schemeClr val="accent1"/>
-                  </a:solidFill>
-                  <a:latin typeface="+mn-lt"/>
-                  <a:ea typeface="+mn-ea"/>
-                  <a:cs typeface="+mn-cs"/>
-                </a:rPr>
-                <a:t>需求基线化</a:t>
-              </a:r>
-              <a:endParaRPr lang="zh-CN" sz="1650" b="1" dirty="0">
-                <a:solidFill>
-                  <a:schemeClr val="accent1"/>
-                </a:solidFill>
-                <a:latin typeface="+mn-lt"/>
-                <a:ea typeface="+mn-ea"/>
-                <a:cs typeface="+mn-cs"/>
-              </a:endParaRPr>
-            </a:p>
-          </p:txBody>
-        </p:sp>
-        <p:sp>
-          <p:nvSpPr>
-            <p:cNvPr id="7" name="TextBox 7"/>
-            <p:cNvSpPr txBox="1"/>
-            <p:nvPr/>
-          </p:nvSpPr>
-          <p:spPr>
-            <a:xfrm>
-              <a:off x="908304" y="2023110"/>
-              <a:ext cx="3200400" cy="184150"/>
-            </a:xfrm>
-            <a:prstGeom prst="rect">
-              <a:avLst/>
-            </a:prstGeom>
-            <a:noFill/>
-            <a:ln>
-              <a:noFill/>
-            </a:ln>
-          </p:spPr>
-          <p:txBody>
-            <a:bodyPr wrap="none" lIns="0" tIns="0" rIns="0" bIns="0" anchor="t" anchorCtr="0">
-              <a:spAutoFit/>
-            </a:bodyPr>
-            <a:lstStyle/>
-            <a:p>
-              <a:pPr algn="l"/>
-              <a:r>
-                <a:rPr lang="zh-CN" sz="1200" dirty="0">
-                  <a:solidFill>
-                    <a:schemeClr val="dk1"/>
-                  </a:solidFill>
-                  <a:latin typeface="+mn-lt"/>
-                  <a:ea typeface="+mn-ea"/>
-                  <a:cs typeface="+mn-cs"/>
-                </a:rPr>
-                <a:t>把产品原始输出收敛为结构化、</a:t>
-              </a:r>
-              <a:r>
-                <a:rPr lang="zh-CN" sz="1200" b="1" dirty="0">
-                  <a:solidFill>
-                    <a:schemeClr val="dk1"/>
-                  </a:solidFill>
-                  <a:latin typeface="+mn-lt"/>
-                  <a:ea typeface="+mn-ea"/>
-                  <a:cs typeface="+mn-cs"/>
-                </a:rPr>
-                <a:t>模板统一</a:t>
-              </a:r>
-              <a:r>
-                <a:rPr lang="zh-CN" sz="1200" dirty="0">
-                  <a:solidFill>
-                    <a:schemeClr val="dk1"/>
-                  </a:solidFill>
-                  <a:latin typeface="+mn-lt"/>
-                  <a:ea typeface="+mn-ea"/>
-                  <a:cs typeface="+mn-cs"/>
-                </a:rPr>
-                <a:t>的文档</a:t>
-              </a:r>
-              <a:endParaRPr lang="zh-CN" sz="1200" dirty="0">
-                <a:solidFill>
-                  <a:schemeClr val="dk1"/>
-                </a:solidFill>
-                <a:latin typeface="+mn-lt"/>
-                <a:ea typeface="+mn-ea"/>
-                <a:cs typeface="+mn-cs"/>
-              </a:endParaRPr>
-            </a:p>
-          </p:txBody>
-        </p:sp>
-        <p:sp>
-          <p:nvSpPr>
-            <p:cNvPr id="8" name="Rectangle 8"/>
-            <p:cNvSpPr/>
-            <p:nvPr/>
-          </p:nvSpPr>
-          <p:spPr>
-            <a:xfrm>
-              <a:off x="914400" y="2400300"/>
-              <a:ext cx="1905000" cy="495300"/>
-            </a:xfrm>
-            <a:prstGeom prst="roundRect">
-              <a:avLst>
-                <a:gd name="adj" fmla="val 15385"/>
-              </a:avLst>
-            </a:prstGeom>
-            <a:solidFill>
-              <a:schemeClr val="lt1"/>
-            </a:solidFill>
-            <a:ln>
-              <a:noFill/>
-            </a:ln>
-          </p:spPr>
-        </p:sp>
-        <p:sp>
-          <p:nvSpPr>
-            <p:cNvPr id="9" name="TextBox 9"/>
-            <p:cNvSpPr txBox="1"/>
-            <p:nvPr/>
-          </p:nvSpPr>
-          <p:spPr>
-            <a:xfrm>
-              <a:off x="1437513" y="2515552"/>
-              <a:ext cx="858774" cy="205359"/>
-            </a:xfrm>
-            <a:prstGeom prst="rect">
-              <a:avLst/>
-            </a:prstGeom>
-            <a:noFill/>
-            <a:ln>
-              <a:noFill/>
-            </a:ln>
-          </p:spPr>
-          <p:txBody>
-            <a:bodyPr wrap="none" lIns="0" tIns="0" rIns="0" bIns="0" anchor="t" anchorCtr="0">
-              <a:spAutoFit/>
-            </a:bodyPr>
-            <a:lstStyle/>
-            <a:p>
-              <a:pPr algn="ctr"/>
-              <a:r>
-                <a:rPr lang="zh-CN" sz="1050" dirty="0">
-                  <a:solidFill>
-                    <a:schemeClr val="accent6"/>
-                  </a:solidFill>
-                  <a:latin typeface="+mn-lt"/>
-                  <a:ea typeface="+mn-ea"/>
-                  <a:cs typeface="+mn-cs"/>
-                </a:rPr>
-                <a:t>原始需求文档</a:t>
-              </a:r>
-              <a:endParaRPr lang="zh-CN" sz="1050" dirty="0">
-                <a:solidFill>
-                  <a:schemeClr val="accent6"/>
-                </a:solidFill>
-                <a:latin typeface="+mn-lt"/>
-                <a:ea typeface="+mn-ea"/>
-                <a:cs typeface="+mn-cs"/>
-              </a:endParaRPr>
-            </a:p>
-          </p:txBody>
-        </p:sp>
-        <p:sp>
-          <p:nvSpPr>
-            <p:cNvPr id="10" name="TextBox 10"/>
-            <p:cNvSpPr txBox="1"/>
-            <p:nvPr/>
-          </p:nvSpPr>
-          <p:spPr>
-            <a:xfrm>
-              <a:off x="1649540" y="2706052"/>
-              <a:ext cx="434721" cy="205359"/>
-            </a:xfrm>
-            <a:prstGeom prst="rect">
-              <a:avLst/>
-            </a:prstGeom>
-            <a:noFill/>
-            <a:ln>
-              <a:noFill/>
-            </a:ln>
-          </p:spPr>
-          <p:txBody>
-            <a:bodyPr wrap="none" lIns="0" tIns="0" rIns="0" bIns="0" anchor="t" anchorCtr="0">
-              <a:spAutoFit/>
-            </a:bodyPr>
-            <a:lstStyle/>
-            <a:p>
-              <a:pPr algn="ctr"/>
-              <a:r>
-                <a:rPr lang="zh-CN" sz="1050" dirty="0">
-                  <a:solidFill>
-                    <a:schemeClr val="accent6"/>
-                  </a:solidFill>
-                  <a:latin typeface="+mn-lt"/>
-                  <a:ea typeface="+mn-ea"/>
-                  <a:cs typeface="+mn-cs"/>
-                </a:rPr>
-                <a:t>原型图</a:t>
-              </a:r>
-              <a:endParaRPr lang="zh-CN" sz="1050" dirty="0">
-                <a:solidFill>
-                  <a:schemeClr val="accent6"/>
-                </a:solidFill>
-                <a:latin typeface="+mn-lt"/>
-                <a:ea typeface="+mn-ea"/>
-                <a:cs typeface="+mn-cs"/>
-              </a:endParaRPr>
-            </a:p>
-          </p:txBody>
-        </p:sp>
-        <p:sp>
-          <p:nvSpPr>
-            <p:cNvPr id="11" name="Line 11"/>
-            <p:cNvSpPr/>
-            <p:nvPr/>
-          </p:nvSpPr>
-          <p:spPr>
-            <a:xfrm>
-              <a:off x="2857500" y="2647950"/>
-              <a:ext cx="533400" cy="1"/>
-            </a:xfrm>
-            <a:prstGeom prst="line">
-              <a:avLst/>
-            </a:prstGeom>
-            <a:noFill/>
-            <a:ln w="19050">
-              <a:solidFill>
-                <a:schemeClr val="accent1"/>
-              </a:solidFill>
-              <a:tailEnd type="triangle" w="lg" len="lg"/>
-            </a:ln>
-          </p:spPr>
-        </p:sp>
-        <p:sp>
-          <p:nvSpPr>
-            <p:cNvPr id="12" name="Rectangle 12"/>
-            <p:cNvSpPr/>
-            <p:nvPr/>
-          </p:nvSpPr>
-          <p:spPr>
-            <a:xfrm>
-              <a:off x="3429000" y="2400300"/>
-              <a:ext cx="2133600" cy="495300"/>
-            </a:xfrm>
-            <a:prstGeom prst="roundRect">
-              <a:avLst>
-                <a:gd name="adj" fmla="val 15385"/>
-              </a:avLst>
-            </a:prstGeom>
-            <a:solidFill>
-              <a:schemeClr val="accent1"/>
-            </a:solidFill>
-            <a:ln>
-              <a:noFill/>
-            </a:ln>
-          </p:spPr>
-        </p:sp>
-        <p:sp>
-          <p:nvSpPr>
-            <p:cNvPr id="13" name="TextBox 13"/>
-            <p:cNvSpPr txBox="1"/>
-            <p:nvPr/>
-          </p:nvSpPr>
-          <p:spPr>
-            <a:xfrm>
-              <a:off x="3869779" y="2575560"/>
-              <a:ext cx="1252042" cy="234696"/>
-            </a:xfrm>
-            <a:prstGeom prst="rect">
-              <a:avLst/>
-            </a:prstGeom>
-            <a:noFill/>
-            <a:ln>
-              <a:noFill/>
-            </a:ln>
-          </p:spPr>
-          <p:txBody>
-            <a:bodyPr wrap="none" lIns="0" tIns="0" rIns="0" bIns="0" anchor="t" anchorCtr="0">
-              <a:spAutoFit/>
-            </a:bodyPr>
-            <a:lstStyle/>
-            <a:p>
-              <a:pPr algn="ctr"/>
-              <a:r>
-                <a:rPr lang="zh-CN" sz="1200" b="1" dirty="0">
-                  <a:solidFill>
-                    <a:srgbClr val="FFFFFF"/>
-                  </a:solidFill>
-                  <a:latin typeface="+mn-lt"/>
-                  <a:ea typeface="+mn-ea"/>
-                  <a:cs typeface="+mn-cs"/>
-                </a:rPr>
-                <a:t>01-需求文档.md</a:t>
-              </a:r>
-              <a:endParaRPr lang="zh-CN" sz="1200" b="1" dirty="0">
-                <a:solidFill>
-                  <a:srgbClr val="FFFFFF"/>
-                </a:solidFill>
-                <a:latin typeface="+mn-lt"/>
-                <a:ea typeface="+mn-ea"/>
-                <a:cs typeface="+mn-cs"/>
-              </a:endParaRPr>
-            </a:p>
-          </p:txBody>
-        </p:sp>
-        <p:sp>
-          <p:nvSpPr>
-            <p:cNvPr id="14" name="TextBox 14"/>
-            <p:cNvSpPr txBox="1"/>
-            <p:nvPr/>
-          </p:nvSpPr>
-          <p:spPr>
-            <a:xfrm>
-              <a:off x="908304" y="3147060"/>
-              <a:ext cx="2686812" cy="768096"/>
-            </a:xfrm>
-            <a:prstGeom prst="rect">
-              <a:avLst/>
-            </a:prstGeom>
-            <a:noFill/>
-            <a:ln>
-              <a:noFill/>
-            </a:ln>
-          </p:spPr>
-          <p:txBody>
-            <a:bodyPr wrap="none" lIns="0" tIns="0" rIns="0" bIns="0" anchor="t" anchorCtr="0">
-              <a:spAutoFit/>
-            </a:bodyPr>
-            <a:lstStyle/>
-            <a:p>
-              <a:pPr marL="129540" indent="-129540" algn="l">
-                <a:lnSpc>
-                  <a:spcPts val="2100"/>
-                </a:lnSpc>
-                <a:buClr>
-                  <a:schemeClr val="dk1"/>
-                </a:buClr>
-                <a:buSzTx/>
-                <a:buFontTx/>
-                <a:buChar char="•"/>
-              </a:pPr>
-              <a:r>
-                <a:rPr lang="zh-CN" sz="1200" dirty="0">
-                  <a:solidFill>
-                    <a:schemeClr val="dk1"/>
-                  </a:solidFill>
-                  <a:latin typeface="+mn-lt"/>
-                  <a:ea typeface="+mn-ea"/>
-                  <a:cs typeface="+mn-cs"/>
-                </a:rPr>
-                <a:t>整理 + 澄清 + 结构化，统一模板</a:t>
-              </a:r>
-              <a:endParaRPr lang="zh-CN" sz="1200" dirty="0">
-                <a:solidFill>
-                  <a:schemeClr val="dk1"/>
-                </a:solidFill>
-                <a:latin typeface="+mn-lt"/>
-                <a:ea typeface="+mn-ea"/>
-                <a:cs typeface="+mn-cs"/>
-              </a:endParaRPr>
-            </a:p>
-            <a:p>
-              <a:pPr marL="129540" indent="-129540" algn="l">
-                <a:lnSpc>
-                  <a:spcPts val="2100"/>
-                </a:lnSpc>
-                <a:buClr>
-                  <a:schemeClr val="dk1"/>
-                </a:buClr>
-                <a:buSzTx/>
-                <a:buFontTx/>
-                <a:buChar char="•"/>
-              </a:pPr>
-              <a:r>
-                <a:rPr lang="zh-CN" sz="1200" dirty="0">
-                  <a:solidFill>
-                    <a:schemeClr val="dk1"/>
-                  </a:solidFill>
-                  <a:latin typeface="+mn-lt"/>
-                  <a:ea typeface="+mn-ea"/>
-                  <a:cs typeface="+mn-cs"/>
-                </a:rPr>
-                <a:t>每个功能点打上 REQ 编号</a:t>
-              </a:r>
-              <a:endParaRPr lang="zh-CN" sz="1200" dirty="0">
-                <a:solidFill>
-                  <a:schemeClr val="dk1"/>
-                </a:solidFill>
-                <a:latin typeface="+mn-lt"/>
-                <a:ea typeface="+mn-ea"/>
-                <a:cs typeface="+mn-cs"/>
-              </a:endParaRPr>
-            </a:p>
-            <a:p>
-              <a:pPr marL="129540" indent="-129540" algn="l">
-                <a:lnSpc>
-                  <a:spcPts val="2100"/>
-                </a:lnSpc>
-                <a:buClr>
-                  <a:schemeClr val="dk1"/>
-                </a:buClr>
-                <a:buSzTx/>
-                <a:buFontTx/>
-                <a:buChar char="•"/>
-              </a:pPr>
-              <a:r>
-                <a:rPr lang="zh-CN" sz="1200" dirty="0">
-                  <a:solidFill>
-                    <a:schemeClr val="dk1"/>
-                  </a:solidFill>
-                  <a:latin typeface="+mn-lt"/>
-                  <a:ea typeface="+mn-ea"/>
-                  <a:cs typeface="+mn-cs"/>
-                </a:rPr>
-                <a:t>skill：requirement-doc-bootstrap</a:t>
-              </a:r>
-              <a:endParaRPr lang="zh-CN" sz="1200" dirty="0">
-                <a:solidFill>
-                  <a:schemeClr val="dk1"/>
-                </a:solidFill>
-                <a:latin typeface="+mn-lt"/>
-                <a:ea typeface="+mn-ea"/>
-                <a:cs typeface="+mn-cs"/>
-              </a:endParaRPr>
-            </a:p>
-          </p:txBody>
-        </p:sp>
-        <p:sp>
-          <p:nvSpPr>
-            <p:cNvPr id="15" name="TextBox 15"/>
-            <p:cNvSpPr txBox="1"/>
-            <p:nvPr/>
-          </p:nvSpPr>
-          <p:spPr>
-            <a:xfrm>
-              <a:off x="909066" y="4268152"/>
-              <a:ext cx="3169463" cy="205359"/>
-            </a:xfrm>
-            <a:prstGeom prst="rect">
-              <a:avLst/>
-            </a:prstGeom>
-            <a:noFill/>
-            <a:ln>
-              <a:noFill/>
-            </a:ln>
-          </p:spPr>
-          <p:txBody>
-            <a:bodyPr wrap="none" lIns="0" tIns="0" rIns="0" bIns="0" anchor="t" anchorCtr="0">
-              <a:spAutoFit/>
-            </a:bodyPr>
-            <a:lstStyle/>
-            <a:p>
-              <a:pPr algn="l"/>
-              <a:r>
-                <a:rPr lang="zh-CN" sz="1050" dirty="0">
-                  <a:solidFill>
-                    <a:schemeClr val="accent6"/>
-                  </a:solidFill>
-                  <a:latin typeface="+mn-lt"/>
-                  <a:ea typeface="+mn-ea"/>
-                  <a:cs typeface="+mn-cs"/>
-                </a:rPr>
-                <a:t>AI 可稳定消费：格式统一、口径一致、一处可查</a:t>
-              </a:r>
-              <a:endParaRPr lang="zh-CN" sz="1050" dirty="0">
-                <a:solidFill>
-                  <a:schemeClr val="accent6"/>
-                </a:solidFill>
-                <a:latin typeface="+mn-lt"/>
-                <a:ea typeface="+mn-ea"/>
-                <a:cs typeface="+mn-cs"/>
-              </a:endParaRPr>
-            </a:p>
-          </p:txBody>
-        </p:sp>
-      </p:grpSp>
-      <p:grpSp>
-        <p:nvGrpSpPr>
-          <p:cNvPr id="27" name="Group 27"/>
-          <p:cNvGrpSpPr/>
-          <p:nvPr/>
-        </p:nvGrpSpPr>
-        <p:grpSpPr>
-          <a:xfrm>
-            <a:off x="6248400" y="1428750"/>
-            <a:ext cx="5334000" cy="3619500"/>
-            <a:chOff x="6248400" y="1428750"/>
-            <a:chExt cx="5334000" cy="3619500"/>
-          </a:xfrm>
-        </p:grpSpPr>
-        <p:sp>
-          <p:nvSpPr>
-            <p:cNvPr id="17" name="Rectangle 17"/>
-            <p:cNvSpPr/>
-            <p:nvPr/>
-          </p:nvSpPr>
-          <p:spPr>
-            <a:xfrm>
-              <a:off x="6248400" y="1428750"/>
-              <a:ext cx="5334000" cy="3619500"/>
-            </a:xfrm>
-            <a:prstGeom prst="roundRect">
-              <a:avLst>
-                <a:gd name="adj" fmla="val 2105"/>
-              </a:avLst>
-            </a:prstGeom>
-            <a:solidFill>
-              <a:schemeClr val="accent5"/>
-            </a:solidFill>
-            <a:ln>
-              <a:noFill/>
-            </a:ln>
-          </p:spPr>
-        </p:sp>
-        <p:sp>
-          <p:nvSpPr>
-            <p:cNvPr id="18" name="TextBox 18"/>
-            <p:cNvSpPr txBox="1"/>
-            <p:nvPr/>
-          </p:nvSpPr>
-          <p:spPr>
-            <a:xfrm>
-              <a:off x="6544818" y="1669732"/>
-              <a:ext cx="2250440" cy="253365"/>
-            </a:xfrm>
-            <a:prstGeom prst="rect">
-              <a:avLst/>
-            </a:prstGeom>
-            <a:noFill/>
-            <a:ln>
-              <a:noFill/>
-            </a:ln>
-          </p:spPr>
-          <p:txBody>
-            <a:bodyPr wrap="none" lIns="0" tIns="0" rIns="0" bIns="0" anchor="t" anchorCtr="0">
-              <a:spAutoFit/>
-            </a:bodyPr>
-            <a:lstStyle/>
-            <a:p>
-              <a:pPr algn="l"/>
-              <a:r>
-                <a:rPr lang="zh-CN" sz="1650" b="1" dirty="0">
-                  <a:solidFill>
-                    <a:schemeClr val="accent1"/>
-                  </a:solidFill>
-                  <a:latin typeface="+mn-lt"/>
-                  <a:ea typeface="+mn-ea"/>
-                  <a:cs typeface="+mn-cs"/>
-                </a:rPr>
-                <a:t>版本增量回写基线</a:t>
-              </a:r>
-              <a:r>
-                <a:rPr lang="en-US" altLang="zh-CN" sz="1650" b="1" dirty="0">
-                  <a:solidFill>
-                    <a:schemeClr val="accent1"/>
-                  </a:solidFill>
-                  <a:latin typeface="+mn-lt"/>
-                  <a:ea typeface="+mn-ea"/>
-                  <a:cs typeface="+mn-cs"/>
-                </a:rPr>
-                <a:t>(</a:t>
-              </a:r>
-              <a:r>
-                <a:rPr lang="zh-CN" altLang="en-US" sz="1650" b="1" dirty="0">
-                  <a:solidFill>
-                    <a:schemeClr val="accent1"/>
-                  </a:solidFill>
-                  <a:latin typeface="+mn-lt"/>
-                  <a:ea typeface="+mn-ea"/>
-                  <a:cs typeface="+mn-cs"/>
-                </a:rPr>
-                <a:t>全量</a:t>
-              </a:r>
-              <a:r>
-                <a:rPr lang="en-US" altLang="zh-CN" sz="1650" b="1" dirty="0">
-                  <a:solidFill>
-                    <a:schemeClr val="accent1"/>
-                  </a:solidFill>
-                  <a:latin typeface="+mn-lt"/>
-                  <a:ea typeface="+mn-ea"/>
-                  <a:cs typeface="+mn-cs"/>
-                </a:rPr>
-                <a:t>)</a:t>
-              </a:r>
-              <a:endParaRPr lang="en-US" altLang="zh-CN" sz="1650" b="1" dirty="0">
-                <a:solidFill>
-                  <a:schemeClr val="accent1"/>
-                </a:solidFill>
-                <a:latin typeface="+mn-lt"/>
-                <a:ea typeface="+mn-ea"/>
-                <a:cs typeface="+mn-cs"/>
-              </a:endParaRPr>
-            </a:p>
-          </p:txBody>
-        </p:sp>
-        <p:sp>
-          <p:nvSpPr>
-            <p:cNvPr id="19" name="TextBox 19"/>
-            <p:cNvSpPr txBox="1"/>
-            <p:nvPr/>
-          </p:nvSpPr>
-          <p:spPr>
-            <a:xfrm>
-              <a:off x="6547104" y="2023110"/>
-              <a:ext cx="3673450" cy="234696"/>
-            </a:xfrm>
-            <a:prstGeom prst="rect">
-              <a:avLst/>
-            </a:prstGeom>
-            <a:noFill/>
-            <a:ln>
-              <a:noFill/>
-            </a:ln>
-          </p:spPr>
-          <p:txBody>
-            <a:bodyPr wrap="none" lIns="0" tIns="0" rIns="0" bIns="0" anchor="t" anchorCtr="0">
-              <a:spAutoFit/>
-            </a:bodyPr>
-            <a:lstStyle/>
-            <a:p>
-              <a:pPr algn="l"/>
-              <a:r>
-                <a:rPr lang="zh-CN" sz="1200" dirty="0">
-                  <a:solidFill>
-                    <a:schemeClr val="dk1"/>
-                  </a:solidFill>
-                  <a:latin typeface="+mn-lt"/>
-                  <a:ea typeface="+mn-ea"/>
-                  <a:cs typeface="+mn-cs"/>
-                </a:rPr>
-                <a:t>版本关闭时，把本版增量按 REQ 合并回模块基线</a:t>
-              </a:r>
-              <a:endParaRPr lang="zh-CN" sz="1200" dirty="0">
-                <a:solidFill>
-                  <a:schemeClr val="dk1"/>
-                </a:solidFill>
-                <a:latin typeface="+mn-lt"/>
-                <a:ea typeface="+mn-ea"/>
-                <a:cs typeface="+mn-cs"/>
-              </a:endParaRPr>
-            </a:p>
-          </p:txBody>
-        </p:sp>
-        <p:sp>
-          <p:nvSpPr>
-            <p:cNvPr id="20" name="Rectangle 20"/>
-            <p:cNvSpPr/>
-            <p:nvPr/>
-          </p:nvSpPr>
-          <p:spPr>
-            <a:xfrm>
-              <a:off x="6553200" y="2400300"/>
-              <a:ext cx="1714500" cy="495300"/>
-            </a:xfrm>
-            <a:prstGeom prst="roundRect">
-              <a:avLst>
-                <a:gd name="adj" fmla="val 15385"/>
-              </a:avLst>
-            </a:prstGeom>
-            <a:solidFill>
-              <a:schemeClr val="lt1"/>
-            </a:solidFill>
-            <a:ln>
-              <a:noFill/>
-            </a:ln>
-          </p:spPr>
-        </p:sp>
-        <p:sp>
-          <p:nvSpPr>
-            <p:cNvPr id="21" name="TextBox 21"/>
-            <p:cNvSpPr txBox="1"/>
-            <p:nvPr/>
-          </p:nvSpPr>
-          <p:spPr>
-            <a:xfrm>
-              <a:off x="7081266" y="2575560"/>
-              <a:ext cx="658368" cy="234696"/>
-            </a:xfrm>
-            <a:prstGeom prst="rect">
-              <a:avLst/>
-            </a:prstGeom>
-            <a:noFill/>
-            <a:ln>
-              <a:noFill/>
-            </a:ln>
-          </p:spPr>
-          <p:txBody>
-            <a:bodyPr wrap="none" lIns="0" tIns="0" rIns="0" bIns="0" anchor="t" anchorCtr="0">
-              <a:spAutoFit/>
-            </a:bodyPr>
-            <a:lstStyle/>
-            <a:p>
-              <a:pPr algn="ctr"/>
-              <a:r>
-                <a:rPr lang="zh-CN" sz="1200" b="1" dirty="0">
-                  <a:solidFill>
-                    <a:schemeClr val="dk1"/>
-                  </a:solidFill>
-                  <a:latin typeface="+mn-lt"/>
-                  <a:ea typeface="+mn-ea"/>
-                  <a:cs typeface="+mn-cs"/>
-                </a:rPr>
-                <a:t>版本增量</a:t>
-              </a:r>
-              <a:endParaRPr lang="zh-CN" sz="1200" b="1" dirty="0">
-                <a:solidFill>
-                  <a:schemeClr val="dk1"/>
-                </a:solidFill>
-                <a:latin typeface="+mn-lt"/>
-                <a:ea typeface="+mn-ea"/>
-                <a:cs typeface="+mn-cs"/>
-              </a:endParaRPr>
-            </a:p>
-          </p:txBody>
-        </p:sp>
-        <p:sp>
-          <p:nvSpPr>
-            <p:cNvPr id="22" name="Line 22"/>
-            <p:cNvSpPr/>
-            <p:nvPr/>
-          </p:nvSpPr>
-          <p:spPr>
-            <a:xfrm>
-              <a:off x="8305800" y="2647950"/>
-              <a:ext cx="533400" cy="1"/>
-            </a:xfrm>
-            <a:prstGeom prst="line">
-              <a:avLst/>
-            </a:prstGeom>
-            <a:noFill/>
-            <a:ln w="19050">
-              <a:solidFill>
-                <a:schemeClr val="accent1"/>
-              </a:solidFill>
-              <a:tailEnd type="triangle" w="lg" len="lg"/>
-            </a:ln>
-          </p:spPr>
-        </p:sp>
-        <p:sp>
-          <p:nvSpPr>
-            <p:cNvPr id="23" name="Rectangle 23"/>
-            <p:cNvSpPr/>
-            <p:nvPr/>
-          </p:nvSpPr>
-          <p:spPr>
-            <a:xfrm>
-              <a:off x="8877300" y="2400300"/>
-              <a:ext cx="2400300" cy="495300"/>
-            </a:xfrm>
-            <a:prstGeom prst="roundRect">
-              <a:avLst>
-                <a:gd name="adj" fmla="val 15385"/>
-              </a:avLst>
-            </a:prstGeom>
-            <a:solidFill>
-              <a:schemeClr val="accent1"/>
-            </a:solidFill>
-            <a:ln>
-              <a:noFill/>
-            </a:ln>
-          </p:spPr>
-        </p:sp>
-        <p:sp>
-          <p:nvSpPr>
-            <p:cNvPr id="24" name="TextBox 24"/>
-            <p:cNvSpPr txBox="1"/>
-            <p:nvPr/>
-          </p:nvSpPr>
-          <p:spPr>
-            <a:xfrm>
-              <a:off x="9425178" y="2575560"/>
-              <a:ext cx="1304544" cy="234696"/>
-            </a:xfrm>
-            <a:prstGeom prst="rect">
-              <a:avLst/>
-            </a:prstGeom>
-            <a:noFill/>
-            <a:ln>
-              <a:noFill/>
-            </a:ln>
-          </p:spPr>
-          <p:txBody>
-            <a:bodyPr wrap="none" lIns="0" tIns="0" rIns="0" bIns="0" anchor="t" anchorCtr="0">
-              <a:spAutoFit/>
-            </a:bodyPr>
-            <a:lstStyle/>
-            <a:p>
-              <a:pPr algn="ctr"/>
-              <a:r>
-                <a:rPr lang="zh-CN" sz="1200" b="1" dirty="0">
-                  <a:solidFill>
-                    <a:srgbClr val="FFFFFF"/>
-                  </a:solidFill>
-                  <a:latin typeface="+mn-lt"/>
-                  <a:ea typeface="+mn-ea"/>
-                  <a:cs typeface="+mn-cs"/>
-                </a:rPr>
-                <a:t>模块基线（全量）</a:t>
-              </a:r>
-              <a:endParaRPr lang="zh-CN" sz="1200" b="1" dirty="0">
-                <a:solidFill>
-                  <a:srgbClr val="FFFFFF"/>
-                </a:solidFill>
-                <a:latin typeface="+mn-lt"/>
-                <a:ea typeface="+mn-ea"/>
-                <a:cs typeface="+mn-cs"/>
-              </a:endParaRPr>
-            </a:p>
-          </p:txBody>
-        </p:sp>
-        <p:sp>
-          <p:nvSpPr>
-            <p:cNvPr id="25" name="TextBox 25"/>
-            <p:cNvSpPr txBox="1"/>
-            <p:nvPr/>
-          </p:nvSpPr>
-          <p:spPr>
-            <a:xfrm>
-              <a:off x="6547104" y="3147060"/>
-              <a:ext cx="2694432" cy="768096"/>
-            </a:xfrm>
-            <a:prstGeom prst="rect">
-              <a:avLst/>
-            </a:prstGeom>
-            <a:noFill/>
-            <a:ln>
-              <a:noFill/>
-            </a:ln>
-          </p:spPr>
-          <p:txBody>
-            <a:bodyPr wrap="none" lIns="0" tIns="0" rIns="0" bIns="0" anchor="t" anchorCtr="0">
-              <a:spAutoFit/>
-            </a:bodyPr>
-            <a:lstStyle/>
-            <a:p>
-              <a:pPr marL="129540" indent="-129540" algn="l">
-                <a:lnSpc>
-                  <a:spcPts val="2100"/>
-                </a:lnSpc>
-                <a:buClr>
-                  <a:schemeClr val="dk1"/>
-                </a:buClr>
-                <a:buSzTx/>
-                <a:buFontTx/>
-                <a:buChar char="•"/>
-              </a:pPr>
-              <a:r>
-                <a:rPr lang="zh-CN" sz="1200" dirty="0">
-                  <a:solidFill>
-                    <a:schemeClr val="dk1"/>
-                  </a:solidFill>
-                  <a:latin typeface="+mn-lt"/>
-                  <a:ea typeface="+mn-ea"/>
-                  <a:cs typeface="+mn-cs"/>
-                </a:rPr>
-                <a:t>skill：version-archive（版本归档）</a:t>
-              </a:r>
-              <a:endParaRPr lang="zh-CN" sz="1200" dirty="0">
-                <a:solidFill>
-                  <a:schemeClr val="dk1"/>
-                </a:solidFill>
-                <a:latin typeface="+mn-lt"/>
-                <a:ea typeface="+mn-ea"/>
-                <a:cs typeface="+mn-cs"/>
-              </a:endParaRPr>
-            </a:p>
-            <a:p>
-              <a:pPr marL="129540" indent="-129540" algn="l">
-                <a:lnSpc>
-                  <a:spcPts val="2100"/>
-                </a:lnSpc>
-                <a:buClr>
-                  <a:schemeClr val="dk1"/>
-                </a:buClr>
-                <a:buSzTx/>
-                <a:buFontTx/>
-                <a:buChar char="•"/>
-              </a:pPr>
-              <a:r>
-                <a:rPr lang="zh-CN" sz="1200" dirty="0">
-                  <a:solidFill>
-                    <a:schemeClr val="dk1"/>
-                  </a:solidFill>
-                  <a:latin typeface="+mn-lt"/>
-                  <a:ea typeface="+mn-ea"/>
-                  <a:cs typeface="+mn-cs"/>
-                </a:rPr>
-                <a:t>完整描述始终一处可查</a:t>
-              </a:r>
-              <a:endParaRPr lang="zh-CN" sz="1200" dirty="0">
-                <a:solidFill>
-                  <a:schemeClr val="dk1"/>
-                </a:solidFill>
-                <a:latin typeface="+mn-lt"/>
-                <a:ea typeface="+mn-ea"/>
-                <a:cs typeface="+mn-cs"/>
-              </a:endParaRPr>
-            </a:p>
-            <a:p>
-              <a:pPr marL="129540" indent="-129540" algn="l">
-                <a:lnSpc>
-                  <a:spcPts val="2100"/>
-                </a:lnSpc>
-                <a:buClr>
-                  <a:schemeClr val="dk1"/>
-                </a:buClr>
-                <a:buSzTx/>
-                <a:buFontTx/>
-                <a:buChar char="•"/>
-              </a:pPr>
-              <a:r>
-                <a:rPr lang="zh-CN" sz="1200" dirty="0">
-                  <a:solidFill>
-                    <a:schemeClr val="dk1"/>
-                  </a:solidFill>
-                  <a:latin typeface="+mn-lt"/>
-                  <a:ea typeface="+mn-ea"/>
-                  <a:cs typeface="+mn-cs"/>
-                </a:rPr>
-                <a:t>开发/AI 无需翻多个版本文档拼凑</a:t>
-              </a:r>
-              <a:endParaRPr lang="zh-CN" sz="1200" dirty="0">
-                <a:solidFill>
-                  <a:schemeClr val="dk1"/>
-                </a:solidFill>
-                <a:latin typeface="+mn-lt"/>
-                <a:ea typeface="+mn-ea"/>
-                <a:cs typeface="+mn-cs"/>
-              </a:endParaRPr>
-            </a:p>
-          </p:txBody>
-        </p:sp>
-        <p:sp>
-          <p:nvSpPr>
-            <p:cNvPr id="26" name="TextBox 26"/>
-            <p:cNvSpPr txBox="1"/>
-            <p:nvPr/>
-          </p:nvSpPr>
-          <p:spPr>
-            <a:xfrm>
-              <a:off x="6547866" y="4268152"/>
-              <a:ext cx="2307622" cy="205359"/>
-            </a:xfrm>
-            <a:prstGeom prst="rect">
-              <a:avLst/>
-            </a:prstGeom>
-            <a:noFill/>
-            <a:ln>
-              <a:noFill/>
-            </a:ln>
-          </p:spPr>
-          <p:txBody>
-            <a:bodyPr wrap="none" lIns="0" tIns="0" rIns="0" bIns="0" anchor="t" anchorCtr="0">
-              <a:spAutoFit/>
-            </a:bodyPr>
-            <a:lstStyle/>
-            <a:p>
-              <a:pPr algn="l"/>
-              <a:r>
-                <a:rPr lang="zh-CN" sz="1050" dirty="0">
-                  <a:solidFill>
-                    <a:schemeClr val="accent6"/>
-                  </a:solidFill>
-                  <a:latin typeface="+mn-lt"/>
-                  <a:ea typeface="+mn-ea"/>
-                  <a:cs typeface="+mn-cs"/>
-                </a:rPr>
-                <a:t>解决痛点②：增量需求点 vs 完整描述</a:t>
-              </a:r>
-              <a:endParaRPr lang="zh-CN" sz="1050" dirty="0">
-                <a:solidFill>
-                  <a:schemeClr val="accent6"/>
-                </a:solidFill>
-                <a:latin typeface="+mn-lt"/>
-                <a:ea typeface="+mn-ea"/>
-                <a:cs typeface="+mn-cs"/>
-              </a:endParaRPr>
-            </a:p>
-          </p:txBody>
-        </p:sp>
-      </p:grpSp>
-      <p:sp>
-        <p:nvSpPr>
-          <p:cNvPr id="28" name="TextBox 28"/>
-          <p:cNvSpPr txBox="1"/>
-          <p:nvPr/>
-        </p:nvSpPr>
-        <p:spPr>
-          <a:xfrm>
-            <a:off x="3254807" y="5585460"/>
-            <a:ext cx="5682386" cy="234696"/>
-          </a:xfrm>
-          <a:prstGeom prst="rect">
-            <a:avLst/>
-          </a:prstGeom>
-          <a:noFill/>
-          <a:ln>
-            <a:noFill/>
-          </a:ln>
-        </p:spPr>
-        <p:txBody>
-          <a:bodyPr wrap="none" lIns="0" tIns="0" rIns="0" bIns="0" anchor="t" anchorCtr="0">
-            <a:spAutoFit/>
-          </a:bodyPr>
-          <a:lstStyle/>
-          <a:p>
-            <a:pPr algn="ctr"/>
-            <a:r>
-              <a:rPr lang="zh-CN" sz="1200" dirty="0">
-                <a:solidFill>
-                  <a:schemeClr val="accent6"/>
-                </a:solidFill>
-                <a:latin typeface="+mn-lt"/>
-                <a:ea typeface="+mn-ea"/>
-                <a:cs typeface="+mn-cs"/>
-              </a:rPr>
-              <a:t>知识库颗粒度越细，测试越准——但整理与审核时间也越多（权衡详见实战章节）</a:t>
-            </a:r>
-            <a:endParaRPr lang="zh-CN" sz="1200" dirty="0">
-              <a:solidFill>
-                <a:schemeClr val="accent6"/>
-              </a:solidFill>
-              <a:latin typeface="+mn-lt"/>
-              <a:ea typeface="+mn-ea"/>
-              <a:cs typeface="+mn-cs"/>
-            </a:endParaRPr>
-          </a:p>
-        </p:txBody>
-      </p:sp>
-      <p:sp>
-        <p:nvSpPr>
-          <p:cNvPr id="29" name="TextBox 29"/>
-          <p:cNvSpPr txBox="1"/>
-          <p:nvPr/>
-        </p:nvSpPr>
-        <p:spPr>
-          <a:xfrm>
-            <a:off x="11103540" y="6497002"/>
-            <a:ext cx="484194" cy="205359"/>
-          </a:xfrm>
-          <a:prstGeom prst="rect">
-            <a:avLst/>
-          </a:prstGeom>
-          <a:noFill/>
-          <a:ln>
-            <a:noFill/>
-          </a:ln>
-        </p:spPr>
-        <p:txBody>
-          <a:bodyPr wrap="none" lIns="0" tIns="0" rIns="0" bIns="0" anchor="t" anchorCtr="0">
-            <a:spAutoFit/>
-          </a:bodyPr>
-          <a:lstStyle/>
-          <a:p>
-            <a:pPr algn="r"/>
-            <a:r>
-              <a:rPr lang="zh-CN" sz="1050" dirty="0">
-                <a:solidFill>
-                  <a:schemeClr val="accent6"/>
-                </a:solidFill>
-                <a:latin typeface="+mn-lt"/>
-                <a:ea typeface="+mn-ea"/>
-                <a:cs typeface="+mn-cs"/>
-              </a:rPr>
-              <a:t>05 / 23</a:t>
-            </a:r>
-            <a:endParaRPr lang="zh-CN" sz="1050" dirty="0">
-              <a:solidFill>
-                <a:schemeClr val="accent6"/>
-              </a:solidFill>
-              <a:latin typeface="+mn-lt"/>
-              <a:ea typeface="+mn-ea"/>
-              <a:cs typeface="+mn-cs"/>
-            </a:endParaRPr>
-          </a:p>
-        </p:txBody>
-      </p:sp>
-      <p:grpSp>
-        <p:nvGrpSpPr>
-          <p:cNvPr id="30" name="Group 10"/>
+          <p:cNvPr id="39" name="Group 10"/>
           <p:cNvGrpSpPr/>
           <p:nvPr/>
         </p:nvGrpSpPr>
@@ -31487,7 +30504,7 @@
         </p:grpSpPr>
         <p:sp>
           <p:nvSpPr>
-            <p:cNvPr id="31" name="Rectangle 2"/>
+            <p:cNvPr id="40" name="Rectangle 2"/>
             <p:cNvSpPr/>
             <p:nvPr/>
           </p:nvSpPr>
@@ -31511,7 +30528,7 @@
         </p:sp>
         <p:sp>
           <p:nvSpPr>
-            <p:cNvPr id="32" name="TextBox 3"/>
+            <p:cNvPr id="41" name="TextBox 3"/>
             <p:cNvSpPr txBox="1"/>
             <p:nvPr/>
           </p:nvSpPr>
@@ -31532,7 +30549,6 @@
             <a:bodyPr wrap="none" lIns="0" tIns="0" rIns="0" bIns="0" anchor="t" anchorCtr="0">
               <a:spAutoFit/>
             </a:bodyPr>
-            <a:lstStyle/>
             <a:p>
               <a:pPr algn="ctr"/>
               <a:r>
@@ -31559,7 +30575,7 @@
         </p:sp>
         <p:sp>
           <p:nvSpPr>
-            <p:cNvPr id="33" name="Polygon 4"/>
+            <p:cNvPr id="42" name="Polygon 4"/>
             <p:cNvSpPr/>
             <p:nvPr/>
           </p:nvSpPr>
@@ -31599,7 +30615,7 @@
         </p:sp>
         <p:sp>
           <p:nvSpPr>
-            <p:cNvPr id="34" name="Rectangle 5"/>
+            <p:cNvPr id="43" name="Rectangle 5"/>
             <p:cNvSpPr/>
             <p:nvPr/>
           </p:nvSpPr>
@@ -31623,7 +30639,7 @@
         </p:sp>
         <p:sp>
           <p:nvSpPr>
-            <p:cNvPr id="35" name="TextBox 6"/>
+            <p:cNvPr id="44" name="TextBox 6"/>
             <p:cNvSpPr txBox="1"/>
             <p:nvPr/>
           </p:nvSpPr>
@@ -31644,7 +30660,6 @@
             <a:bodyPr wrap="none" lIns="0" tIns="0" rIns="0" bIns="0" anchor="t" anchorCtr="0">
               <a:spAutoFit/>
             </a:bodyPr>
-            <a:lstStyle/>
             <a:p>
               <a:pPr algn="ctr"/>
               <a:r>
@@ -31671,7 +30686,7 @@
         </p:sp>
         <p:sp>
           <p:nvSpPr>
-            <p:cNvPr id="36" name="Polygon 7"/>
+            <p:cNvPr id="45" name="Polygon 7"/>
             <p:cNvSpPr/>
             <p:nvPr/>
           </p:nvSpPr>
@@ -31711,7 +30726,7 @@
         </p:sp>
         <p:sp>
           <p:nvSpPr>
-            <p:cNvPr id="37" name="Rectangle 8"/>
+            <p:cNvPr id="46" name="Rectangle 8"/>
             <p:cNvSpPr/>
             <p:nvPr/>
           </p:nvSpPr>
@@ -31735,7 +30750,7 @@
         </p:sp>
         <p:sp>
           <p:nvSpPr>
-            <p:cNvPr id="38" name="TextBox 9"/>
+            <p:cNvPr id="47" name="TextBox 9"/>
             <p:cNvSpPr txBox="1"/>
             <p:nvPr/>
           </p:nvSpPr>
@@ -31756,7 +30771,6 @@
             <a:bodyPr wrap="none" lIns="0" tIns="0" rIns="0" bIns="0" anchor="t" anchorCtr="0">
               <a:spAutoFit/>
             </a:bodyPr>
-            <a:lstStyle/>
             <a:p>
               <a:pPr algn="ctr"/>
               <a:r>
@@ -31782,6 +30796,1651 @@
           </p:txBody>
         </p:sp>
       </p:grpSp>
+      <p:grpSp>
+        <p:nvGrpSpPr>
+          <p:cNvPr id="48" name="Group 13"/>
+          <p:cNvGrpSpPr/>
+          <p:nvPr/>
+        </p:nvGrpSpPr>
+        <p:grpSpPr>
+          <a:xfrm>
+            <a:off x="609600" y="568642"/>
+            <a:ext cx="6498717" cy="438150"/>
+            <a:chOff x="609600" y="568642"/>
+            <a:chExt cx="6498717" cy="438150"/>
+          </a:xfrm>
+        </p:grpSpPr>
+        <p:sp>
+          <p:nvSpPr>
+            <p:cNvPr id="49" name="Rectangle 11"/>
+            <p:cNvSpPr/>
+            <p:nvPr/>
+          </p:nvSpPr>
+          <p:spPr>
+            <a:xfrm>
+              <a:off x="609600" y="571500"/>
+              <a:ext cx="76200" cy="381000"/>
+            </a:xfrm>
+            <a:prstGeom prst="rect">
+              <a:avLst/>
+            </a:prstGeom>
+            <a:solidFill>
+              <a:schemeClr val="accent1"/>
+            </a:solidFill>
+            <a:ln>
+              <a:noFill/>
+            </a:ln>
+          </p:spPr>
+        </p:sp>
+        <p:sp>
+          <p:nvSpPr>
+            <p:cNvPr id="50" name="TextBox 12"/>
+            <p:cNvSpPr txBox="1"/>
+            <p:nvPr/>
+          </p:nvSpPr>
+          <p:spPr>
+            <a:xfrm>
+              <a:off x="861822" y="568642"/>
+              <a:ext cx="6246495" cy="438150"/>
+            </a:xfrm>
+            <a:prstGeom prst="rect">
+              <a:avLst/>
+            </a:prstGeom>
+            <a:noFill/>
+            <a:ln>
+              <a:noFill/>
+            </a:ln>
+          </p:spPr>
+          <p:txBody>
+            <a:bodyPr wrap="none" lIns="0" tIns="0" rIns="0" bIns="0" anchor="t" anchorCtr="0">
+              <a:spAutoFit/>
+            </a:bodyPr>
+            <a:p>
+              <a:pPr algn="l"/>
+              <a:r>
+                <a:rPr lang="zh-CN" sz="2850" b="1" dirty="0">
+                  <a:solidFill>
+                    <a:schemeClr val="accent1"/>
+                  </a:solidFill>
+                  <a:latin typeface="+mn-lt"/>
+                  <a:ea typeface="+mn-ea"/>
+                  <a:cs typeface="+mn-cs"/>
+                </a:rPr>
+                <a:t>方案：统一模板结构化 + 增量维护全量</a:t>
+              </a:r>
+              <a:endParaRPr lang="zh-CN" sz="2850" b="1" dirty="0">
+                <a:solidFill>
+                  <a:schemeClr val="accent1"/>
+                </a:solidFill>
+                <a:latin typeface="+mn-lt"/>
+                <a:ea typeface="+mn-ea"/>
+                <a:cs typeface="+mn-cs"/>
+              </a:endParaRPr>
+            </a:p>
+          </p:txBody>
+        </p:sp>
+      </p:grpSp>
+      <p:grpSp>
+        <p:nvGrpSpPr>
+          <p:cNvPr id="51" name="Group 17"/>
+          <p:cNvGrpSpPr/>
+          <p:nvPr/>
+        </p:nvGrpSpPr>
+        <p:grpSpPr>
+          <a:xfrm>
+            <a:off x="609600" y="1085850"/>
+            <a:ext cx="10972800" cy="365951"/>
+            <a:chOff x="609600" y="1085850"/>
+            <a:chExt cx="10972800" cy="365951"/>
+          </a:xfrm>
+        </p:grpSpPr>
+        <p:sp>
+          <p:nvSpPr>
+            <p:cNvPr id="52" name="Rectangle 14"/>
+            <p:cNvSpPr/>
+            <p:nvPr/>
+          </p:nvSpPr>
+          <p:spPr>
+            <a:xfrm>
+              <a:off x="609600" y="1085850"/>
+              <a:ext cx="10972800" cy="361950"/>
+            </a:xfrm>
+            <a:prstGeom prst="roundRect">
+              <a:avLst>
+                <a:gd name="adj" fmla="val 15789"/>
+              </a:avLst>
+            </a:prstGeom>
+            <a:solidFill>
+              <a:schemeClr val="accent5"/>
+            </a:solidFill>
+            <a:ln>
+              <a:noFill/>
+            </a:ln>
+          </p:spPr>
+        </p:sp>
+        <p:sp>
+          <p:nvSpPr>
+            <p:cNvPr id="53" name="Rectangle 15"/>
+            <p:cNvSpPr/>
+            <p:nvPr/>
+          </p:nvSpPr>
+          <p:spPr>
+            <a:xfrm>
+              <a:off x="609600" y="1085850"/>
+              <a:ext cx="57150" cy="361950"/>
+            </a:xfrm>
+            <a:prstGeom prst="rect">
+              <a:avLst/>
+            </a:prstGeom>
+            <a:solidFill>
+              <a:schemeClr val="accent1"/>
+            </a:solidFill>
+            <a:ln>
+              <a:noFill/>
+            </a:ln>
+          </p:spPr>
+        </p:sp>
+        <p:sp>
+          <p:nvSpPr>
+            <p:cNvPr id="54" name="TextBox 16"/>
+            <p:cNvSpPr txBox="1"/>
+            <p:nvPr/>
+          </p:nvSpPr>
+          <p:spPr>
+            <a:xfrm>
+              <a:off x="869442" y="1187768"/>
+              <a:ext cx="7619409" cy="264033"/>
+            </a:xfrm>
+            <a:prstGeom prst="rect">
+              <a:avLst/>
+            </a:prstGeom>
+            <a:noFill/>
+            <a:ln>
+              <a:noFill/>
+            </a:ln>
+          </p:spPr>
+          <p:txBody>
+            <a:bodyPr wrap="none" lIns="0" tIns="0" rIns="0" bIns="0" anchor="t" anchorCtr="0">
+              <a:spAutoFit/>
+            </a:bodyPr>
+            <a:p>
+              <a:pPr algn="l"/>
+              <a:r>
+                <a:rPr lang="zh-CN" sz="1350" dirty="0">
+                  <a:solidFill>
+                    <a:schemeClr val="dk1"/>
+                  </a:solidFill>
+                  <a:latin typeface="+mn-lt"/>
+                  <a:ea typeface="+mn-ea"/>
+                  <a:cs typeface="+mn-cs"/>
+                </a:rPr>
+                <a:t>一句话原理：给每个模块维护一份「最新最全」的需求文档 —— 统一模板结构化 + 增量维护全量</a:t>
+              </a:r>
+              <a:endParaRPr lang="zh-CN" sz="1350" dirty="0">
+                <a:solidFill>
+                  <a:schemeClr val="dk1"/>
+                </a:solidFill>
+                <a:latin typeface="+mn-lt"/>
+                <a:ea typeface="+mn-ea"/>
+                <a:cs typeface="+mn-cs"/>
+              </a:endParaRPr>
+            </a:p>
+          </p:txBody>
+        </p:sp>
+      </p:grpSp>
+      <p:grpSp>
+        <p:nvGrpSpPr>
+          <p:cNvPr id="55" name="Group 29"/>
+          <p:cNvGrpSpPr/>
+          <p:nvPr/>
+        </p:nvGrpSpPr>
+        <p:grpSpPr>
+          <a:xfrm>
+            <a:off x="609600" y="1562100"/>
+            <a:ext cx="5334000" cy="1844611"/>
+            <a:chOff x="609600" y="1562100"/>
+            <a:chExt cx="5334000" cy="1844611"/>
+          </a:xfrm>
+        </p:grpSpPr>
+        <p:sp>
+          <p:nvSpPr>
+            <p:cNvPr id="56" name="Rectangle 18"/>
+            <p:cNvSpPr/>
+            <p:nvPr/>
+          </p:nvSpPr>
+          <p:spPr>
+            <a:xfrm>
+              <a:off x="609600" y="1562100"/>
+              <a:ext cx="5334000" cy="1828800"/>
+            </a:xfrm>
+            <a:prstGeom prst="roundRect">
+              <a:avLst>
+                <a:gd name="adj" fmla="val 4167"/>
+              </a:avLst>
+            </a:prstGeom>
+            <a:solidFill>
+              <a:schemeClr val="accent5"/>
+            </a:solidFill>
+            <a:ln>
+              <a:noFill/>
+            </a:ln>
+          </p:spPr>
+        </p:sp>
+        <p:sp>
+          <p:nvSpPr>
+            <p:cNvPr id="57" name="TextBox 19"/>
+            <p:cNvSpPr txBox="1"/>
+            <p:nvPr/>
+          </p:nvSpPr>
+          <p:spPr>
+            <a:xfrm>
+              <a:off x="906018" y="1726882"/>
+              <a:ext cx="1325624" cy="322707"/>
+            </a:xfrm>
+            <a:prstGeom prst="rect">
+              <a:avLst/>
+            </a:prstGeom>
+            <a:noFill/>
+            <a:ln>
+              <a:noFill/>
+            </a:ln>
+          </p:spPr>
+          <p:txBody>
+            <a:bodyPr wrap="none" lIns="0" tIns="0" rIns="0" bIns="0" anchor="t" anchorCtr="0">
+              <a:spAutoFit/>
+            </a:bodyPr>
+            <a:p>
+              <a:pPr algn="l"/>
+              <a:r>
+                <a:rPr lang="zh-CN" sz="1650" b="1" dirty="0">
+                  <a:solidFill>
+                    <a:schemeClr val="accent1"/>
+                  </a:solidFill>
+                  <a:latin typeface="+mn-lt"/>
+                  <a:ea typeface="+mn-ea"/>
+                  <a:cs typeface="+mn-cs"/>
+                </a:rPr>
+                <a:t>① 首次建基线</a:t>
+              </a:r>
+              <a:endParaRPr lang="zh-CN" sz="1650" b="1" dirty="0">
+                <a:solidFill>
+                  <a:schemeClr val="accent1"/>
+                </a:solidFill>
+                <a:latin typeface="+mn-lt"/>
+                <a:ea typeface="+mn-ea"/>
+                <a:cs typeface="+mn-cs"/>
+              </a:endParaRPr>
+            </a:p>
+          </p:txBody>
+        </p:sp>
+        <p:sp>
+          <p:nvSpPr>
+            <p:cNvPr id="58" name="TextBox 20"/>
+            <p:cNvSpPr txBox="1"/>
+            <p:nvPr/>
+          </p:nvSpPr>
+          <p:spPr>
+            <a:xfrm>
+              <a:off x="2509266" y="1791652"/>
+              <a:ext cx="1141476" cy="205359"/>
+            </a:xfrm>
+            <a:prstGeom prst="rect">
+              <a:avLst/>
+            </a:prstGeom>
+            <a:noFill/>
+            <a:ln>
+              <a:noFill/>
+            </a:ln>
+          </p:spPr>
+          <p:txBody>
+            <a:bodyPr wrap="none" lIns="0" tIns="0" rIns="0" bIns="0" anchor="t" anchorCtr="0">
+              <a:spAutoFit/>
+            </a:bodyPr>
+            <a:p>
+              <a:pPr algn="l"/>
+              <a:r>
+                <a:rPr lang="zh-CN" sz="1050" dirty="0">
+                  <a:solidFill>
+                    <a:schemeClr val="accent6"/>
+                  </a:solidFill>
+                  <a:latin typeface="+mn-lt"/>
+                  <a:ea typeface="+mn-ea"/>
+                  <a:cs typeface="+mn-cs"/>
+                </a:rPr>
+                <a:t>模块第一次接入时</a:t>
+              </a:r>
+              <a:endParaRPr lang="zh-CN" sz="1050" dirty="0">
+                <a:solidFill>
+                  <a:schemeClr val="accent6"/>
+                </a:solidFill>
+                <a:latin typeface="+mn-lt"/>
+                <a:ea typeface="+mn-ea"/>
+                <a:cs typeface="+mn-cs"/>
+              </a:endParaRPr>
+            </a:p>
+          </p:txBody>
+        </p:sp>
+        <p:sp>
+          <p:nvSpPr>
+            <p:cNvPr id="59" name="TextBox 21"/>
+            <p:cNvSpPr txBox="1"/>
+            <p:nvPr/>
+          </p:nvSpPr>
+          <p:spPr>
+            <a:xfrm>
+              <a:off x="908304" y="2042160"/>
+              <a:ext cx="2806903" cy="234696"/>
+            </a:xfrm>
+            <a:prstGeom prst="rect">
+              <a:avLst/>
+            </a:prstGeom>
+            <a:noFill/>
+            <a:ln>
+              <a:noFill/>
+            </a:ln>
+          </p:spPr>
+          <p:txBody>
+            <a:bodyPr wrap="none" lIns="0" tIns="0" rIns="0" bIns="0" anchor="t" anchorCtr="0">
+              <a:spAutoFit/>
+            </a:bodyPr>
+            <a:p>
+              <a:pPr algn="l"/>
+              <a:r>
+                <a:rPr lang="zh-CN" sz="1200" dirty="0">
+                  <a:solidFill>
+                    <a:schemeClr val="dk1"/>
+                  </a:solidFill>
+                  <a:latin typeface="+mn-lt"/>
+                  <a:ea typeface="+mn-ea"/>
+                  <a:cs typeface="+mn-cs"/>
+                </a:rPr>
+                <a:t>整理 + 澄清 + 结构化，收敛为统一模板</a:t>
+              </a:r>
+              <a:endParaRPr lang="zh-CN" sz="1200" dirty="0">
+                <a:solidFill>
+                  <a:schemeClr val="dk1"/>
+                </a:solidFill>
+                <a:latin typeface="+mn-lt"/>
+                <a:ea typeface="+mn-ea"/>
+                <a:cs typeface="+mn-cs"/>
+              </a:endParaRPr>
+            </a:p>
+          </p:txBody>
+        </p:sp>
+        <p:sp>
+          <p:nvSpPr>
+            <p:cNvPr id="60" name="Rectangle 22"/>
+            <p:cNvSpPr/>
+            <p:nvPr/>
+          </p:nvSpPr>
+          <p:spPr>
+            <a:xfrm>
+              <a:off x="914400" y="2324100"/>
+              <a:ext cx="1714500" cy="457200"/>
+            </a:xfrm>
+            <a:prstGeom prst="roundRect">
+              <a:avLst>
+                <a:gd name="adj" fmla="val 16667"/>
+              </a:avLst>
+            </a:prstGeom>
+            <a:solidFill>
+              <a:schemeClr val="lt1"/>
+            </a:solidFill>
+            <a:ln>
+              <a:noFill/>
+            </a:ln>
+          </p:spPr>
+        </p:sp>
+        <p:sp>
+          <p:nvSpPr>
+            <p:cNvPr id="61" name="TextBox 23"/>
+            <p:cNvSpPr txBox="1"/>
+            <p:nvPr/>
+          </p:nvSpPr>
+          <p:spPr>
+            <a:xfrm>
+              <a:off x="1280922" y="2480310"/>
+              <a:ext cx="981456" cy="234696"/>
+            </a:xfrm>
+            <a:prstGeom prst="rect">
+              <a:avLst/>
+            </a:prstGeom>
+            <a:noFill/>
+            <a:ln>
+              <a:noFill/>
+            </a:ln>
+          </p:spPr>
+          <p:txBody>
+            <a:bodyPr wrap="none" lIns="0" tIns="0" rIns="0" bIns="0" anchor="t" anchorCtr="0">
+              <a:spAutoFit/>
+            </a:bodyPr>
+            <a:p>
+              <a:pPr algn="ctr"/>
+              <a:r>
+                <a:rPr lang="zh-CN" sz="1200" dirty="0">
+                  <a:solidFill>
+                    <a:schemeClr val="accent6"/>
+                  </a:solidFill>
+                  <a:latin typeface="+mn-lt"/>
+                  <a:ea typeface="+mn-ea"/>
+                  <a:cs typeface="+mn-cs"/>
+                </a:rPr>
+                <a:t>产品原始输出</a:t>
+              </a:r>
+              <a:endParaRPr lang="zh-CN" sz="1200" dirty="0">
+                <a:solidFill>
+                  <a:schemeClr val="accent6"/>
+                </a:solidFill>
+                <a:latin typeface="+mn-lt"/>
+                <a:ea typeface="+mn-ea"/>
+                <a:cs typeface="+mn-cs"/>
+              </a:endParaRPr>
+            </a:p>
+          </p:txBody>
+        </p:sp>
+        <p:sp>
+          <p:nvSpPr>
+            <p:cNvPr id="62" name="Line 24"/>
+            <p:cNvSpPr/>
+            <p:nvPr/>
+          </p:nvSpPr>
+          <p:spPr>
+            <a:xfrm>
+              <a:off x="2705100" y="2552700"/>
+              <a:ext cx="495300" cy="1"/>
+            </a:xfrm>
+            <a:prstGeom prst="line">
+              <a:avLst/>
+            </a:prstGeom>
+            <a:noFill/>
+            <a:ln w="19050">
+              <a:solidFill>
+                <a:schemeClr val="accent1"/>
+              </a:solidFill>
+              <a:tailEnd type="triangle" w="lg" len="lg"/>
+            </a:ln>
+          </p:spPr>
+        </p:sp>
+        <p:sp>
+          <p:nvSpPr>
+            <p:cNvPr id="63" name="Rectangle 25"/>
+            <p:cNvSpPr/>
+            <p:nvPr/>
+          </p:nvSpPr>
+          <p:spPr>
+            <a:xfrm>
+              <a:off x="3238500" y="2324100"/>
+              <a:ext cx="2324100" cy="457200"/>
+            </a:xfrm>
+            <a:prstGeom prst="roundRect">
+              <a:avLst>
+                <a:gd name="adj" fmla="val 16667"/>
+              </a:avLst>
+            </a:prstGeom>
+            <a:solidFill>
+              <a:schemeClr val="accent1"/>
+            </a:solidFill>
+            <a:ln>
+              <a:noFill/>
+            </a:ln>
+          </p:spPr>
+        </p:sp>
+        <p:sp>
+          <p:nvSpPr>
+            <p:cNvPr id="64" name="TextBox 26"/>
+            <p:cNvSpPr txBox="1"/>
+            <p:nvPr/>
+          </p:nvSpPr>
+          <p:spPr>
+            <a:xfrm>
+              <a:off x="3774529" y="2480310"/>
+              <a:ext cx="1252042" cy="234696"/>
+            </a:xfrm>
+            <a:prstGeom prst="rect">
+              <a:avLst/>
+            </a:prstGeom>
+            <a:noFill/>
+            <a:ln>
+              <a:noFill/>
+            </a:ln>
+          </p:spPr>
+          <p:txBody>
+            <a:bodyPr wrap="none" lIns="0" tIns="0" rIns="0" bIns="0" anchor="t" anchorCtr="0">
+              <a:spAutoFit/>
+            </a:bodyPr>
+            <a:p>
+              <a:pPr algn="ctr"/>
+              <a:r>
+                <a:rPr lang="zh-CN" sz="1200" b="1" dirty="0">
+                  <a:solidFill>
+                    <a:srgbClr val="FFFFFF"/>
+                  </a:solidFill>
+                  <a:latin typeface="+mn-lt"/>
+                  <a:ea typeface="+mn-ea"/>
+                  <a:cs typeface="+mn-cs"/>
+                </a:rPr>
+                <a:t>01-需求文档.md</a:t>
+              </a:r>
+              <a:endParaRPr lang="zh-CN" sz="1200" b="1" dirty="0">
+                <a:solidFill>
+                  <a:srgbClr val="FFFFFF"/>
+                </a:solidFill>
+                <a:latin typeface="+mn-lt"/>
+                <a:ea typeface="+mn-ea"/>
+                <a:cs typeface="+mn-cs"/>
+              </a:endParaRPr>
+            </a:p>
+          </p:txBody>
+        </p:sp>
+        <p:sp>
+          <p:nvSpPr>
+            <p:cNvPr id="65" name="TextBox 27"/>
+            <p:cNvSpPr txBox="1"/>
+            <p:nvPr/>
+          </p:nvSpPr>
+          <p:spPr>
+            <a:xfrm>
+              <a:off x="909066" y="2953702"/>
+              <a:ext cx="2132800" cy="205359"/>
+            </a:xfrm>
+            <a:prstGeom prst="rect">
+              <a:avLst/>
+            </a:prstGeom>
+            <a:noFill/>
+            <a:ln>
+              <a:noFill/>
+            </a:ln>
+          </p:spPr>
+          <p:txBody>
+            <a:bodyPr wrap="none" lIns="0" tIns="0" rIns="0" bIns="0" anchor="t" anchorCtr="0">
+              <a:spAutoFit/>
+            </a:bodyPr>
+            <a:p>
+              <a:pPr marL="113665" indent="-113665" algn="l">
+                <a:buClr>
+                  <a:schemeClr val="dk1"/>
+                </a:buClr>
+                <a:buSzTx/>
+                <a:buFontTx/>
+                <a:buChar char="•"/>
+              </a:pPr>
+              <a:r>
+                <a:rPr lang="zh-CN" sz="1050" dirty="0">
+                  <a:solidFill>
+                    <a:schemeClr val="dk1"/>
+                  </a:solidFill>
+                  <a:latin typeface="+mn-lt"/>
+                  <a:ea typeface="+mn-ea"/>
+                  <a:cs typeface="+mn-cs"/>
+                </a:rPr>
+                <a:t>每个功能点打上唯一 REQ 编号</a:t>
+              </a:r>
+              <a:endParaRPr lang="zh-CN" sz="1050" dirty="0">
+                <a:solidFill>
+                  <a:schemeClr val="dk1"/>
+                </a:solidFill>
+                <a:latin typeface="+mn-lt"/>
+                <a:ea typeface="+mn-ea"/>
+                <a:cs typeface="+mn-cs"/>
+              </a:endParaRPr>
+            </a:p>
+          </p:txBody>
+        </p:sp>
+        <p:sp>
+          <p:nvSpPr>
+            <p:cNvPr id="66" name="TextBox 28"/>
+            <p:cNvSpPr txBox="1"/>
+            <p:nvPr/>
+          </p:nvSpPr>
+          <p:spPr>
+            <a:xfrm>
+              <a:off x="909066" y="3201352"/>
+              <a:ext cx="2580856" cy="205359"/>
+            </a:xfrm>
+            <a:prstGeom prst="rect">
+              <a:avLst/>
+            </a:prstGeom>
+            <a:noFill/>
+            <a:ln>
+              <a:noFill/>
+            </a:ln>
+          </p:spPr>
+          <p:txBody>
+            <a:bodyPr wrap="none" lIns="0" tIns="0" rIns="0" bIns="0" anchor="t" anchorCtr="0">
+              <a:spAutoFit/>
+            </a:bodyPr>
+            <a:p>
+              <a:pPr marL="113665" indent="-113665" algn="l">
+                <a:buClr>
+                  <a:schemeClr val="dk1"/>
+                </a:buClr>
+                <a:buSzTx/>
+                <a:buFontTx/>
+                <a:buChar char="•"/>
+              </a:pPr>
+              <a:r>
+                <a:rPr lang="zh-CN" sz="1050" dirty="0">
+                  <a:solidFill>
+                    <a:schemeClr val="dk1"/>
+                  </a:solidFill>
+                  <a:latin typeface="+mn-lt"/>
+                  <a:ea typeface="+mn-ea"/>
+                  <a:cs typeface="+mn-cs"/>
+                </a:rPr>
+                <a:t>开发 / 测试 / AI 之后都从基线取信息</a:t>
+              </a:r>
+              <a:endParaRPr lang="zh-CN" sz="1050" dirty="0">
+                <a:solidFill>
+                  <a:schemeClr val="dk1"/>
+                </a:solidFill>
+                <a:latin typeface="+mn-lt"/>
+                <a:ea typeface="+mn-ea"/>
+                <a:cs typeface="+mn-cs"/>
+              </a:endParaRPr>
+            </a:p>
+          </p:txBody>
+        </p:sp>
+      </p:grpSp>
+      <p:grpSp>
+        <p:nvGrpSpPr>
+          <p:cNvPr id="67" name="Group 41"/>
+          <p:cNvGrpSpPr/>
+          <p:nvPr/>
+        </p:nvGrpSpPr>
+        <p:grpSpPr>
+          <a:xfrm>
+            <a:off x="6248400" y="1562100"/>
+            <a:ext cx="5334000" cy="1844611"/>
+            <a:chOff x="6248400" y="1562100"/>
+            <a:chExt cx="5334000" cy="1844611"/>
+          </a:xfrm>
+        </p:grpSpPr>
+        <p:sp>
+          <p:nvSpPr>
+            <p:cNvPr id="68" name="Rectangle 30"/>
+            <p:cNvSpPr/>
+            <p:nvPr/>
+          </p:nvSpPr>
+          <p:spPr>
+            <a:xfrm>
+              <a:off x="6248400" y="1562100"/>
+              <a:ext cx="5334000" cy="1828800"/>
+            </a:xfrm>
+            <a:prstGeom prst="roundRect">
+              <a:avLst>
+                <a:gd name="adj" fmla="val 4167"/>
+              </a:avLst>
+            </a:prstGeom>
+            <a:solidFill>
+              <a:schemeClr val="accent5"/>
+            </a:solidFill>
+            <a:ln>
+              <a:noFill/>
+            </a:ln>
+          </p:spPr>
+        </p:sp>
+        <p:sp>
+          <p:nvSpPr>
+            <p:cNvPr id="69" name="TextBox 31"/>
+            <p:cNvSpPr txBox="1"/>
+            <p:nvPr/>
+          </p:nvSpPr>
+          <p:spPr>
+            <a:xfrm>
+              <a:off x="6544818" y="1726882"/>
+              <a:ext cx="1547747" cy="322707"/>
+            </a:xfrm>
+            <a:prstGeom prst="rect">
+              <a:avLst/>
+            </a:prstGeom>
+            <a:noFill/>
+            <a:ln>
+              <a:noFill/>
+            </a:ln>
+          </p:spPr>
+          <p:txBody>
+            <a:bodyPr wrap="none" lIns="0" tIns="0" rIns="0" bIns="0" anchor="t" anchorCtr="0">
+              <a:spAutoFit/>
+            </a:bodyPr>
+            <a:p>
+              <a:pPr algn="l"/>
+              <a:r>
+                <a:rPr lang="zh-CN" sz="1650" b="1" dirty="0">
+                  <a:solidFill>
+                    <a:schemeClr val="accent1"/>
+                  </a:solidFill>
+                  <a:latin typeface="+mn-lt"/>
+                  <a:ea typeface="+mn-ea"/>
+                  <a:cs typeface="+mn-cs"/>
+                </a:rPr>
+                <a:t>② 每版增量回写</a:t>
+              </a:r>
+              <a:endParaRPr lang="zh-CN" sz="1650" b="1" dirty="0">
+                <a:solidFill>
+                  <a:schemeClr val="accent1"/>
+                </a:solidFill>
+                <a:latin typeface="+mn-lt"/>
+                <a:ea typeface="+mn-ea"/>
+                <a:cs typeface="+mn-cs"/>
+              </a:endParaRPr>
+            </a:p>
+          </p:txBody>
+        </p:sp>
+        <p:sp>
+          <p:nvSpPr>
+            <p:cNvPr id="70" name="TextBox 32"/>
+            <p:cNvSpPr txBox="1"/>
+            <p:nvPr/>
+          </p:nvSpPr>
+          <p:spPr>
+            <a:xfrm>
+              <a:off x="8243316" y="1791652"/>
+              <a:ext cx="717423" cy="205359"/>
+            </a:xfrm>
+            <a:prstGeom prst="rect">
+              <a:avLst/>
+            </a:prstGeom>
+            <a:noFill/>
+            <a:ln>
+              <a:noFill/>
+            </a:ln>
+          </p:spPr>
+          <p:txBody>
+            <a:bodyPr wrap="none" lIns="0" tIns="0" rIns="0" bIns="0" anchor="t" anchorCtr="0">
+              <a:spAutoFit/>
+            </a:bodyPr>
+            <a:p>
+              <a:pPr algn="l"/>
+              <a:r>
+                <a:rPr lang="zh-CN" sz="1050" dirty="0">
+                  <a:solidFill>
+                    <a:schemeClr val="accent6"/>
+                  </a:solidFill>
+                  <a:latin typeface="+mn-lt"/>
+                  <a:ea typeface="+mn-ea"/>
+                  <a:cs typeface="+mn-cs"/>
+                </a:rPr>
+                <a:t>版本关闭时</a:t>
+              </a:r>
+              <a:endParaRPr lang="zh-CN" sz="1050" dirty="0">
+                <a:solidFill>
+                  <a:schemeClr val="accent6"/>
+                </a:solidFill>
+                <a:latin typeface="+mn-lt"/>
+                <a:ea typeface="+mn-ea"/>
+                <a:cs typeface="+mn-cs"/>
+              </a:endParaRPr>
+            </a:p>
+          </p:txBody>
+        </p:sp>
+        <p:sp>
+          <p:nvSpPr>
+            <p:cNvPr id="71" name="TextBox 33"/>
+            <p:cNvSpPr txBox="1"/>
+            <p:nvPr/>
+          </p:nvSpPr>
+          <p:spPr>
+            <a:xfrm>
+              <a:off x="6547104" y="2042160"/>
+              <a:ext cx="3016301" cy="234696"/>
+            </a:xfrm>
+            <a:prstGeom prst="rect">
+              <a:avLst/>
+            </a:prstGeom>
+            <a:noFill/>
+            <a:ln>
+              <a:noFill/>
+            </a:ln>
+          </p:spPr>
+          <p:txBody>
+            <a:bodyPr wrap="none" lIns="0" tIns="0" rIns="0" bIns="0" anchor="t" anchorCtr="0">
+              <a:spAutoFit/>
+            </a:bodyPr>
+            <a:p>
+              <a:pPr algn="l"/>
+              <a:r>
+                <a:rPr lang="zh-CN" sz="1200" dirty="0">
+                  <a:solidFill>
+                    <a:schemeClr val="dk1"/>
+                  </a:solidFill>
+                  <a:latin typeface="+mn-lt"/>
+                  <a:ea typeface="+mn-ea"/>
+                  <a:cs typeface="+mn-cs"/>
+                </a:rPr>
+                <a:t>本版新增 / 修改按 REQ 合并回模块基线</a:t>
+              </a:r>
+              <a:endParaRPr lang="zh-CN" sz="1200" dirty="0">
+                <a:solidFill>
+                  <a:schemeClr val="dk1"/>
+                </a:solidFill>
+                <a:latin typeface="+mn-lt"/>
+                <a:ea typeface="+mn-ea"/>
+                <a:cs typeface="+mn-cs"/>
+              </a:endParaRPr>
+            </a:p>
+          </p:txBody>
+        </p:sp>
+        <p:sp>
+          <p:nvSpPr>
+            <p:cNvPr id="72" name="Rectangle 34"/>
+            <p:cNvSpPr/>
+            <p:nvPr/>
+          </p:nvSpPr>
+          <p:spPr>
+            <a:xfrm>
+              <a:off x="6553200" y="2324100"/>
+              <a:ext cx="1714500" cy="457200"/>
+            </a:xfrm>
+            <a:prstGeom prst="roundRect">
+              <a:avLst>
+                <a:gd name="adj" fmla="val 16667"/>
+              </a:avLst>
+            </a:prstGeom>
+            <a:solidFill>
+              <a:schemeClr val="lt1"/>
+            </a:solidFill>
+            <a:ln>
+              <a:noFill/>
+            </a:ln>
+          </p:spPr>
+        </p:sp>
+        <p:sp>
+          <p:nvSpPr>
+            <p:cNvPr id="73" name="TextBox 35"/>
+            <p:cNvSpPr txBox="1"/>
+            <p:nvPr/>
+          </p:nvSpPr>
+          <p:spPr>
+            <a:xfrm>
+              <a:off x="7081266" y="2480310"/>
+              <a:ext cx="658368" cy="234696"/>
+            </a:xfrm>
+            <a:prstGeom prst="rect">
+              <a:avLst/>
+            </a:prstGeom>
+            <a:noFill/>
+            <a:ln>
+              <a:noFill/>
+            </a:ln>
+          </p:spPr>
+          <p:txBody>
+            <a:bodyPr wrap="none" lIns="0" tIns="0" rIns="0" bIns="0" anchor="t" anchorCtr="0">
+              <a:spAutoFit/>
+            </a:bodyPr>
+            <a:p>
+              <a:pPr algn="ctr"/>
+              <a:r>
+                <a:rPr lang="zh-CN" sz="1200" dirty="0">
+                  <a:solidFill>
+                    <a:schemeClr val="accent6"/>
+                  </a:solidFill>
+                  <a:latin typeface="+mn-lt"/>
+                  <a:ea typeface="+mn-ea"/>
+                  <a:cs typeface="+mn-cs"/>
+                </a:rPr>
+                <a:t>版本增量</a:t>
+              </a:r>
+              <a:endParaRPr lang="zh-CN" sz="1200" dirty="0">
+                <a:solidFill>
+                  <a:schemeClr val="accent6"/>
+                </a:solidFill>
+                <a:latin typeface="+mn-lt"/>
+                <a:ea typeface="+mn-ea"/>
+                <a:cs typeface="+mn-cs"/>
+              </a:endParaRPr>
+            </a:p>
+          </p:txBody>
+        </p:sp>
+        <p:sp>
+          <p:nvSpPr>
+            <p:cNvPr id="74" name="Line 36"/>
+            <p:cNvSpPr/>
+            <p:nvPr/>
+          </p:nvSpPr>
+          <p:spPr>
+            <a:xfrm>
+              <a:off x="8343900" y="2552700"/>
+              <a:ext cx="495300" cy="1"/>
+            </a:xfrm>
+            <a:prstGeom prst="line">
+              <a:avLst/>
+            </a:prstGeom>
+            <a:noFill/>
+            <a:ln w="19050">
+              <a:solidFill>
+                <a:schemeClr val="accent1"/>
+              </a:solidFill>
+              <a:tailEnd type="triangle" w="lg" len="lg"/>
+            </a:ln>
+          </p:spPr>
+        </p:sp>
+        <p:sp>
+          <p:nvSpPr>
+            <p:cNvPr id="75" name="Rectangle 37"/>
+            <p:cNvSpPr/>
+            <p:nvPr/>
+          </p:nvSpPr>
+          <p:spPr>
+            <a:xfrm>
+              <a:off x="8877300" y="2324100"/>
+              <a:ext cx="2400300" cy="457200"/>
+            </a:xfrm>
+            <a:prstGeom prst="roundRect">
+              <a:avLst>
+                <a:gd name="adj" fmla="val 16667"/>
+              </a:avLst>
+            </a:prstGeom>
+            <a:solidFill>
+              <a:schemeClr val="accent1"/>
+            </a:solidFill>
+            <a:ln>
+              <a:noFill/>
+            </a:ln>
+          </p:spPr>
+        </p:sp>
+        <p:sp>
+          <p:nvSpPr>
+            <p:cNvPr id="76" name="TextBox 38"/>
+            <p:cNvSpPr txBox="1"/>
+            <p:nvPr/>
+          </p:nvSpPr>
+          <p:spPr>
+            <a:xfrm>
+              <a:off x="9425178" y="2480310"/>
+              <a:ext cx="1304544" cy="234696"/>
+            </a:xfrm>
+            <a:prstGeom prst="rect">
+              <a:avLst/>
+            </a:prstGeom>
+            <a:noFill/>
+            <a:ln>
+              <a:noFill/>
+            </a:ln>
+          </p:spPr>
+          <p:txBody>
+            <a:bodyPr wrap="none" lIns="0" tIns="0" rIns="0" bIns="0" anchor="t" anchorCtr="0">
+              <a:spAutoFit/>
+            </a:bodyPr>
+            <a:p>
+              <a:pPr algn="ctr"/>
+              <a:r>
+                <a:rPr lang="zh-CN" sz="1200" b="1" dirty="0">
+                  <a:solidFill>
+                    <a:srgbClr val="FFFFFF"/>
+                  </a:solidFill>
+                  <a:latin typeface="+mn-lt"/>
+                  <a:ea typeface="+mn-ea"/>
+                  <a:cs typeface="+mn-cs"/>
+                </a:rPr>
+                <a:t>模块基线（全量）</a:t>
+              </a:r>
+              <a:endParaRPr lang="zh-CN" sz="1200" b="1" dirty="0">
+                <a:solidFill>
+                  <a:srgbClr val="FFFFFF"/>
+                </a:solidFill>
+                <a:latin typeface="+mn-lt"/>
+                <a:ea typeface="+mn-ea"/>
+                <a:cs typeface="+mn-cs"/>
+              </a:endParaRPr>
+            </a:p>
+          </p:txBody>
+        </p:sp>
+        <p:sp>
+          <p:nvSpPr>
+            <p:cNvPr id="77" name="TextBox 39"/>
+            <p:cNvSpPr txBox="1"/>
+            <p:nvPr/>
+          </p:nvSpPr>
+          <p:spPr>
+            <a:xfrm>
+              <a:off x="6547866" y="2953702"/>
+              <a:ext cx="2491645" cy="205359"/>
+            </a:xfrm>
+            <a:prstGeom prst="rect">
+              <a:avLst/>
+            </a:prstGeom>
+            <a:noFill/>
+            <a:ln>
+              <a:noFill/>
+            </a:ln>
+          </p:spPr>
+          <p:txBody>
+            <a:bodyPr wrap="none" lIns="0" tIns="0" rIns="0" bIns="0" anchor="t" anchorCtr="0">
+              <a:spAutoFit/>
+            </a:bodyPr>
+            <a:p>
+              <a:pPr marL="113665" indent="-113665" algn="l">
+                <a:buClr>
+                  <a:schemeClr val="dk1"/>
+                </a:buClr>
+                <a:buSzTx/>
+                <a:buFontTx/>
+                <a:buChar char="•"/>
+              </a:pPr>
+              <a:r>
+                <a:rPr lang="zh-CN" sz="1050" dirty="0">
+                  <a:solidFill>
+                    <a:schemeClr val="dk1"/>
+                  </a:solidFill>
+                  <a:latin typeface="+mn-lt"/>
+                  <a:ea typeface="+mn-ea"/>
+                  <a:cs typeface="+mn-cs"/>
+                </a:rPr>
+                <a:t>skill：version-archive（版本归档）</a:t>
+              </a:r>
+              <a:endParaRPr lang="zh-CN" sz="1050" dirty="0">
+                <a:solidFill>
+                  <a:schemeClr val="dk1"/>
+                </a:solidFill>
+                <a:latin typeface="+mn-lt"/>
+                <a:ea typeface="+mn-ea"/>
+                <a:cs typeface="+mn-cs"/>
+              </a:endParaRPr>
+            </a:p>
+          </p:txBody>
+        </p:sp>
+        <p:sp>
+          <p:nvSpPr>
+            <p:cNvPr id="78" name="TextBox 40"/>
+            <p:cNvSpPr txBox="1"/>
+            <p:nvPr/>
+          </p:nvSpPr>
+          <p:spPr>
+            <a:xfrm>
+              <a:off x="6547866" y="3201352"/>
+              <a:ext cx="2668334" cy="205359"/>
+            </a:xfrm>
+            <a:prstGeom prst="rect">
+              <a:avLst/>
+            </a:prstGeom>
+            <a:noFill/>
+            <a:ln>
+              <a:noFill/>
+            </a:ln>
+          </p:spPr>
+          <p:txBody>
+            <a:bodyPr wrap="none" lIns="0" tIns="0" rIns="0" bIns="0" anchor="t" anchorCtr="0">
+              <a:spAutoFit/>
+            </a:bodyPr>
+            <a:p>
+              <a:pPr marL="113665" indent="-113665" algn="l">
+                <a:buClr>
+                  <a:schemeClr val="dk1"/>
+                </a:buClr>
+                <a:buSzTx/>
+                <a:buFontTx/>
+                <a:buChar char="•"/>
+              </a:pPr>
+              <a:r>
+                <a:rPr lang="zh-CN" sz="1050" dirty="0">
+                  <a:solidFill>
+                    <a:schemeClr val="dk1"/>
+                  </a:solidFill>
+                  <a:latin typeface="+mn-lt"/>
+                  <a:ea typeface="+mn-ea"/>
+                  <a:cs typeface="+mn-cs"/>
+                </a:rPr>
+                <a:t>基线始终最新最全，不用翻历次版本文档</a:t>
+              </a:r>
+              <a:endParaRPr lang="zh-CN" sz="1050" dirty="0">
+                <a:solidFill>
+                  <a:schemeClr val="dk1"/>
+                </a:solidFill>
+                <a:latin typeface="+mn-lt"/>
+                <a:ea typeface="+mn-ea"/>
+                <a:cs typeface="+mn-cs"/>
+              </a:endParaRPr>
+            </a:p>
+          </p:txBody>
+        </p:sp>
+      </p:grpSp>
+      <p:grpSp>
+        <p:nvGrpSpPr>
+          <p:cNvPr id="79" name="Group 52"/>
+          <p:cNvGrpSpPr/>
+          <p:nvPr/>
+        </p:nvGrpSpPr>
+        <p:grpSpPr>
+          <a:xfrm>
+            <a:off x="609600" y="3486150"/>
+            <a:ext cx="10972800" cy="1981200"/>
+            <a:chOff x="609600" y="3486150"/>
+            <a:chExt cx="10972800" cy="1981200"/>
+          </a:xfrm>
+        </p:grpSpPr>
+        <p:sp>
+          <p:nvSpPr>
+            <p:cNvPr id="80" name="Rectangle 42"/>
+            <p:cNvSpPr/>
+            <p:nvPr/>
+          </p:nvSpPr>
+          <p:spPr>
+            <a:xfrm>
+              <a:off x="609600" y="3486150"/>
+              <a:ext cx="10972800" cy="1981200"/>
+            </a:xfrm>
+            <a:prstGeom prst="roundRect">
+              <a:avLst>
+                <a:gd name="adj" fmla="val 3846"/>
+              </a:avLst>
+            </a:prstGeom>
+            <a:solidFill>
+              <a:schemeClr val="lt1"/>
+            </a:solidFill>
+            <a:ln w="14288">
+              <a:solidFill>
+                <a:schemeClr val="accent1"/>
+              </a:solidFill>
+            </a:ln>
+          </p:spPr>
+        </p:sp>
+        <p:sp>
+          <p:nvSpPr>
+            <p:cNvPr id="81" name="TextBox 43"/>
+            <p:cNvSpPr txBox="1"/>
+            <p:nvPr/>
+          </p:nvSpPr>
+          <p:spPr>
+            <a:xfrm>
+              <a:off x="945642" y="3664268"/>
+              <a:ext cx="6592595" cy="264033"/>
+            </a:xfrm>
+            <a:prstGeom prst="rect">
+              <a:avLst/>
+            </a:prstGeom>
+            <a:noFill/>
+            <a:ln>
+              <a:noFill/>
+            </a:ln>
+          </p:spPr>
+          <p:txBody>
+            <a:bodyPr wrap="none" lIns="0" tIns="0" rIns="0" bIns="0" anchor="t" anchorCtr="0">
+              <a:spAutoFit/>
+            </a:bodyPr>
+            <a:p>
+              <a:pPr algn="l"/>
+              <a:r>
+                <a:rPr lang="zh-CN" sz="1350" b="1" dirty="0">
+                  <a:solidFill>
+                    <a:schemeClr val="accent1"/>
+                  </a:solidFill>
+                  <a:latin typeface="+mn-lt"/>
+                  <a:ea typeface="+mn-ea"/>
+                  <a:cs typeface="+mn-cs"/>
+                </a:rPr>
+                <a:t>仓库物理形态 —— 版本目录存增量 · 模块目录存全量 · 版本关闭时增量合并进全量</a:t>
+              </a:r>
+              <a:endParaRPr lang="zh-CN" sz="1350" b="1" dirty="0">
+                <a:solidFill>
+                  <a:schemeClr val="accent1"/>
+                </a:solidFill>
+                <a:latin typeface="+mn-lt"/>
+                <a:ea typeface="+mn-ea"/>
+                <a:cs typeface="+mn-cs"/>
+              </a:endParaRPr>
+            </a:p>
+          </p:txBody>
+        </p:sp>
+        <p:sp>
+          <p:nvSpPr>
+            <p:cNvPr id="82" name="Line 44"/>
+            <p:cNvSpPr/>
+            <p:nvPr/>
+          </p:nvSpPr>
+          <p:spPr>
+            <a:xfrm>
+              <a:off x="952500" y="3943350"/>
+              <a:ext cx="10287000" cy="9525"/>
+            </a:xfrm>
+            <a:custGeom>
+              <a:avLst/>
+              <a:gdLst/>
+              <a:ahLst/>
+              <a:cxnLst/>
+              <a:rect l="l" t="t" r="r" b="b"/>
+              <a:pathLst>
+                <a:path w="10287000" h="9525">
+                  <a:moveTo>
+                    <a:pt x="0" y="0"/>
+                  </a:moveTo>
+                  <a:lnTo>
+                    <a:pt x="10287000" y="0"/>
+                  </a:lnTo>
+                </a:path>
+              </a:pathLst>
+            </a:custGeom>
+            <a:noFill/>
+            <a:ln w="19050">
+              <a:solidFill>
+                <a:srgbClr val="DAEAF8"/>
+              </a:solidFill>
+            </a:ln>
+          </p:spPr>
+        </p:sp>
+        <p:sp>
+          <p:nvSpPr>
+            <p:cNvPr id="83" name="TextBox 45"/>
+            <p:cNvSpPr txBox="1"/>
+            <p:nvPr/>
+          </p:nvSpPr>
+          <p:spPr>
+            <a:xfrm>
+              <a:off x="946404" y="4080510"/>
+              <a:ext cx="485251" cy="234696"/>
+            </a:xfrm>
+            <a:prstGeom prst="rect">
+              <a:avLst/>
+            </a:prstGeom>
+            <a:noFill/>
+            <a:ln>
+              <a:noFill/>
+            </a:ln>
+          </p:spPr>
+          <p:txBody>
+            <a:bodyPr wrap="none" lIns="0" tIns="0" rIns="0" bIns="0" anchor="t" anchorCtr="0">
+              <a:spAutoFit/>
+            </a:bodyPr>
+            <a:p>
+              <a:pPr algn="l"/>
+              <a:r>
+                <a:rPr lang="zh-CN" sz="1200" b="1" dirty="0">
+                  <a:solidFill>
+                    <a:schemeClr val="accent1"/>
+                  </a:solidFill>
+                  <a:latin typeface="+mn-lt"/>
+                  <a:ea typeface="+mn-ea"/>
+                  <a:cs typeface="+mn-cs"/>
+                </a:rPr>
+                <a:t>Prds/</a:t>
+              </a:r>
+              <a:endParaRPr lang="zh-CN" sz="1200" b="1" dirty="0">
+                <a:solidFill>
+                  <a:schemeClr val="accent1"/>
+                </a:solidFill>
+                <a:latin typeface="+mn-lt"/>
+                <a:ea typeface="+mn-ea"/>
+                <a:cs typeface="+mn-cs"/>
+              </a:endParaRPr>
+            </a:p>
+          </p:txBody>
+        </p:sp>
+        <p:sp>
+          <p:nvSpPr>
+            <p:cNvPr id="84" name="TextBox 46"/>
+            <p:cNvSpPr txBox="1"/>
+            <p:nvPr/>
+          </p:nvSpPr>
+          <p:spPr>
+            <a:xfrm>
+              <a:off x="946404" y="4347210"/>
+              <a:ext cx="3775862" cy="234696"/>
+            </a:xfrm>
+            <a:prstGeom prst="rect">
+              <a:avLst/>
+            </a:prstGeom>
+            <a:noFill/>
+            <a:ln>
+              <a:noFill/>
+            </a:ln>
+          </p:spPr>
+          <p:txBody>
+            <a:bodyPr wrap="none" lIns="0" tIns="0" rIns="0" bIns="0" anchor="t" anchorCtr="0">
+              <a:spAutoFit/>
+            </a:bodyPr>
+            <a:p>
+              <a:pPr algn="l"/>
+              <a:r>
+                <a:rPr lang="zh-CN" sz="1200" dirty="0">
+                  <a:solidFill>
+                    <a:schemeClr val="dk1"/>
+                  </a:solidFill>
+                  <a:latin typeface="+mn-lt"/>
+                  <a:ea typeface="+mn-ea"/>
+                  <a:cs typeface="+mn-cs"/>
+                </a:rPr>
+                <a:t>├─ CONFIG-配置中心 / BILLCFG-商业化计费配置/</a:t>
+              </a:r>
+              <a:endParaRPr lang="zh-CN" sz="1200" dirty="0">
+                <a:solidFill>
+                  <a:schemeClr val="dk1"/>
+                </a:solidFill>
+                <a:latin typeface="+mn-lt"/>
+                <a:ea typeface="+mn-ea"/>
+                <a:cs typeface="+mn-cs"/>
+              </a:endParaRPr>
+            </a:p>
+          </p:txBody>
+        </p:sp>
+        <p:sp>
+          <p:nvSpPr>
+            <p:cNvPr id="85" name="TextBox 47"/>
+            <p:cNvSpPr txBox="1"/>
+            <p:nvPr/>
+          </p:nvSpPr>
+          <p:spPr>
+            <a:xfrm>
+              <a:off x="946404" y="4613910"/>
+              <a:ext cx="1905892" cy="234696"/>
+            </a:xfrm>
+            <a:prstGeom prst="rect">
+              <a:avLst/>
+            </a:prstGeom>
+            <a:noFill/>
+            <a:ln>
+              <a:noFill/>
+            </a:ln>
+          </p:spPr>
+          <p:txBody>
+            <a:bodyPr wrap="none" lIns="0" tIns="0" rIns="0" bIns="0" anchor="t" anchorCtr="0">
+              <a:spAutoFit/>
+            </a:bodyPr>
+            <a:p>
+              <a:pPr algn="l"/>
+              <a:r>
+                <a:rPr lang="zh-CN" sz="1200" b="1" dirty="0">
+                  <a:solidFill>
+                    <a:schemeClr val="accent1"/>
+                  </a:solidFill>
+                  <a:latin typeface="+mn-lt"/>
+                  <a:ea typeface="+mn-ea"/>
+                  <a:cs typeface="+mn-cs"/>
+                </a:rPr>
+                <a:t>│　　└─ 01-需求文档.md</a:t>
+              </a:r>
+              <a:endParaRPr lang="zh-CN" sz="1200" b="1" dirty="0">
+                <a:solidFill>
+                  <a:schemeClr val="accent1"/>
+                </a:solidFill>
+                <a:latin typeface="+mn-lt"/>
+                <a:ea typeface="+mn-ea"/>
+                <a:cs typeface="+mn-cs"/>
+              </a:endParaRPr>
+            </a:p>
+          </p:txBody>
+        </p:sp>
+        <p:sp>
+          <p:nvSpPr>
+            <p:cNvPr id="86" name="TextBox 48"/>
+            <p:cNvSpPr txBox="1"/>
+            <p:nvPr/>
+          </p:nvSpPr>
+          <p:spPr>
+            <a:xfrm>
+              <a:off x="5328666" y="4630102"/>
+              <a:ext cx="3098147" cy="205359"/>
+            </a:xfrm>
+            <a:prstGeom prst="rect">
+              <a:avLst/>
+            </a:prstGeom>
+            <a:noFill/>
+            <a:ln>
+              <a:noFill/>
+            </a:ln>
+          </p:spPr>
+          <p:txBody>
+            <a:bodyPr wrap="none" lIns="0" tIns="0" rIns="0" bIns="0" anchor="t" anchorCtr="0">
+              <a:spAutoFit/>
+            </a:bodyPr>
+            <a:p>
+              <a:pPr algn="l"/>
+              <a:r>
+                <a:rPr lang="zh-CN" sz="1050" b="1" dirty="0">
+                  <a:solidFill>
+                    <a:schemeClr val="accent1"/>
+                  </a:solidFill>
+                  <a:latin typeface="+mn-lt"/>
+                  <a:ea typeface="+mn-ea"/>
+                  <a:cs typeface="+mn-cs"/>
+                </a:rPr>
+                <a:t>全量基线 · 始终最新最全 ★ 开发/AI 只看这份</a:t>
+              </a:r>
+              <a:endParaRPr lang="zh-CN" sz="1050" b="1" dirty="0">
+                <a:solidFill>
+                  <a:schemeClr val="accent1"/>
+                </a:solidFill>
+                <a:latin typeface="+mn-lt"/>
+                <a:ea typeface="+mn-ea"/>
+                <a:cs typeface="+mn-cs"/>
+              </a:endParaRPr>
+            </a:p>
+          </p:txBody>
+        </p:sp>
+        <p:sp>
+          <p:nvSpPr>
+            <p:cNvPr id="87" name="TextBox 49"/>
+            <p:cNvSpPr txBox="1"/>
+            <p:nvPr/>
+          </p:nvSpPr>
+          <p:spPr>
+            <a:xfrm>
+              <a:off x="946404" y="4880610"/>
+              <a:ext cx="908304" cy="234696"/>
+            </a:xfrm>
+            <a:prstGeom prst="rect">
+              <a:avLst/>
+            </a:prstGeom>
+            <a:noFill/>
+            <a:ln>
+              <a:noFill/>
+            </a:ln>
+          </p:spPr>
+          <p:txBody>
+            <a:bodyPr wrap="none" lIns="0" tIns="0" rIns="0" bIns="0" anchor="t" anchorCtr="0">
+              <a:spAutoFit/>
+            </a:bodyPr>
+            <a:p>
+              <a:pPr algn="l"/>
+              <a:r>
+                <a:rPr lang="zh-CN" sz="1200" dirty="0">
+                  <a:solidFill>
+                    <a:schemeClr val="dk1"/>
+                  </a:solidFill>
+                  <a:latin typeface="+mn-lt"/>
+                  <a:ea typeface="+mn-ea"/>
+                  <a:cs typeface="+mn-cs"/>
+                </a:rPr>
+                <a:t>└─ V1.6.3/</a:t>
+              </a:r>
+              <a:endParaRPr lang="zh-CN" sz="1200" dirty="0">
+                <a:solidFill>
+                  <a:schemeClr val="dk1"/>
+                </a:solidFill>
+                <a:latin typeface="+mn-lt"/>
+                <a:ea typeface="+mn-ea"/>
+                <a:cs typeface="+mn-cs"/>
+              </a:endParaRPr>
+            </a:p>
+          </p:txBody>
+        </p:sp>
+        <p:sp>
+          <p:nvSpPr>
+            <p:cNvPr id="88" name="TextBox 50"/>
+            <p:cNvSpPr txBox="1"/>
+            <p:nvPr/>
+          </p:nvSpPr>
+          <p:spPr>
+            <a:xfrm>
+              <a:off x="946404" y="5147310"/>
+              <a:ext cx="1934566" cy="234696"/>
+            </a:xfrm>
+            <a:prstGeom prst="rect">
+              <a:avLst/>
+            </a:prstGeom>
+            <a:noFill/>
+            <a:ln>
+              <a:noFill/>
+            </a:ln>
+          </p:spPr>
+          <p:txBody>
+            <a:bodyPr wrap="none" lIns="0" tIns="0" rIns="0" bIns="0" anchor="t" anchorCtr="0">
+              <a:spAutoFit/>
+            </a:bodyPr>
+            <a:p>
+              <a:pPr algn="l"/>
+              <a:r>
+                <a:rPr lang="zh-CN" sz="1200" dirty="0">
+                  <a:solidFill>
+                    <a:schemeClr val="dk1"/>
+                  </a:solidFill>
+                  <a:latin typeface="+mn-lt"/>
+                  <a:ea typeface="+mn-ea"/>
+                  <a:cs typeface="+mn-cs"/>
+                </a:rPr>
+                <a:t>　　　└─ 01-需求文档.md</a:t>
+              </a:r>
+              <a:endParaRPr lang="zh-CN" sz="1200" dirty="0">
+                <a:solidFill>
+                  <a:schemeClr val="dk1"/>
+                </a:solidFill>
+                <a:latin typeface="+mn-lt"/>
+                <a:ea typeface="+mn-ea"/>
+                <a:cs typeface="+mn-cs"/>
+              </a:endParaRPr>
+            </a:p>
+          </p:txBody>
+        </p:sp>
+        <p:sp>
+          <p:nvSpPr>
+            <p:cNvPr id="89" name="TextBox 51"/>
+            <p:cNvSpPr txBox="1"/>
+            <p:nvPr/>
+          </p:nvSpPr>
+          <p:spPr>
+            <a:xfrm>
+              <a:off x="5328666" y="5163502"/>
+              <a:ext cx="1445381" cy="205359"/>
+            </a:xfrm>
+            <a:prstGeom prst="rect">
+              <a:avLst/>
+            </a:prstGeom>
+            <a:noFill/>
+            <a:ln>
+              <a:noFill/>
+            </a:ln>
+          </p:spPr>
+          <p:txBody>
+            <a:bodyPr wrap="none" lIns="0" tIns="0" rIns="0" bIns="0" anchor="t" anchorCtr="0">
+              <a:spAutoFit/>
+            </a:bodyPr>
+            <a:p>
+              <a:pPr algn="l"/>
+              <a:r>
+                <a:rPr lang="zh-CN" sz="1050" dirty="0">
+                  <a:solidFill>
+                    <a:schemeClr val="accent6"/>
+                  </a:solidFill>
+                  <a:latin typeface="+mn-lt"/>
+                  <a:ea typeface="+mn-ea"/>
+                  <a:cs typeface="+mn-cs"/>
+                </a:rPr>
+                <a:t>本版增量 · 只写变动点</a:t>
+              </a:r>
+              <a:endParaRPr lang="zh-CN" sz="1050" dirty="0">
+                <a:solidFill>
+                  <a:schemeClr val="accent6"/>
+                </a:solidFill>
+                <a:latin typeface="+mn-lt"/>
+                <a:ea typeface="+mn-ea"/>
+                <a:cs typeface="+mn-cs"/>
+              </a:endParaRPr>
+            </a:p>
+          </p:txBody>
+        </p:sp>
+      </p:grpSp>
+      <p:sp>
+        <p:nvSpPr>
+          <p:cNvPr id="90" name="TextBox 53"/>
+          <p:cNvSpPr txBox="1"/>
+          <p:nvPr/>
+        </p:nvSpPr>
+        <p:spPr>
+          <a:xfrm>
+            <a:off x="3254807" y="5680710"/>
+            <a:ext cx="5682386" cy="234696"/>
+          </a:xfrm>
+          <a:prstGeom prst="rect">
+            <a:avLst/>
+          </a:prstGeom>
+          <a:noFill/>
+          <a:ln>
+            <a:noFill/>
+          </a:ln>
+        </p:spPr>
+        <p:txBody>
+          <a:bodyPr wrap="none" lIns="0" tIns="0" rIns="0" bIns="0" anchor="t" anchorCtr="0">
+            <a:spAutoFit/>
+          </a:bodyPr>
+          <a:p>
+            <a:pPr algn="ctr"/>
+            <a:r>
+              <a:rPr lang="zh-CN" sz="1200" dirty="0">
+                <a:solidFill>
+                  <a:schemeClr val="accent6"/>
+                </a:solidFill>
+                <a:latin typeface="+mn-lt"/>
+                <a:ea typeface="+mn-ea"/>
+                <a:cs typeface="+mn-cs"/>
+              </a:rPr>
+              <a:t>知识库颗粒度越细，测试越准——但整理与审核时间也越多（权衡详见实战章节）</a:t>
+            </a:r>
+            <a:endParaRPr lang="zh-CN" sz="1200" dirty="0">
+              <a:solidFill>
+                <a:schemeClr val="accent6"/>
+              </a:solidFill>
+              <a:latin typeface="+mn-lt"/>
+              <a:ea typeface="+mn-ea"/>
+              <a:cs typeface="+mn-cs"/>
+            </a:endParaRPr>
+          </a:p>
+        </p:txBody>
+      </p:sp>
+      <p:sp>
+        <p:nvSpPr>
+          <p:cNvPr id="91" name="TextBox 54"/>
+          <p:cNvSpPr txBox="1"/>
+          <p:nvPr/>
+        </p:nvSpPr>
+        <p:spPr>
+          <a:xfrm>
+            <a:off x="11230540" y="6624002"/>
+            <a:ext cx="484194" cy="205359"/>
+          </a:xfrm>
+          <a:prstGeom prst="rect">
+            <a:avLst/>
+          </a:prstGeom>
+          <a:noFill/>
+          <a:ln>
+            <a:noFill/>
+          </a:ln>
+        </p:spPr>
+        <p:txBody>
+          <a:bodyPr wrap="none" lIns="0" tIns="0" rIns="0" bIns="0" anchor="t" anchorCtr="0">
+            <a:spAutoFit/>
+          </a:bodyPr>
+          <a:p>
+            <a:pPr algn="r"/>
+            <a:r>
+              <a:rPr lang="zh-CN" sz="1050" dirty="0">
+                <a:solidFill>
+                  <a:schemeClr val="accent6"/>
+                </a:solidFill>
+                <a:latin typeface="+mn-lt"/>
+                <a:ea typeface="+mn-ea"/>
+                <a:cs typeface="+mn-cs"/>
+              </a:rPr>
+              <a:t>06 / 24</a:t>
+            </a:r>
+            <a:endParaRPr lang="zh-CN" sz="1050" dirty="0">
+              <a:solidFill>
+                <a:schemeClr val="accent6"/>
+              </a:solidFill>
+              <a:latin typeface="+mn-lt"/>
+              <a:ea typeface="+mn-ea"/>
+              <a:cs typeface="+mn-cs"/>
+            </a:endParaRPr>
+          </a:p>
+        </p:txBody>
+      </p:sp>
     </p:spTree>
   </p:cSld>
   <p:clrMapOvr>

--- a/docs/宋焕莲-AI赋能：需求开发到自动化测试.pptx
+++ b/docs/宋焕莲-AI赋能：需求开发到自动化测试.pptx
@@ -37126,7 +37126,7 @@
       </p:grpSpPr>
       <p:grpSp>
         <p:nvGrpSpPr>
-          <p:cNvPr id="4" name="Group 4"/>
+          <p:cNvPr id="51" name="Group 13"/>
           <p:cNvGrpSpPr/>
           <p:nvPr/>
         </p:nvGrpSpPr>
@@ -37140,7 +37140,7 @@
         </p:grpSpPr>
         <p:sp>
           <p:nvSpPr>
-            <p:cNvPr id="2" name="Rectangle 2"/>
+            <p:cNvPr id="52" name="Rectangle 11"/>
             <p:cNvSpPr/>
             <p:nvPr/>
           </p:nvSpPr>
@@ -37162,7 +37162,7 @@
         </p:sp>
         <p:sp>
           <p:nvSpPr>
-            <p:cNvPr id="3" name="TextBox 3"/>
+            <p:cNvPr id="53" name="TextBox 12"/>
             <p:cNvSpPr txBox="1"/>
             <p:nvPr/>
           </p:nvSpPr>
@@ -37183,7 +37183,6 @@
             <a:bodyPr wrap="none" lIns="0" tIns="0" rIns="0" bIns="0" anchor="t" anchorCtr="0">
               <a:spAutoFit/>
             </a:bodyPr>
-            <a:lstStyle/>
             <a:p>
               <a:pPr algn="l"/>
               <a:r>
@@ -37195,7 +37194,7 @@
                   <a:ea typeface="+mn-ea"/>
                   <a:cs typeface="+mn-cs"/>
                 </a:rPr>
-                <a:t>协同方案关键：协作载体 + 结构化目录</a:t>
+                <a:t>协同方案设计：协作载体 + 结构化目录</a:t>
               </a:r>
               <a:endParaRPr lang="zh-CN" sz="2850" b="1" dirty="0">
                 <a:solidFill>
@@ -37211,32 +37210,32 @@
       </p:grpSp>
       <p:grpSp>
         <p:nvGrpSpPr>
-          <p:cNvPr id="11" name="Group 11"/>
+          <p:cNvPr id="54" name="Group 20"/>
           <p:cNvGrpSpPr/>
           <p:nvPr/>
         </p:nvGrpSpPr>
         <p:grpSpPr>
           <a:xfrm>
             <a:off x="609600" y="1066800"/>
-            <a:ext cx="4953000" cy="1428750"/>
+            <a:ext cx="4953000" cy="1107757"/>
             <a:chOff x="609600" y="1066800"/>
-            <a:chExt cx="4953000" cy="1428750"/>
+            <a:chExt cx="4953000" cy="1107757"/>
           </a:xfrm>
         </p:grpSpPr>
         <p:sp>
           <p:nvSpPr>
-            <p:cNvPr id="5" name="Rectangle 5"/>
+            <p:cNvPr id="55" name="Rectangle 14"/>
             <p:cNvSpPr/>
             <p:nvPr/>
           </p:nvSpPr>
           <p:spPr>
             <a:xfrm>
               <a:off x="609600" y="1066800"/>
-              <a:ext cx="4953000" cy="1428750"/>
+              <a:ext cx="4953000" cy="1085850"/>
             </a:xfrm>
             <a:prstGeom prst="roundRect">
               <a:avLst>
-                <a:gd name="adj" fmla="val 5333"/>
+                <a:gd name="adj" fmla="val 7018"/>
               </a:avLst>
             </a:prstGeom>
             <a:solidFill>
@@ -37249,13 +37248,13 @@
         </p:sp>
         <p:sp>
           <p:nvSpPr>
-            <p:cNvPr id="6" name="TextBox 6"/>
-            <p:cNvSpPr txBox="1"/>
-            <p:nvPr/>
-          </p:nvSpPr>
-          <p:spPr>
-            <a:xfrm>
-              <a:off x="832104" y="1242060"/>
+            <p:cNvPr id="56" name="TextBox 15"/>
+            <p:cNvSpPr txBox="1"/>
+            <p:nvPr/>
+          </p:nvSpPr>
+          <p:spPr>
+            <a:xfrm>
+              <a:off x="832104" y="1203960"/>
               <a:ext cx="658368" cy="234696"/>
             </a:xfrm>
             <a:prstGeom prst="rect">
@@ -37270,7 +37269,6 @@
             <a:bodyPr wrap="none" lIns="0" tIns="0" rIns="0" bIns="0" anchor="t" anchorCtr="0">
               <a:spAutoFit/>
             </a:bodyPr>
-            <a:lstStyle/>
             <a:p>
               <a:pPr algn="l"/>
               <a:r>
@@ -37297,13 +37295,13 @@
         </p:sp>
         <p:sp>
           <p:nvSpPr>
-            <p:cNvPr id="7" name="TextBox 7"/>
-            <p:cNvSpPr txBox="1"/>
-            <p:nvPr/>
-          </p:nvSpPr>
-          <p:spPr>
-            <a:xfrm>
-              <a:off x="832485" y="1516856"/>
+            <p:cNvPr id="57" name="TextBox 16"/>
+            <p:cNvSpPr txBox="1"/>
+            <p:nvPr/>
+          </p:nvSpPr>
+          <p:spPr>
+            <a:xfrm>
+              <a:off x="832485" y="1459706"/>
               <a:ext cx="3312806" cy="220028"/>
             </a:xfrm>
             <a:prstGeom prst="rect">
@@ -37318,7 +37316,6 @@
             <a:bodyPr wrap="none" lIns="0" tIns="0" rIns="0" bIns="0" anchor="t" anchorCtr="0">
               <a:spAutoFit/>
             </a:bodyPr>
-            <a:lstStyle/>
             <a:p>
               <a:pPr algn="l"/>
               <a:r>
@@ -37345,13 +37342,13 @@
         </p:sp>
         <p:sp>
           <p:nvSpPr>
-            <p:cNvPr id="8" name="TextBox 8"/>
-            <p:cNvSpPr txBox="1"/>
-            <p:nvPr/>
-          </p:nvSpPr>
-          <p:spPr>
-            <a:xfrm>
-              <a:off x="833438" y="1807845"/>
+            <p:cNvPr id="58" name="TextBox 17"/>
+            <p:cNvSpPr txBox="1"/>
+            <p:nvPr/>
+          </p:nvSpPr>
+          <p:spPr>
+            <a:xfrm>
+              <a:off x="833438" y="1693545"/>
               <a:ext cx="2538527" cy="176212"/>
             </a:xfrm>
             <a:prstGeom prst="rect">
@@ -37366,7 +37363,6 @@
             <a:bodyPr wrap="none" lIns="0" tIns="0" rIns="0" bIns="0" anchor="t" anchorCtr="0">
               <a:spAutoFit/>
             </a:bodyPr>
-            <a:lstStyle/>
             <a:p>
               <a:pPr marL="97155" indent="-97155" algn="l">
                 <a:buClr>
@@ -37400,13 +37396,13 @@
         </p:sp>
         <p:sp>
           <p:nvSpPr>
-            <p:cNvPr id="9" name="TextBox 9"/>
-            <p:cNvSpPr txBox="1"/>
-            <p:nvPr/>
-          </p:nvSpPr>
-          <p:spPr>
-            <a:xfrm>
-              <a:off x="833438" y="1998345"/>
+            <p:cNvPr id="59" name="TextBox 18"/>
+            <p:cNvSpPr txBox="1"/>
+            <p:nvPr/>
+          </p:nvSpPr>
+          <p:spPr>
+            <a:xfrm>
+              <a:off x="833438" y="1845945"/>
               <a:ext cx="2681288" cy="176212"/>
             </a:xfrm>
             <a:prstGeom prst="rect">
@@ -37421,7 +37417,6 @@
             <a:bodyPr wrap="none" lIns="0" tIns="0" rIns="0" bIns="0" anchor="t" anchorCtr="0">
               <a:spAutoFit/>
             </a:bodyPr>
-            <a:lstStyle/>
             <a:p>
               <a:pPr marL="97155" indent="-97155" algn="l">
                 <a:buClr>
@@ -37455,13 +37450,13 @@
         </p:sp>
         <p:sp>
           <p:nvSpPr>
-            <p:cNvPr id="10" name="TextBox 10"/>
-            <p:cNvSpPr txBox="1"/>
-            <p:nvPr/>
-          </p:nvSpPr>
-          <p:spPr>
-            <a:xfrm>
-              <a:off x="833438" y="2188845"/>
+            <p:cNvPr id="60" name="TextBox 19"/>
+            <p:cNvSpPr txBox="1"/>
+            <p:nvPr/>
+          </p:nvSpPr>
+          <p:spPr>
+            <a:xfrm>
+              <a:off x="833438" y="1998345"/>
               <a:ext cx="2046122" cy="176212"/>
             </a:xfrm>
             <a:prstGeom prst="rect">
@@ -37476,7 +37471,6 @@
             <a:bodyPr wrap="none" lIns="0" tIns="0" rIns="0" bIns="0" anchor="t" anchorCtr="0">
               <a:spAutoFit/>
             </a:bodyPr>
-            <a:lstStyle/>
             <a:p>
               <a:pPr marL="97155" indent="-97155" algn="l">
                 <a:buClr>
@@ -37511,32 +37505,32 @@
       </p:grpSp>
       <p:grpSp>
         <p:nvGrpSpPr>
-          <p:cNvPr id="16" name="Group 16"/>
+          <p:cNvPr id="61" name="Group 25"/>
           <p:cNvGrpSpPr/>
           <p:nvPr/>
         </p:nvGrpSpPr>
         <p:grpSpPr>
           <a:xfrm>
-            <a:off x="609600" y="2647950"/>
-            <a:ext cx="4953000" cy="723900"/>
-            <a:chOff x="609600" y="2647950"/>
-            <a:chExt cx="4953000" cy="723900"/>
+            <a:off x="609600" y="2247900"/>
+            <a:ext cx="4953000" cy="571500"/>
+            <a:chOff x="609600" y="2247900"/>
+            <a:chExt cx="4953000" cy="571500"/>
           </a:xfrm>
         </p:grpSpPr>
         <p:sp>
           <p:nvSpPr>
-            <p:cNvPr id="12" name="Rectangle 12"/>
+            <p:cNvPr id="62" name="Rectangle 21"/>
             <p:cNvSpPr/>
             <p:nvPr/>
           </p:nvSpPr>
           <p:spPr>
             <a:xfrm>
-              <a:off x="609600" y="2647950"/>
-              <a:ext cx="4953000" cy="723900"/>
+              <a:off x="609600" y="2247900"/>
+              <a:ext cx="4953000" cy="571500"/>
             </a:xfrm>
             <a:prstGeom prst="roundRect">
               <a:avLst>
-                <a:gd name="adj" fmla="val 10526"/>
+                <a:gd name="adj" fmla="val 13333"/>
               </a:avLst>
             </a:prstGeom>
             <a:solidFill>
@@ -37551,14 +37545,14 @@
         </p:sp>
         <p:sp>
           <p:nvSpPr>
-            <p:cNvPr id="13" name="Rectangle 13"/>
+            <p:cNvPr id="63" name="Rectangle 22"/>
             <p:cNvSpPr/>
             <p:nvPr/>
           </p:nvSpPr>
           <p:spPr>
             <a:xfrm>
-              <a:off x="609600" y="2647950"/>
-              <a:ext cx="76200" cy="723900"/>
+              <a:off x="609600" y="2247900"/>
+              <a:ext cx="76200" cy="571500"/>
             </a:xfrm>
             <a:prstGeom prst="rect">
               <a:avLst/>
@@ -37573,13 +37567,13 @@
         </p:sp>
         <p:sp>
           <p:nvSpPr>
-            <p:cNvPr id="14" name="TextBox 14"/>
-            <p:cNvSpPr txBox="1"/>
-            <p:nvPr/>
-          </p:nvSpPr>
-          <p:spPr>
-            <a:xfrm>
-              <a:off x="870204" y="2823210"/>
+            <p:cNvPr id="64" name="TextBox 23"/>
+            <p:cNvSpPr txBox="1"/>
+            <p:nvPr/>
+          </p:nvSpPr>
+          <p:spPr>
+            <a:xfrm>
+              <a:off x="870204" y="2366010"/>
               <a:ext cx="819912" cy="234696"/>
             </a:xfrm>
             <a:prstGeom prst="rect">
@@ -37594,7 +37588,6 @@
             <a:bodyPr wrap="none" lIns="0" tIns="0" rIns="0" bIns="0" anchor="t" anchorCtr="0">
               <a:spAutoFit/>
             </a:bodyPr>
-            <a:lstStyle/>
             <a:p>
               <a:pPr algn="l"/>
               <a:r>
@@ -37621,13 +37614,13 @@
         </p:sp>
         <p:sp>
           <p:nvSpPr>
-            <p:cNvPr id="15" name="TextBox 15"/>
-            <p:cNvSpPr txBox="1"/>
-            <p:nvPr/>
-          </p:nvSpPr>
-          <p:spPr>
-            <a:xfrm>
-              <a:off x="871347" y="3095149"/>
+            <p:cNvPr id="65" name="TextBox 24"/>
+            <p:cNvSpPr txBox="1"/>
+            <p:nvPr/>
+          </p:nvSpPr>
+          <p:spPr>
+            <a:xfrm>
+              <a:off x="871347" y="2599849"/>
               <a:ext cx="3459813" cy="190690"/>
             </a:xfrm>
             <a:prstGeom prst="rect">
@@ -37642,7 +37635,6 @@
             <a:bodyPr wrap="none" lIns="0" tIns="0" rIns="0" bIns="0" anchor="t" anchorCtr="0">
               <a:spAutoFit/>
             </a:bodyPr>
-            <a:lstStyle/>
             <a:p>
               <a:pPr algn="l"/>
               <a:r>
@@ -37670,32 +37662,32 @@
       </p:grpSp>
       <p:grpSp>
         <p:nvGrpSpPr>
-          <p:cNvPr id="21" name="Group 21"/>
+          <p:cNvPr id="66" name="Group 30"/>
           <p:cNvGrpSpPr/>
           <p:nvPr/>
         </p:nvGrpSpPr>
         <p:grpSpPr>
           <a:xfrm>
-            <a:off x="609600" y="3467100"/>
-            <a:ext cx="4953000" cy="723900"/>
-            <a:chOff x="609600" y="3467100"/>
-            <a:chExt cx="4953000" cy="723900"/>
+            <a:off x="609600" y="2914650"/>
+            <a:ext cx="4953000" cy="571500"/>
+            <a:chOff x="609600" y="2914650"/>
+            <a:chExt cx="4953000" cy="571500"/>
           </a:xfrm>
         </p:grpSpPr>
         <p:sp>
           <p:nvSpPr>
-            <p:cNvPr id="17" name="Rectangle 17"/>
+            <p:cNvPr id="67" name="Rectangle 26"/>
             <p:cNvSpPr/>
             <p:nvPr/>
           </p:nvSpPr>
           <p:spPr>
             <a:xfrm>
-              <a:off x="609600" y="3467100"/>
-              <a:ext cx="4953000" cy="723900"/>
+              <a:off x="609600" y="2914650"/>
+              <a:ext cx="4953000" cy="571500"/>
             </a:xfrm>
             <a:prstGeom prst="roundRect">
               <a:avLst>
-                <a:gd name="adj" fmla="val 10526"/>
+                <a:gd name="adj" fmla="val 13333"/>
               </a:avLst>
             </a:prstGeom>
             <a:solidFill>
@@ -37710,14 +37702,14 @@
         </p:sp>
         <p:sp>
           <p:nvSpPr>
-            <p:cNvPr id="18" name="Rectangle 18"/>
+            <p:cNvPr id="68" name="Rectangle 27"/>
             <p:cNvSpPr/>
             <p:nvPr/>
           </p:nvSpPr>
           <p:spPr>
             <a:xfrm>
-              <a:off x="609600" y="3467100"/>
-              <a:ext cx="76200" cy="723900"/>
+              <a:off x="609600" y="2914650"/>
+              <a:ext cx="76200" cy="571500"/>
             </a:xfrm>
             <a:prstGeom prst="rect">
               <a:avLst/>
@@ -37732,13 +37724,13 @@
         </p:sp>
         <p:sp>
           <p:nvSpPr>
-            <p:cNvPr id="19" name="TextBox 19"/>
-            <p:cNvSpPr txBox="1"/>
-            <p:nvPr/>
-          </p:nvSpPr>
-          <p:spPr>
-            <a:xfrm>
-              <a:off x="870204" y="3642360"/>
+            <p:cNvPr id="69" name="TextBox 28"/>
+            <p:cNvSpPr txBox="1"/>
+            <p:nvPr/>
+          </p:nvSpPr>
+          <p:spPr>
+            <a:xfrm>
+              <a:off x="870204" y="3032760"/>
               <a:ext cx="658368" cy="234696"/>
             </a:xfrm>
             <a:prstGeom prst="rect">
@@ -37753,7 +37745,6 @@
             <a:bodyPr wrap="none" lIns="0" tIns="0" rIns="0" bIns="0" anchor="t" anchorCtr="0">
               <a:spAutoFit/>
             </a:bodyPr>
-            <a:lstStyle/>
             <a:p>
               <a:pPr algn="l"/>
               <a:r>
@@ -37780,13 +37771,13 @@
         </p:sp>
         <p:sp>
           <p:nvSpPr>
-            <p:cNvPr id="20" name="TextBox 20"/>
-            <p:cNvSpPr txBox="1"/>
-            <p:nvPr/>
-          </p:nvSpPr>
-          <p:spPr>
-            <a:xfrm>
-              <a:off x="871347" y="3914299"/>
+            <p:cNvPr id="70" name="TextBox 29"/>
+            <p:cNvSpPr txBox="1"/>
+            <p:nvPr/>
+          </p:nvSpPr>
+          <p:spPr>
+            <a:xfrm>
+              <a:off x="871347" y="3266599"/>
               <a:ext cx="2498110" cy="190690"/>
             </a:xfrm>
             <a:prstGeom prst="rect">
@@ -37801,7 +37792,6 @@
             <a:bodyPr wrap="none" lIns="0" tIns="0" rIns="0" bIns="0" anchor="t" anchorCtr="0">
               <a:spAutoFit/>
             </a:bodyPr>
-            <a:lstStyle/>
             <a:p>
               <a:pPr algn="l"/>
               <a:r>
@@ -37829,32 +37819,32 @@
       </p:grpSp>
       <p:grpSp>
         <p:nvGrpSpPr>
-          <p:cNvPr id="26" name="Group 26"/>
+          <p:cNvPr id="71" name="Group 43"/>
           <p:cNvGrpSpPr/>
           <p:nvPr/>
         </p:nvGrpSpPr>
         <p:grpSpPr>
           <a:xfrm>
-            <a:off x="609600" y="4286250"/>
-            <a:ext cx="4953000" cy="723900"/>
-            <a:chOff x="609600" y="4286250"/>
-            <a:chExt cx="4953000" cy="723900"/>
+            <a:off x="609600" y="3581400"/>
+            <a:ext cx="4953000" cy="1619250"/>
+            <a:chOff x="609600" y="3581400"/>
+            <a:chExt cx="4953000" cy="1619250"/>
           </a:xfrm>
         </p:grpSpPr>
         <p:sp>
           <p:nvSpPr>
-            <p:cNvPr id="22" name="Rectangle 22"/>
+            <p:cNvPr id="72" name="Rectangle 31"/>
             <p:cNvSpPr/>
             <p:nvPr/>
           </p:nvSpPr>
           <p:spPr>
             <a:xfrm>
-              <a:off x="609600" y="4286250"/>
-              <a:ext cx="4953000" cy="723900"/>
+              <a:off x="609600" y="3581400"/>
+              <a:ext cx="4953000" cy="1619250"/>
             </a:xfrm>
             <a:prstGeom prst="roundRect">
               <a:avLst>
-                <a:gd name="adj" fmla="val 10526"/>
+                <a:gd name="adj" fmla="val 4706"/>
               </a:avLst>
             </a:prstGeom>
             <a:solidFill>
@@ -37869,14 +37859,14 @@
         </p:sp>
         <p:sp>
           <p:nvSpPr>
-            <p:cNvPr id="23" name="Rectangle 23"/>
+            <p:cNvPr id="73" name="Rectangle 32"/>
             <p:cNvSpPr/>
             <p:nvPr/>
           </p:nvSpPr>
           <p:spPr>
             <a:xfrm>
-              <a:off x="609600" y="4286250"/>
-              <a:ext cx="76200" cy="723900"/>
+              <a:off x="609600" y="3581400"/>
+              <a:ext cx="76200" cy="1619250"/>
             </a:xfrm>
             <a:prstGeom prst="rect">
               <a:avLst/>
@@ -37891,28 +37881,27 @@
         </p:sp>
         <p:sp>
           <p:nvSpPr>
-            <p:cNvPr id="24" name="TextBox 24"/>
-            <p:cNvSpPr txBox="1"/>
-            <p:nvPr/>
-          </p:nvSpPr>
-          <p:spPr>
-            <a:xfrm>
-              <a:off x="870204" y="4461510"/>
-              <a:ext cx="1080272" cy="234696"/>
-            </a:xfrm>
-            <a:prstGeom prst="rect">
-              <a:avLst/>
-            </a:prstGeom>
-            <a:noFill/>
-            <a:ln>
-              <a:noFill/>
-            </a:ln>
-          </p:spPr>
-          <p:txBody>
-            <a:bodyPr wrap="none" lIns="0" tIns="0" rIns="0" bIns="0" anchor="t" anchorCtr="0">
-              <a:spAutoFit/>
-            </a:bodyPr>
-            <a:lstStyle/>
+            <p:cNvPr id="74" name="TextBox 33"/>
+            <p:cNvSpPr txBox="1"/>
+            <p:nvPr/>
+          </p:nvSpPr>
+          <p:spPr>
+            <a:xfrm>
+              <a:off x="870204" y="3718560"/>
+              <a:ext cx="2616464" cy="234696"/>
+            </a:xfrm>
+            <a:prstGeom prst="rect">
+              <a:avLst/>
+            </a:prstGeom>
+            <a:noFill/>
+            <a:ln>
+              <a:noFill/>
+            </a:ln>
+          </p:spPr>
+          <p:txBody>
+            <a:bodyPr wrap="none" lIns="0" tIns="0" rIns="0" bIns="0" anchor="t" anchorCtr="0">
+              <a:spAutoFit/>
+            </a:bodyPr>
             <a:p>
               <a:pPr algn="l"/>
               <a:r>
@@ -37924,7 +37913,7 @@
                   <a:ea typeface="+mn-ea"/>
                   <a:cs typeface="+mn-cs"/>
                 </a:rPr>
-                <a:t>REQ 统一主键</a:t>
+                <a:t>REQ 统一主键：编号自带模块信息</a:t>
               </a:r>
               <a:endParaRPr lang="zh-CN" sz="1200" b="1" dirty="0">
                 <a:solidFill>
@@ -37939,31 +37928,176 @@
         </p:sp>
         <p:sp>
           <p:nvSpPr>
-            <p:cNvPr id="25" name="TextBox 25"/>
-            <p:cNvSpPr txBox="1"/>
-            <p:nvPr/>
-          </p:nvSpPr>
-          <p:spPr>
-            <a:xfrm>
-              <a:off x="871347" y="4733449"/>
-              <a:ext cx="2219693" cy="190690"/>
-            </a:xfrm>
-            <a:prstGeom prst="rect">
-              <a:avLst/>
-            </a:prstGeom>
-            <a:noFill/>
-            <a:ln>
-              <a:noFill/>
-            </a:ln>
-          </p:spPr>
-          <p:txBody>
-            <a:bodyPr wrap="none" lIns="0" tIns="0" rIns="0" bIns="0" anchor="t" anchorCtr="0">
-              <a:spAutoFit/>
-            </a:bodyPr>
-            <a:lstStyle/>
+            <p:cNvPr id="75" name="TextBox 34"/>
+            <p:cNvSpPr txBox="1"/>
+            <p:nvPr/>
+          </p:nvSpPr>
+          <p:spPr>
+            <a:xfrm>
+              <a:off x="869442" y="4026218"/>
+              <a:ext cx="2901637" cy="264033"/>
+            </a:xfrm>
+            <a:prstGeom prst="rect">
+              <a:avLst/>
+            </a:prstGeom>
+            <a:noFill/>
+            <a:ln>
+              <a:noFill/>
+            </a:ln>
+          </p:spPr>
+          <p:txBody>
+            <a:bodyPr wrap="none" lIns="0" tIns="0" rIns="0" bIns="0" anchor="t" anchorCtr="0">
+              <a:spAutoFit/>
+            </a:bodyPr>
             <a:p>
               <a:pPr algn="l"/>
               <a:r>
+                <a:rPr lang="zh-CN" sz="1350" b="1" dirty="0">
+                  <a:solidFill>
+                    <a:schemeClr val="accent6"/>
+                  </a:solidFill>
+                  <a:latin typeface="Consolas" panose="020B0609020204030204"/>
+                  <a:ea typeface="Consolas" panose="020B0609020204030204"/>
+                  <a:cs typeface="Consolas" panose="020B0609020204030204"/>
+                </a:rPr>
+                <a:t>REQ-</a:t>
+              </a:r>
+              <a:r>
+                <a:rPr lang="zh-CN" sz="1350" b="1" dirty="0">
+                  <a:solidFill>
+                    <a:schemeClr val="accent1"/>
+                  </a:solidFill>
+                  <a:latin typeface="Consolas" panose="020B0609020204030204"/>
+                  <a:ea typeface="Consolas" panose="020B0609020204030204"/>
+                  <a:cs typeface="Consolas" panose="020B0609020204030204"/>
+                </a:rPr>
+                <a:t>CONFIG</a:t>
+              </a:r>
+              <a:r>
+                <a:rPr lang="zh-CN" sz="1350" b="1" dirty="0">
+                  <a:solidFill>
+                    <a:schemeClr val="accent6"/>
+                  </a:solidFill>
+                  <a:latin typeface="Consolas" panose="020B0609020204030204"/>
+                  <a:ea typeface="Consolas" panose="020B0609020204030204"/>
+                  <a:cs typeface="Consolas" panose="020B0609020204030204"/>
+                </a:rPr>
+                <a:t>-</a:t>
+              </a:r>
+              <a:r>
+                <a:rPr lang="zh-CN" sz="1350" b="1" dirty="0">
+                  <a:solidFill>
+                    <a:schemeClr val="accent2"/>
+                  </a:solidFill>
+                  <a:latin typeface="Consolas" panose="020B0609020204030204"/>
+                  <a:ea typeface="Consolas" panose="020B0609020204030204"/>
+                  <a:cs typeface="Consolas" panose="020B0609020204030204"/>
+                </a:rPr>
+                <a:t>BILLCFG</a:t>
+              </a:r>
+              <a:r>
+                <a:rPr lang="zh-CN" sz="1350" b="1" dirty="0">
+                  <a:solidFill>
+                    <a:schemeClr val="accent6"/>
+                  </a:solidFill>
+                  <a:latin typeface="Consolas" panose="020B0609020204030204"/>
+                  <a:ea typeface="Consolas" panose="020B0609020204030204"/>
+                  <a:cs typeface="Consolas" panose="020B0609020204030204"/>
+                </a:rPr>
+                <a:t>-</a:t>
+              </a:r>
+              <a:r>
+                <a:rPr lang="zh-CN" sz="1350" b="1" dirty="0">
+                  <a:solidFill>
+                    <a:schemeClr val="accent3"/>
+                  </a:solidFill>
+                  <a:latin typeface="Consolas" panose="020B0609020204030204"/>
+                  <a:ea typeface="Consolas" panose="020B0609020204030204"/>
+                  <a:cs typeface="Consolas" panose="020B0609020204030204"/>
+                </a:rPr>
+                <a:t>LIST</a:t>
+              </a:r>
+              <a:r>
+                <a:rPr lang="zh-CN" sz="1350" b="1" dirty="0">
+                  <a:solidFill>
+                    <a:schemeClr val="accent6"/>
+                  </a:solidFill>
+                  <a:latin typeface="Consolas" panose="020B0609020204030204"/>
+                  <a:ea typeface="Consolas" panose="020B0609020204030204"/>
+                  <a:cs typeface="Consolas" panose="020B0609020204030204"/>
+                </a:rPr>
+                <a:t>-</a:t>
+              </a:r>
+              <a:r>
+                <a:rPr lang="zh-CN" sz="1350" b="1" dirty="0">
+                  <a:solidFill>
+                    <a:schemeClr val="dk1"/>
+                  </a:solidFill>
+                  <a:latin typeface="Consolas" panose="020B0609020204030204"/>
+                  <a:ea typeface="Consolas" panose="020B0609020204030204"/>
+                  <a:cs typeface="Consolas" panose="020B0609020204030204"/>
+                </a:rPr>
+                <a:t>001</a:t>
+              </a:r>
+              <a:endParaRPr lang="zh-CN" sz="1350" b="1" dirty="0">
+                <a:solidFill>
+                  <a:schemeClr val="dk1"/>
+                </a:solidFill>
+                <a:latin typeface="Consolas" panose="020B0609020204030204"/>
+                <a:ea typeface="Consolas" panose="020B0609020204030204"/>
+                <a:cs typeface="Consolas" panose="020B0609020204030204"/>
+              </a:endParaRPr>
+            </a:p>
+          </p:txBody>
+        </p:sp>
+        <p:sp>
+          <p:nvSpPr>
+            <p:cNvPr id="76" name="Rectangle 35"/>
+            <p:cNvSpPr/>
+            <p:nvPr/>
+          </p:nvSpPr>
+          <p:spPr>
+            <a:xfrm>
+              <a:off x="895350" y="4343400"/>
+              <a:ext cx="95250" cy="95250"/>
+            </a:xfrm>
+            <a:prstGeom prst="rect">
+              <a:avLst/>
+            </a:prstGeom>
+            <a:solidFill>
+              <a:schemeClr val="accent1"/>
+            </a:solidFill>
+            <a:ln>
+              <a:noFill/>
+            </a:ln>
+          </p:spPr>
+        </p:sp>
+        <p:sp>
+          <p:nvSpPr>
+            <p:cNvPr id="77" name="TextBox 36"/>
+            <p:cNvSpPr txBox="1"/>
+            <p:nvPr/>
+          </p:nvSpPr>
+          <p:spPr>
+            <a:xfrm>
+              <a:off x="1061847" y="4333399"/>
+              <a:ext cx="1877802" cy="190690"/>
+            </a:xfrm>
+            <a:prstGeom prst="rect">
+              <a:avLst/>
+            </a:prstGeom>
+            <a:noFill/>
+            <a:ln>
+              <a:noFill/>
+            </a:ln>
+          </p:spPr>
+          <p:txBody>
+            <a:bodyPr wrap="none" lIns="0" tIns="0" rIns="0" bIns="0" anchor="t" anchorCtr="0">
+              <a:spAutoFit/>
+            </a:bodyPr>
+            <a:p>
+              <a:pPr algn="l"/>
+              <a:r>
                 <a:rPr lang="zh-CN" sz="980" dirty="0">
                   <a:solidFill>
                     <a:schemeClr val="dk1"/>
@@ -37972,7 +38106,214 @@
                   <a:ea typeface="+mn-ea"/>
                   <a:cs typeface="+mn-cs"/>
                 </a:rPr>
-                <a:t>贯穿需求/设计/开发/测试/缺陷/回归</a:t>
+                <a:t>CONFIG → 一级模块：配置中心</a:t>
+              </a:r>
+              <a:endParaRPr lang="zh-CN" sz="980" dirty="0">
+                <a:solidFill>
+                  <a:schemeClr val="dk1"/>
+                </a:solidFill>
+                <a:latin typeface="+mn-lt"/>
+                <a:ea typeface="+mn-ea"/>
+                <a:cs typeface="+mn-cs"/>
+              </a:endParaRPr>
+            </a:p>
+          </p:txBody>
+        </p:sp>
+        <p:sp>
+          <p:nvSpPr>
+            <p:cNvPr id="78" name="Rectangle 37"/>
+            <p:cNvSpPr/>
+            <p:nvPr/>
+          </p:nvSpPr>
+          <p:spPr>
+            <a:xfrm>
+              <a:off x="895350" y="4552950"/>
+              <a:ext cx="95250" cy="95250"/>
+            </a:xfrm>
+            <a:prstGeom prst="rect">
+              <a:avLst/>
+            </a:prstGeom>
+            <a:solidFill>
+              <a:schemeClr val="accent2"/>
+            </a:solidFill>
+            <a:ln>
+              <a:noFill/>
+            </a:ln>
+          </p:spPr>
+        </p:sp>
+        <p:sp>
+          <p:nvSpPr>
+            <p:cNvPr id="79" name="TextBox 38"/>
+            <p:cNvSpPr txBox="1"/>
+            <p:nvPr/>
+          </p:nvSpPr>
+          <p:spPr>
+            <a:xfrm>
+              <a:off x="1061847" y="4542949"/>
+              <a:ext cx="2344776" cy="190690"/>
+            </a:xfrm>
+            <a:prstGeom prst="rect">
+              <a:avLst/>
+            </a:prstGeom>
+            <a:noFill/>
+            <a:ln>
+              <a:noFill/>
+            </a:ln>
+          </p:spPr>
+          <p:txBody>
+            <a:bodyPr wrap="none" lIns="0" tIns="0" rIns="0" bIns="0" anchor="t" anchorCtr="0">
+              <a:spAutoFit/>
+            </a:bodyPr>
+            <a:p>
+              <a:pPr algn="l"/>
+              <a:r>
+                <a:rPr lang="zh-CN" sz="980" dirty="0">
+                  <a:solidFill>
+                    <a:schemeClr val="dk1"/>
+                  </a:solidFill>
+                  <a:latin typeface="+mn-lt"/>
+                  <a:ea typeface="+mn-ea"/>
+                  <a:cs typeface="+mn-cs"/>
+                </a:rPr>
+                <a:t>BILLCFG → 二级模块：商业化计费配置</a:t>
+              </a:r>
+              <a:endParaRPr lang="zh-CN" sz="980" dirty="0">
+                <a:solidFill>
+                  <a:schemeClr val="dk1"/>
+                </a:solidFill>
+                <a:latin typeface="+mn-lt"/>
+                <a:ea typeface="+mn-ea"/>
+                <a:cs typeface="+mn-cs"/>
+              </a:endParaRPr>
+            </a:p>
+          </p:txBody>
+        </p:sp>
+        <p:sp>
+          <p:nvSpPr>
+            <p:cNvPr id="80" name="Rectangle 39"/>
+            <p:cNvSpPr/>
+            <p:nvPr/>
+          </p:nvSpPr>
+          <p:spPr>
+            <a:xfrm>
+              <a:off x="895350" y="4762500"/>
+              <a:ext cx="95250" cy="95250"/>
+            </a:xfrm>
+            <a:prstGeom prst="rect">
+              <a:avLst/>
+            </a:prstGeom>
+            <a:solidFill>
+              <a:schemeClr val="accent3"/>
+            </a:solidFill>
+            <a:ln>
+              <a:noFill/>
+            </a:ln>
+          </p:spPr>
+        </p:sp>
+        <p:sp>
+          <p:nvSpPr>
+            <p:cNvPr id="81" name="TextBox 40"/>
+            <p:cNvSpPr txBox="1"/>
+            <p:nvPr/>
+          </p:nvSpPr>
+          <p:spPr>
+            <a:xfrm>
+              <a:off x="1061847" y="4752499"/>
+              <a:ext cx="1417798" cy="190690"/>
+            </a:xfrm>
+            <a:prstGeom prst="rect">
+              <a:avLst/>
+            </a:prstGeom>
+            <a:noFill/>
+            <a:ln>
+              <a:noFill/>
+            </a:ln>
+          </p:spPr>
+          <p:txBody>
+            <a:bodyPr wrap="none" lIns="0" tIns="0" rIns="0" bIns="0" anchor="t" anchorCtr="0">
+              <a:spAutoFit/>
+            </a:bodyPr>
+            <a:p>
+              <a:pPr algn="l"/>
+              <a:r>
+                <a:rPr lang="zh-CN" sz="980" dirty="0">
+                  <a:solidFill>
+                    <a:schemeClr val="dk1"/>
+                  </a:solidFill>
+                  <a:latin typeface="+mn-lt"/>
+                  <a:ea typeface="+mn-ea"/>
+                  <a:cs typeface="+mn-cs"/>
+                </a:rPr>
+                <a:t>LIST → 功能区域：列表</a:t>
+              </a:r>
+              <a:endParaRPr lang="zh-CN" sz="980" dirty="0">
+                <a:solidFill>
+                  <a:schemeClr val="dk1"/>
+                </a:solidFill>
+                <a:latin typeface="+mn-lt"/>
+                <a:ea typeface="+mn-ea"/>
+                <a:cs typeface="+mn-cs"/>
+              </a:endParaRPr>
+            </a:p>
+          </p:txBody>
+        </p:sp>
+        <p:sp>
+          <p:nvSpPr>
+            <p:cNvPr id="82" name="Rectangle 41"/>
+            <p:cNvSpPr/>
+            <p:nvPr/>
+          </p:nvSpPr>
+          <p:spPr>
+            <a:xfrm>
+              <a:off x="895350" y="4972050"/>
+              <a:ext cx="95250" cy="95250"/>
+            </a:xfrm>
+            <a:prstGeom prst="rect">
+              <a:avLst/>
+            </a:prstGeom>
+            <a:solidFill>
+              <a:schemeClr val="dk1"/>
+            </a:solidFill>
+            <a:ln>
+              <a:noFill/>
+            </a:ln>
+          </p:spPr>
+        </p:sp>
+        <p:sp>
+          <p:nvSpPr>
+            <p:cNvPr id="83" name="TextBox 42"/>
+            <p:cNvSpPr txBox="1"/>
+            <p:nvPr/>
+          </p:nvSpPr>
+          <p:spPr>
+            <a:xfrm>
+              <a:off x="1061847" y="4962049"/>
+              <a:ext cx="1038941" cy="190690"/>
+            </a:xfrm>
+            <a:prstGeom prst="rect">
+              <a:avLst/>
+            </a:prstGeom>
+            <a:noFill/>
+            <a:ln>
+              <a:noFill/>
+            </a:ln>
+          </p:spPr>
+          <p:txBody>
+            <a:bodyPr wrap="none" lIns="0" tIns="0" rIns="0" bIns="0" anchor="t" anchorCtr="0">
+              <a:spAutoFit/>
+            </a:bodyPr>
+            <a:p>
+              <a:pPr algn="l"/>
+              <a:r>
+                <a:rPr lang="zh-CN" sz="980" dirty="0">
+                  <a:solidFill>
+                    <a:schemeClr val="dk1"/>
+                  </a:solidFill>
+                  <a:latin typeface="+mn-lt"/>
+                  <a:ea typeface="+mn-ea"/>
+                  <a:cs typeface="+mn-cs"/>
+                </a:rPr>
+                <a:t>001 → 功能点序号</a:t>
               </a:r>
               <a:endParaRPr lang="zh-CN" sz="980" dirty="0">
                 <a:solidFill>
@@ -37988,32 +38329,32 @@
       </p:grpSp>
       <p:grpSp>
         <p:nvGrpSpPr>
-          <p:cNvPr id="31" name="Group 31"/>
+          <p:cNvPr id="84" name="Group 48"/>
           <p:cNvGrpSpPr/>
           <p:nvPr/>
         </p:nvGrpSpPr>
         <p:grpSpPr>
           <a:xfrm>
-            <a:off x="609600" y="5105400"/>
-            <a:ext cx="4953000" cy="723900"/>
-            <a:chOff x="609600" y="5105400"/>
-            <a:chExt cx="4953000" cy="723900"/>
+            <a:off x="609600" y="5295900"/>
+            <a:ext cx="4953000" cy="542639"/>
+            <a:chOff x="609600" y="5295900"/>
+            <a:chExt cx="4953000" cy="542639"/>
           </a:xfrm>
         </p:grpSpPr>
         <p:sp>
           <p:nvSpPr>
-            <p:cNvPr id="27" name="Rectangle 27"/>
+            <p:cNvPr id="85" name="Rectangle 44"/>
             <p:cNvSpPr/>
             <p:nvPr/>
           </p:nvSpPr>
           <p:spPr>
             <a:xfrm>
-              <a:off x="609600" y="5105400"/>
-              <a:ext cx="4953000" cy="723900"/>
+              <a:off x="609600" y="5295900"/>
+              <a:ext cx="4953000" cy="533400"/>
             </a:xfrm>
             <a:prstGeom prst="roundRect">
               <a:avLst>
-                <a:gd name="adj" fmla="val 10526"/>
+                <a:gd name="adj" fmla="val 14286"/>
               </a:avLst>
             </a:prstGeom>
             <a:solidFill>
@@ -38028,14 +38369,14 @@
         </p:sp>
         <p:sp>
           <p:nvSpPr>
-            <p:cNvPr id="28" name="Rectangle 28"/>
+            <p:cNvPr id="86" name="Rectangle 45"/>
             <p:cNvSpPr/>
             <p:nvPr/>
           </p:nvSpPr>
           <p:spPr>
             <a:xfrm>
-              <a:off x="609600" y="5105400"/>
-              <a:ext cx="76200" cy="723900"/>
+              <a:off x="609600" y="5295900"/>
+              <a:ext cx="76200" cy="533400"/>
             </a:xfrm>
             <a:prstGeom prst="rect">
               <a:avLst/>
@@ -38050,13 +38391,13 @@
         </p:sp>
         <p:sp>
           <p:nvSpPr>
-            <p:cNvPr id="29" name="TextBox 29"/>
-            <p:cNvSpPr txBox="1"/>
-            <p:nvPr/>
-          </p:nvSpPr>
-          <p:spPr>
-            <a:xfrm>
-              <a:off x="870204" y="5280660"/>
+            <p:cNvPr id="87" name="TextBox 46"/>
+            <p:cNvSpPr txBox="1"/>
+            <p:nvPr/>
+          </p:nvSpPr>
+          <p:spPr>
+            <a:xfrm>
+              <a:off x="870204" y="5414010"/>
               <a:ext cx="819912" cy="234696"/>
             </a:xfrm>
             <a:prstGeom prst="rect">
@@ -38071,7 +38412,6 @@
             <a:bodyPr wrap="none" lIns="0" tIns="0" rIns="0" bIns="0" anchor="t" anchorCtr="0">
               <a:spAutoFit/>
             </a:bodyPr>
-            <a:lstStyle/>
             <a:p>
               <a:pPr algn="l"/>
               <a:r>
@@ -38098,13 +38438,13 @@
         </p:sp>
         <p:sp>
           <p:nvSpPr>
-            <p:cNvPr id="30" name="TextBox 30"/>
-            <p:cNvSpPr txBox="1"/>
-            <p:nvPr/>
-          </p:nvSpPr>
-          <p:spPr>
-            <a:xfrm>
-              <a:off x="871347" y="5552599"/>
+            <p:cNvPr id="88" name="TextBox 47"/>
+            <p:cNvSpPr txBox="1"/>
+            <p:nvPr/>
+          </p:nvSpPr>
+          <p:spPr>
+            <a:xfrm>
+              <a:off x="871347" y="5647849"/>
               <a:ext cx="2197446" cy="190690"/>
             </a:xfrm>
             <a:prstGeom prst="rect">
@@ -38119,7 +38459,6 @@
             <a:bodyPr wrap="none" lIns="0" tIns="0" rIns="0" bIns="0" anchor="t" anchorCtr="0">
               <a:spAutoFit/>
             </a:bodyPr>
-            <a:lstStyle/>
             <a:p>
               <a:pPr algn="l"/>
               <a:r>
@@ -38147,7 +38486,7 @@
       </p:grpSp>
       <p:grpSp>
         <p:nvGrpSpPr>
-          <p:cNvPr id="34" name="Group 34"/>
+          <p:cNvPr id="89" name="Group 51"/>
           <p:cNvGrpSpPr/>
           <p:nvPr/>
         </p:nvGrpSpPr>
@@ -38161,7 +38500,7 @@
         </p:grpSpPr>
         <p:sp>
           <p:nvSpPr>
-            <p:cNvPr id="32" name="Rectangle 32"/>
+            <p:cNvPr id="90" name="Rectangle 49"/>
             <p:cNvSpPr/>
             <p:nvPr/>
           </p:nvSpPr>
@@ -38187,7 +38526,7 @@
         </p:sp>
         <p:pic>
           <p:nvPicPr>
-            <p:cNvPr id="33" name="Image 33"/>
+            <p:cNvPr id="91" name="Image 50"/>
             <p:cNvPicPr>
               <a:picLocks noChangeAspect="1"/>
             </p:cNvPicPr>
@@ -38212,7 +38551,7 @@
       </p:grpSp>
       <p:grpSp>
         <p:nvGrpSpPr>
-          <p:cNvPr id="36" name="Group 36"/>
+          <p:cNvPr id="92" name="Group 53"/>
           <p:cNvGrpSpPr/>
           <p:nvPr/>
         </p:nvGrpSpPr>
@@ -38226,7 +38565,7 @@
         </p:grpSpPr>
         <p:sp>
           <p:nvSpPr>
-            <p:cNvPr id="35" name="TextBox 35"/>
+            <p:cNvPr id="93" name="TextBox 52"/>
             <p:cNvSpPr txBox="1"/>
             <p:nvPr/>
           </p:nvSpPr>
@@ -38247,7 +38586,6 @@
             <a:bodyPr wrap="none" lIns="0" tIns="0" rIns="0" bIns="0" anchor="t" anchorCtr="0">
               <a:spAutoFit/>
             </a:bodyPr>
-            <a:lstStyle/>
             <a:p>
               <a:pPr algn="ctr"/>
               <a:r>
@@ -38275,7 +38613,7 @@
       </p:grpSp>
       <p:grpSp>
         <p:nvGrpSpPr>
-          <p:cNvPr id="40" name="Group 40"/>
+          <p:cNvPr id="94" name="Group 57"/>
           <p:cNvGrpSpPr/>
           <p:nvPr/>
         </p:nvGrpSpPr>
@@ -38289,7 +38627,7 @@
         </p:grpSpPr>
         <p:sp>
           <p:nvSpPr>
-            <p:cNvPr id="37" name="Rectangle 37"/>
+            <p:cNvPr id="95" name="Rectangle 54"/>
             <p:cNvSpPr/>
             <p:nvPr/>
           </p:nvSpPr>
@@ -38313,7 +38651,7 @@
         </p:sp>
         <p:sp>
           <p:nvSpPr>
-            <p:cNvPr id="38" name="TextBox 38"/>
+            <p:cNvPr id="96" name="TextBox 55"/>
             <p:cNvSpPr txBox="1"/>
             <p:nvPr/>
           </p:nvSpPr>
@@ -38334,7 +38672,6 @@
             <a:bodyPr wrap="none" lIns="0" tIns="0" rIns="0" bIns="0" anchor="t" anchorCtr="0">
               <a:spAutoFit/>
             </a:bodyPr>
-            <a:lstStyle/>
             <a:p>
               <a:pPr algn="ctr"/>
               <a:r>
@@ -38361,7 +38698,7 @@
         </p:sp>
         <p:sp>
           <p:nvSpPr>
-            <p:cNvPr id="39" name="TextBox 39"/>
+            <p:cNvPr id="97" name="TextBox 56"/>
             <p:cNvSpPr txBox="1"/>
             <p:nvPr/>
           </p:nvSpPr>
@@ -38382,7 +38719,6 @@
             <a:bodyPr wrap="none" lIns="0" tIns="0" rIns="0" bIns="0" anchor="t" anchorCtr="0">
               <a:spAutoFit/>
             </a:bodyPr>
-            <a:lstStyle/>
             <a:p>
               <a:pPr algn="ctr"/>
               <a:r>
@@ -38408,57 +38744,9 @@
           </p:txBody>
         </p:sp>
       </p:grpSp>
-      <p:sp>
-        <p:nvSpPr>
-          <p:cNvPr id="41" name="TextBox 41"/>
-          <p:cNvSpPr txBox="1"/>
-          <p:nvPr/>
-        </p:nvSpPr>
-        <p:spPr>
-          <a:xfrm>
-            <a:off x="11103540" y="6497002"/>
-            <a:ext cx="484194" cy="205359"/>
-          </a:xfrm>
-          <a:prstGeom prst="rect">
-            <a:avLst/>
-          </a:prstGeom>
-          <a:noFill/>
-          <a:ln>
-            <a:noFill/>
-          </a:ln>
-        </p:spPr>
-        <p:txBody>
-          <a:bodyPr wrap="none" lIns="0" tIns="0" rIns="0" bIns="0" anchor="t" anchorCtr="0">
-            <a:spAutoFit/>
-          </a:bodyPr>
-          <a:lstStyle/>
-          <a:p>
-            <a:pPr algn="r"/>
-            <a:r>
-              <a:rPr lang="zh-CN" sz="1050" dirty="0">
-                <a:solidFill>
-                  <a:schemeClr val="accent6"/>
-                </a:solidFill>
-                <a:latin typeface="+mn-lt"/>
-                <a:ea typeface="+mn-ea"/>
-                <a:cs typeface="+mn-cs"/>
-              </a:rPr>
-              <a:t>08 / 23</a:t>
-            </a:r>
-            <a:endParaRPr lang="zh-CN" sz="1050" dirty="0">
-              <a:solidFill>
-                <a:schemeClr val="accent6"/>
-              </a:solidFill>
-              <a:latin typeface="+mn-lt"/>
-              <a:ea typeface="+mn-ea"/>
-              <a:cs typeface="+mn-cs"/>
-            </a:endParaRPr>
-          </a:p>
-        </p:txBody>
-      </p:sp>
       <p:grpSp>
         <p:nvGrpSpPr>
-          <p:cNvPr id="42" name="Group 10"/>
+          <p:cNvPr id="98" name="Group 10"/>
           <p:cNvGrpSpPr/>
           <p:nvPr/>
         </p:nvGrpSpPr>
@@ -38472,7 +38760,7 @@
         </p:grpSpPr>
         <p:sp>
           <p:nvSpPr>
-            <p:cNvPr id="43" name="Rectangle 2"/>
+            <p:cNvPr id="99" name="Rectangle 2"/>
             <p:cNvSpPr/>
             <p:nvPr/>
           </p:nvSpPr>
@@ -38496,7 +38784,7 @@
         </p:sp>
         <p:sp>
           <p:nvSpPr>
-            <p:cNvPr id="44" name="TextBox 3"/>
+            <p:cNvPr id="100" name="TextBox 3"/>
             <p:cNvSpPr txBox="1"/>
             <p:nvPr/>
           </p:nvSpPr>
@@ -38517,7 +38805,6 @@
             <a:bodyPr wrap="none" lIns="0" tIns="0" rIns="0" bIns="0" anchor="t" anchorCtr="0">
               <a:spAutoFit/>
             </a:bodyPr>
-            <a:lstStyle/>
             <a:p>
               <a:pPr algn="ctr"/>
               <a:r>
@@ -38544,7 +38831,7 @@
         </p:sp>
         <p:sp>
           <p:nvSpPr>
-            <p:cNvPr id="45" name="Polygon 4"/>
+            <p:cNvPr id="101" name="Polygon 4"/>
             <p:cNvSpPr/>
             <p:nvPr/>
           </p:nvSpPr>
@@ -38584,7 +38871,7 @@
         </p:sp>
         <p:sp>
           <p:nvSpPr>
-            <p:cNvPr id="46" name="Rectangle 5"/>
+            <p:cNvPr id="102" name="Rectangle 5"/>
             <p:cNvSpPr/>
             <p:nvPr/>
           </p:nvSpPr>
@@ -38608,7 +38895,7 @@
         </p:sp>
         <p:sp>
           <p:nvSpPr>
-            <p:cNvPr id="47" name="TextBox 6"/>
+            <p:cNvPr id="103" name="TextBox 6"/>
             <p:cNvSpPr txBox="1"/>
             <p:nvPr/>
           </p:nvSpPr>
@@ -38629,7 +38916,6 @@
             <a:bodyPr wrap="none" lIns="0" tIns="0" rIns="0" bIns="0" anchor="t" anchorCtr="0">
               <a:spAutoFit/>
             </a:bodyPr>
-            <a:lstStyle/>
             <a:p>
               <a:pPr algn="ctr"/>
               <a:r>
@@ -38656,7 +38942,7 @@
         </p:sp>
         <p:sp>
           <p:nvSpPr>
-            <p:cNvPr id="48" name="Polygon 7"/>
+            <p:cNvPr id="104" name="Polygon 7"/>
             <p:cNvSpPr/>
             <p:nvPr/>
           </p:nvSpPr>
@@ -38696,7 +38982,7 @@
         </p:sp>
         <p:sp>
           <p:nvSpPr>
-            <p:cNvPr id="49" name="Rectangle 8"/>
+            <p:cNvPr id="105" name="Rectangle 8"/>
             <p:cNvSpPr/>
             <p:nvPr/>
           </p:nvSpPr>
@@ -38720,7 +39006,7 @@
         </p:sp>
         <p:sp>
           <p:nvSpPr>
-            <p:cNvPr id="50" name="TextBox 9"/>
+            <p:cNvPr id="106" name="TextBox 9"/>
             <p:cNvSpPr txBox="1"/>
             <p:nvPr/>
           </p:nvSpPr>
@@ -38741,7 +39027,6 @@
             <a:bodyPr wrap="none" lIns="0" tIns="0" rIns="0" bIns="0" anchor="t" anchorCtr="0">
               <a:spAutoFit/>
             </a:bodyPr>
-            <a:lstStyle/>
             <a:p>
               <a:pPr algn="ctr"/>
               <a:r>
